--- a/LectureSlides/05_ParameterEstimationAndLikelihood.pptx
+++ b/LectureSlides/05_ParameterEstimationAndLikelihood.pptx
@@ -256,7 +256,7 @@
           <a:p>
             <a:fld id="{FBE8413C-360A-45C8-86BB-6B0679E98A53}" type="datetimeFigureOut">
               <a:rPr lang="en-US" smtClean="0"/>
-              <a:t>10/10/2024</a:t>
+              <a:t>10/20/2026</a:t>
             </a:fld>
             <a:endParaRPr lang="en-US"/>
           </a:p>
@@ -786,7 +786,7 @@
           <a:p>
             <a:fld id="{241EB5C9-1307-BA42-ABA2-0BC069CD8E7F}" type="datetimeFigureOut">
               <a:rPr lang="en-US" smtClean="0"/>
-              <a:t>10/10/2024</a:t>
+              <a:t>10/20/2026</a:t>
             </a:fld>
             <a:endParaRPr lang="en-US"/>
           </a:p>
@@ -954,7 +954,7 @@
           <a:p>
             <a:fld id="{241EB5C9-1307-BA42-ABA2-0BC069CD8E7F}" type="datetimeFigureOut">
               <a:rPr lang="en-US" smtClean="0"/>
-              <a:t>10/10/2024</a:t>
+              <a:t>10/20/2026</a:t>
             </a:fld>
             <a:endParaRPr lang="en-US"/>
           </a:p>
@@ -1132,7 +1132,7 @@
           <a:p>
             <a:fld id="{241EB5C9-1307-BA42-ABA2-0BC069CD8E7F}" type="datetimeFigureOut">
               <a:rPr lang="en-US" smtClean="0"/>
-              <a:t>10/10/2024</a:t>
+              <a:t>10/20/2026</a:t>
             </a:fld>
             <a:endParaRPr lang="en-US"/>
           </a:p>
@@ -1300,7 +1300,7 @@
           <a:p>
             <a:fld id="{241EB5C9-1307-BA42-ABA2-0BC069CD8E7F}" type="datetimeFigureOut">
               <a:rPr lang="en-US" smtClean="0"/>
-              <a:t>10/10/2024</a:t>
+              <a:t>10/20/2026</a:t>
             </a:fld>
             <a:endParaRPr lang="en-US"/>
           </a:p>
@@ -1545,7 +1545,7 @@
           <a:p>
             <a:fld id="{241EB5C9-1307-BA42-ABA2-0BC069CD8E7F}" type="datetimeFigureOut">
               <a:rPr lang="en-US" smtClean="0"/>
-              <a:t>10/10/2024</a:t>
+              <a:t>10/20/2026</a:t>
             </a:fld>
             <a:endParaRPr lang="en-US"/>
           </a:p>
@@ -1830,7 +1830,7 @@
           <a:p>
             <a:fld id="{241EB5C9-1307-BA42-ABA2-0BC069CD8E7F}" type="datetimeFigureOut">
               <a:rPr lang="en-US" smtClean="0"/>
-              <a:t>10/10/2024</a:t>
+              <a:t>10/20/2026</a:t>
             </a:fld>
             <a:endParaRPr lang="en-US"/>
           </a:p>
@@ -2249,7 +2249,7 @@
           <a:p>
             <a:fld id="{241EB5C9-1307-BA42-ABA2-0BC069CD8E7F}" type="datetimeFigureOut">
               <a:rPr lang="en-US" smtClean="0"/>
-              <a:t>10/10/2024</a:t>
+              <a:t>10/20/2026</a:t>
             </a:fld>
             <a:endParaRPr lang="en-US"/>
           </a:p>
@@ -2366,7 +2366,7 @@
           <a:p>
             <a:fld id="{241EB5C9-1307-BA42-ABA2-0BC069CD8E7F}" type="datetimeFigureOut">
               <a:rPr lang="en-US" smtClean="0"/>
-              <a:t>10/10/2024</a:t>
+              <a:t>10/20/2026</a:t>
             </a:fld>
             <a:endParaRPr lang="en-US"/>
           </a:p>
@@ -2461,7 +2461,7 @@
           <a:p>
             <a:fld id="{241EB5C9-1307-BA42-ABA2-0BC069CD8E7F}" type="datetimeFigureOut">
               <a:rPr lang="en-US" smtClean="0"/>
-              <a:t>10/10/2024</a:t>
+              <a:t>10/20/2026</a:t>
             </a:fld>
             <a:endParaRPr lang="en-US"/>
           </a:p>
@@ -2736,7 +2736,7 @@
           <a:p>
             <a:fld id="{241EB5C9-1307-BA42-ABA2-0BC069CD8E7F}" type="datetimeFigureOut">
               <a:rPr lang="en-US" smtClean="0"/>
-              <a:t>10/10/2024</a:t>
+              <a:t>10/20/2026</a:t>
             </a:fld>
             <a:endParaRPr lang="en-US"/>
           </a:p>
@@ -2988,7 +2988,7 @@
           <a:p>
             <a:fld id="{241EB5C9-1307-BA42-ABA2-0BC069CD8E7F}" type="datetimeFigureOut">
               <a:rPr lang="en-US" smtClean="0"/>
-              <a:t>10/10/2024</a:t>
+              <a:t>10/20/2026</a:t>
             </a:fld>
             <a:endParaRPr lang="en-US"/>
           </a:p>
@@ -3199,7 +3199,7 @@
           <a:p>
             <a:fld id="{241EB5C9-1307-BA42-ABA2-0BC069CD8E7F}" type="datetimeFigureOut">
               <a:rPr lang="en-US" smtClean="0"/>
-              <a:t>10/10/2024</a:t>
+              <a:t>10/20/2026</a:t>
             </a:fld>
             <a:endParaRPr lang="en-US"/>
           </a:p>
@@ -3643,30 +3643,6 @@
           </a:p>
         </p:txBody>
       </p:sp>
-      <p:sp>
-        <p:nvSpPr>
-          <p:cNvPr id="4" name="Date Placeholder 3"/>
-          <p:cNvSpPr>
-            <a:spLocks noGrp="1"/>
-          </p:cNvSpPr>
-          <p:nvPr>
-            <p:ph type="dt" sz="half" idx="10"/>
-          </p:nvPr>
-        </p:nvSpPr>
-        <p:spPr/>
-        <p:txBody>
-          <a:bodyPr/>
-          <a:lstStyle/>
-          <a:p>
-            <a:pPr marL="0" lvl="0" indent="0">
-              <a:buNone/>
-            </a:pPr>
-            <a:r>
-              <a:t>09/04/2023</a:t>
-            </a:r>
-          </a:p>
-        </p:txBody>
-      </p:sp>
       <p:pic>
         <p:nvPicPr>
           <p:cNvPr id="5" name="Picture 2" descr="Image result for harvard extension school logo">
@@ -3844,7 +3820,7 @@
                         <m:begChr m:val="["/>
                         <m:endChr m:val="]"/>
                         <m:ctrlPr>
-                          <a:rPr lang="ar-AE" i="1">
+                          <a:rPr lang="ar-AE">
                             <a:latin typeface="Cambria Math" panose="02040503050406030204" pitchFamily="18" charset="0"/>
                           </a:rPr>
                         </m:ctrlPr>
@@ -3854,31 +3830,7 @@
                           <a:rPr lang="ar-AE">
                             <a:latin typeface="Cambria Math" panose="02040503050406030204" pitchFamily="18" charset="0"/>
                           </a:rPr>
-                          <m:t>25</m:t>
-                        </m:r>
-                        <m:r>
-                          <a:rPr lang="ar-AE">
-                            <a:latin typeface="Cambria Math" panose="02040503050406030204" pitchFamily="18" charset="0"/>
-                          </a:rPr>
-                          <m:t>, </m:t>
-                        </m:r>
-                        <m:r>
-                          <a:rPr lang="ar-AE">
-                            <a:latin typeface="Cambria Math" panose="02040503050406030204" pitchFamily="18" charset="0"/>
-                          </a:rPr>
-                          <m:t>50</m:t>
-                        </m:r>
-                        <m:r>
-                          <a:rPr lang="ar-AE">
-                            <a:latin typeface="Cambria Math" panose="02040503050406030204" pitchFamily="18" charset="0"/>
-                          </a:rPr>
-                          <m:t>, </m:t>
-                        </m:r>
-                        <m:r>
-                          <a:rPr lang="ar-AE">
-                            <a:latin typeface="Cambria Math" panose="02040503050406030204" pitchFamily="18" charset="0"/>
-                          </a:rPr>
-                          <m:t>100</m:t>
+                          <m:t>25, 50, 100</m:t>
                         </m:r>
                       </m:e>
                     </m:d>
@@ -3904,25 +3856,7 @@
                       <a:rPr lang="en-US">
                         <a:latin typeface="Cambria Math" panose="02040503050406030204" pitchFamily="18" charset="0"/>
                       </a:rPr>
-                      <m:t>=</m:t>
-                    </m:r>
-                    <m:r>
-                      <a:rPr lang="en-US">
-                        <a:latin typeface="Cambria Math" panose="02040503050406030204" pitchFamily="18" charset="0"/>
-                      </a:rPr>
-                      <m:t>0</m:t>
-                    </m:r>
-                    <m:r>
-                      <a:rPr lang="en-US">
-                        <a:latin typeface="Cambria Math" panose="02040503050406030204" pitchFamily="18" charset="0"/>
-                      </a:rPr>
-                      <m:t>.</m:t>
-                    </m:r>
-                    <m:r>
-                      <a:rPr lang="en-US">
-                        <a:latin typeface="Cambria Math" panose="02040503050406030204" pitchFamily="18" charset="0"/>
-                      </a:rPr>
-                      <m:t>5</m:t>
+                      <m:t>=0.5</m:t>
                     </m:r>
                   </m:oMath>
                 </a14:m>
@@ -4083,7 +4017,7 @@
             </a:pPr>
             <a:r>
               <a:rPr lang="en-US" b="1" dirty="0"/>
-              <a:t>Binomial Likelihood</a:t>
+              <a:t>Example: Binomial Likelihood</a:t>
             </a:r>
             <a:endParaRPr dirty="0"/>
           </a:p>
@@ -4261,8 +4195,8 @@
           <a:chExt cx="0" cy="0"/>
         </a:xfrm>
       </p:grpSpPr>
-      <mc:AlternateContent xmlns:mc="http://schemas.openxmlformats.org/markup-compatibility/2006">
-        <mc:Choice xmlns:a14="http://schemas.microsoft.com/office/drawing/2010/main" Requires="a14">
+      <mc:AlternateContent xmlns:mc="http://schemas.openxmlformats.org/markup-compatibility/2006" xmlns:a14="http://schemas.microsoft.com/office/drawing/2010/main">
+        <mc:Choice Requires="a14">
           <p:sp>
             <p:nvSpPr>
               <p:cNvPr id="3" name="Content Placeholder 2"/>
@@ -4299,10 +4233,7 @@
                 </a:pPr>
                 <a14:m>
                   <m:oMathPara xmlns:m="http://schemas.openxmlformats.org/officeDocument/2006/math">
-                    <m:oMathParaPr>
-                      <m:jc m:val="centerGroup"/>
-                    </m:oMathParaPr>
-                    <m:oMath xmlns:m="http://schemas.openxmlformats.org/officeDocument/2006/math">
+                    <m:oMath>
                       <m:f>
                         <m:fPr>
                           <m:ctrlPr>
@@ -4382,13 +4313,7 @@
                         <a:rPr lang="en-US" sz="1600" b="0" i="1" smtClean="0">
                           <a:latin typeface="Cambria Math" panose="02040503050406030204" pitchFamily="18" charset="0"/>
                         </a:rPr>
-                        <m:t>=</m:t>
-                      </m:r>
-                      <m:r>
-                        <a:rPr lang="en-US" sz="1600" b="0" i="1" smtClean="0">
-                          <a:latin typeface="Cambria Math" panose="02040503050406030204" pitchFamily="18" charset="0"/>
-                        </a:rPr>
-                        <m:t>0</m:t>
+                        <m:t>=0</m:t>
                       </m:r>
                     </m:oMath>
                   </m:oMathPara>
@@ -4401,10 +4326,7 @@
                 </a:pPr>
                 <a14:m>
                   <m:oMathPara xmlns:m="http://schemas.openxmlformats.org/officeDocument/2006/math">
-                    <m:oMathParaPr>
-                      <m:jc m:val="centerGroup"/>
-                    </m:oMathParaPr>
-                    <m:oMath xmlns:m="http://schemas.openxmlformats.org/officeDocument/2006/math">
+                    <m:oMath>
                       <m:f>
                         <m:fPr>
                           <m:ctrlPr>
@@ -4419,6 +4341,7 @@
                               <m:ctrlPr>
                                 <a:rPr lang="ar-AE" sz="1600" i="1" smtClean="0">
                                   <a:latin typeface="Cambria Math" panose="02040503050406030204" pitchFamily="18" charset="0"/>
+                                  <a:ea typeface="Cambria Math" panose="02040503050406030204" pitchFamily="18" charset="0"/>
                                 </a:rPr>
                               </m:ctrlPr>
                             </m:sSupPr>
@@ -4436,13 +4359,7 @@
                                 <a:rPr lang="en-US" sz="1600" b="0" i="1" smtClean="0">
                                   <a:latin typeface="Cambria Math" panose="02040503050406030204" pitchFamily="18" charset="0"/>
                                 </a:rPr>
-                                <m:t>2</m:t>
-                              </m:r>
-                              <m:r>
-                                <a:rPr lang="en-US" sz="1600" b="0" i="1" smtClean="0">
-                                  <a:latin typeface="Cambria Math" panose="02040503050406030204" pitchFamily="18" charset="0"/>
-                                </a:rPr>
-                                <m:t> </m:t>
+                                <m:t>2 </m:t>
                               </m:r>
                             </m:sup>
                           </m:sSup>
@@ -4490,6 +4407,7 @@
                               <m:ctrlPr>
                                 <a:rPr lang="ar-AE" sz="1600" i="1">
                                   <a:latin typeface="Cambria Math" panose="02040503050406030204" pitchFamily="18" charset="0"/>
+                                  <a:ea typeface="Cambria Math" panose="02040503050406030204" pitchFamily="18" charset="0"/>
                                 </a:rPr>
                               </m:ctrlPr>
                             </m:sSupPr>
@@ -4579,7 +4497,7 @@
                       <m:accPr>
                         <m:chr m:val="⃗"/>
                         <m:ctrlPr>
-                          <a:rPr lang="ar-AE" sz="1600" i="1">
+                          <a:rPr lang="ar-AE" sz="1600">
                             <a:latin typeface="Cambria Math" panose="02040503050406030204" pitchFamily="18" charset="0"/>
                           </a:rPr>
                         </m:ctrlPr>
@@ -4676,7 +4594,7 @@
             </p:txBody>
           </p:sp>
         </mc:Choice>
-        <mc:Fallback>
+        <mc:Fallback xmlns="">
           <p:sp>
             <p:nvSpPr>
               <p:cNvPr id="3" name="Content Placeholder 2"/>
@@ -4850,7 +4768,7 @@
                           <m:accPr>
                             <m:chr m:val="⃗"/>
                             <m:ctrlPr>
-                              <a:rPr sz="1500" i="1">
+                              <a:rPr sz="1500">
                                 <a:latin typeface="Cambria Math" panose="02040503050406030204" pitchFamily="18" charset="0"/>
                               </a:rPr>
                             </m:ctrlPr>
@@ -4882,7 +4800,7 @@
                     <m:oMathParaPr>
                       <m:jc m:val="center"/>
                     </m:oMathParaPr>
-                    <m:oMath xmlns:m="http://schemas.openxmlformats.org/officeDocument/2006/math">
+                    <m:oMath>
                       <m:r>
                         <a:rPr sz="1500">
                           <a:latin typeface="Cambria Math" panose="02040503050406030204" pitchFamily="18" charset="0"/>
@@ -4902,7 +4820,7 @@
                             <m:accPr>
                               <m:chr m:val="⃗"/>
                               <m:ctrlPr>
-                                <a:rPr sz="1500" i="1">
+                                <a:rPr sz="1500">
                                   <a:latin typeface="Cambria Math" panose="02040503050406030204" pitchFamily="18" charset="0"/>
                                 </a:rPr>
                               </m:ctrlPr>
@@ -4963,7 +4881,7 @@
                                     <m:sSup>
                                       <m:sSupPr>
                                         <m:ctrlPr>
-                                          <a:rPr sz="1500" i="1">
+                                          <a:rPr sz="1500">
                                             <a:latin typeface="Cambria Math" panose="02040503050406030204" pitchFamily="18" charset="0"/>
                                           </a:rPr>
                                         </m:ctrlPr>
@@ -4994,7 +4912,7 @@
                                     <m:d>
                                       <m:dPr>
                                         <m:ctrlPr>
-                                          <a:rPr sz="1500" i="1">
+                                          <a:rPr sz="1500">
                                             <a:latin typeface="Cambria Math" panose="02040503050406030204" pitchFamily="18" charset="0"/>
                                           </a:rPr>
                                         </m:ctrlPr>
@@ -5031,7 +4949,7 @@
                                     <m:sSubSup>
                                       <m:sSubSupPr>
                                         <m:ctrlPr>
-                                          <a:rPr sz="1500" i="1">
+                                          <a:rPr sz="1500">
                                             <a:latin typeface="Cambria Math" panose="02040503050406030204" pitchFamily="18" charset="0"/>
                                           </a:rPr>
                                         </m:ctrlPr>
@@ -5077,7 +4995,7 @@
                                     <m:sSup>
                                       <m:sSupPr>
                                         <m:ctrlPr>
-                                          <a:rPr sz="1500" i="1">
+                                          <a:rPr sz="1500">
                                             <a:latin typeface="Cambria Math" panose="02040503050406030204" pitchFamily="18" charset="0"/>
                                           </a:rPr>
                                         </m:ctrlPr>
@@ -5108,7 +5026,7 @@
                                     <m:d>
                                       <m:dPr>
                                         <m:ctrlPr>
-                                          <a:rPr sz="1500" i="1">
+                                          <a:rPr sz="1500">
                                             <a:latin typeface="Cambria Math" panose="02040503050406030204" pitchFamily="18" charset="0"/>
                                           </a:rPr>
                                         </m:ctrlPr>
@@ -5145,7 +5063,7 @@
                                     <m:sSub>
                                       <m:sSubPr>
                                         <m:ctrlPr>
-                                          <a:rPr sz="1500" i="1">
+                                          <a:rPr sz="1500">
                                             <a:latin typeface="Cambria Math" panose="02040503050406030204" pitchFamily="18" charset="0"/>
                                           </a:rPr>
                                         </m:ctrlPr>
@@ -5182,7 +5100,7 @@
                                     <m:sSub>
                                       <m:sSubPr>
                                         <m:ctrlPr>
-                                          <a:rPr sz="1500" i="1">
+                                          <a:rPr sz="1500">
                                             <a:latin typeface="Cambria Math" panose="02040503050406030204" pitchFamily="18" charset="0"/>
                                           </a:rPr>
                                         </m:ctrlPr>
@@ -5228,7 +5146,7 @@
                                     <m:sSup>
                                       <m:sSupPr>
                                         <m:ctrlPr>
-                                          <a:rPr sz="1500" i="1">
+                                          <a:rPr sz="1500">
                                             <a:latin typeface="Cambria Math" panose="02040503050406030204" pitchFamily="18" charset="0"/>
                                           </a:rPr>
                                         </m:ctrlPr>
@@ -5259,7 +5177,7 @@
                                     <m:d>
                                       <m:dPr>
                                         <m:ctrlPr>
-                                          <a:rPr sz="1500" i="1">
+                                          <a:rPr sz="1500">
                                             <a:latin typeface="Cambria Math" panose="02040503050406030204" pitchFamily="18" charset="0"/>
                                           </a:rPr>
                                         </m:ctrlPr>
@@ -5296,7 +5214,7 @@
                                     <m:sSub>
                                       <m:sSubPr>
                                         <m:ctrlPr>
-                                          <a:rPr sz="1500" i="1">
+                                          <a:rPr sz="1500">
                                             <a:latin typeface="Cambria Math" panose="02040503050406030204" pitchFamily="18" charset="0"/>
                                           </a:rPr>
                                         </m:ctrlPr>
@@ -5333,7 +5251,7 @@
                                     <m:sSub>
                                       <m:sSubPr>
                                         <m:ctrlPr>
-                                          <a:rPr sz="1500" i="1">
+                                          <a:rPr sz="1500">
                                             <a:latin typeface="Cambria Math" panose="02040503050406030204" pitchFamily="18" charset="0"/>
                                           </a:rPr>
                                         </m:ctrlPr>
@@ -5373,7 +5291,7 @@
                                     <m:sSup>
                                       <m:sSupPr>
                                         <m:ctrlPr>
-                                          <a:rPr sz="1500" i="1">
+                                          <a:rPr sz="1500">
                                             <a:latin typeface="Cambria Math" panose="02040503050406030204" pitchFamily="18" charset="0"/>
                                           </a:rPr>
                                         </m:ctrlPr>
@@ -5404,7 +5322,7 @@
                                     <m:d>
                                       <m:dPr>
                                         <m:ctrlPr>
-                                          <a:rPr sz="1500" i="1">
+                                          <a:rPr sz="1500">
                                             <a:latin typeface="Cambria Math" panose="02040503050406030204" pitchFamily="18" charset="0"/>
                                           </a:rPr>
                                         </m:ctrlPr>
@@ -5441,7 +5359,7 @@
                                     <m:sSub>
                                       <m:sSubPr>
                                         <m:ctrlPr>
-                                          <a:rPr sz="1500" i="1">
+                                          <a:rPr sz="1500">
                                             <a:latin typeface="Cambria Math" panose="02040503050406030204" pitchFamily="18" charset="0"/>
                                           </a:rPr>
                                         </m:ctrlPr>
@@ -5478,7 +5396,7 @@
                                     <m:sSub>
                                       <m:sSubPr>
                                         <m:ctrlPr>
-                                          <a:rPr sz="1500" i="1">
+                                          <a:rPr sz="1500">
                                             <a:latin typeface="Cambria Math" panose="02040503050406030204" pitchFamily="18" charset="0"/>
                                           </a:rPr>
                                         </m:ctrlPr>
@@ -5516,7 +5434,7 @@
                                     <m:sSup>
                                       <m:sSupPr>
                                         <m:ctrlPr>
-                                          <a:rPr sz="1500" i="1">
+                                          <a:rPr sz="1500">
                                             <a:latin typeface="Cambria Math" panose="02040503050406030204" pitchFamily="18" charset="0"/>
                                           </a:rPr>
                                         </m:ctrlPr>
@@ -5547,7 +5465,7 @@
                                     <m:d>
                                       <m:dPr>
                                         <m:ctrlPr>
-                                          <a:rPr sz="1500" i="1">
+                                          <a:rPr sz="1500">
                                             <a:latin typeface="Cambria Math" panose="02040503050406030204" pitchFamily="18" charset="0"/>
                                           </a:rPr>
                                         </m:ctrlPr>
@@ -5584,7 +5502,7 @@
                                     <m:sSubSup>
                                       <m:sSubSupPr>
                                         <m:ctrlPr>
-                                          <a:rPr sz="1500" i="1">
+                                          <a:rPr sz="1500">
                                             <a:latin typeface="Cambria Math" panose="02040503050406030204" pitchFamily="18" charset="0"/>
                                           </a:rPr>
                                         </m:ctrlPr>
@@ -5638,7 +5556,7 @@
                                     <m:sSup>
                                       <m:sSupPr>
                                         <m:ctrlPr>
-                                          <a:rPr sz="1500" i="1">
+                                          <a:rPr sz="1500">
                                             <a:latin typeface="Cambria Math" panose="02040503050406030204" pitchFamily="18" charset="0"/>
                                           </a:rPr>
                                         </m:ctrlPr>
@@ -5669,7 +5587,7 @@
                                     <m:d>
                                       <m:dPr>
                                         <m:ctrlPr>
-                                          <a:rPr sz="1500" i="1">
+                                          <a:rPr sz="1500">
                                             <a:latin typeface="Cambria Math" panose="02040503050406030204" pitchFamily="18" charset="0"/>
                                           </a:rPr>
                                         </m:ctrlPr>
@@ -5706,7 +5624,7 @@
                                     <m:sSub>
                                       <m:sSubPr>
                                         <m:ctrlPr>
-                                          <a:rPr sz="1500" i="1">
+                                          <a:rPr sz="1500">
                                             <a:latin typeface="Cambria Math" panose="02040503050406030204" pitchFamily="18" charset="0"/>
                                           </a:rPr>
                                         </m:ctrlPr>
@@ -5743,7 +5661,7 @@
                                     <m:sSub>
                                       <m:sSubPr>
                                         <m:ctrlPr>
-                                          <a:rPr sz="1500" i="1">
+                                          <a:rPr sz="1500">
                                             <a:latin typeface="Cambria Math" panose="02040503050406030204" pitchFamily="18" charset="0"/>
                                           </a:rPr>
                                         </m:ctrlPr>
@@ -5817,7 +5735,7 @@
                                     <m:sSup>
                                       <m:sSupPr>
                                         <m:ctrlPr>
-                                          <a:rPr sz="1500" i="1">
+                                          <a:rPr sz="1500">
                                             <a:latin typeface="Cambria Math" panose="02040503050406030204" pitchFamily="18" charset="0"/>
                                           </a:rPr>
                                         </m:ctrlPr>
@@ -5848,7 +5766,7 @@
                                     <m:d>
                                       <m:dPr>
                                         <m:ctrlPr>
-                                          <a:rPr sz="1500" i="1">
+                                          <a:rPr sz="1500">
                                             <a:latin typeface="Cambria Math" panose="02040503050406030204" pitchFamily="18" charset="0"/>
                                           </a:rPr>
                                         </m:ctrlPr>
@@ -5885,7 +5803,7 @@
                                     <m:sSub>
                                       <m:sSubPr>
                                         <m:ctrlPr>
-                                          <a:rPr sz="1500" i="1">
+                                          <a:rPr sz="1500">
                                             <a:latin typeface="Cambria Math" panose="02040503050406030204" pitchFamily="18" charset="0"/>
                                           </a:rPr>
                                         </m:ctrlPr>
@@ -5922,7 +5840,7 @@
                                     <m:sSub>
                                       <m:sSubPr>
                                         <m:ctrlPr>
-                                          <a:rPr sz="1500" i="1">
+                                          <a:rPr sz="1500">
                                             <a:latin typeface="Cambria Math" panose="02040503050406030204" pitchFamily="18" charset="0"/>
                                           </a:rPr>
                                         </m:ctrlPr>
@@ -5960,7 +5878,7 @@
                                     <m:sSup>
                                       <m:sSupPr>
                                         <m:ctrlPr>
-                                          <a:rPr sz="1500" i="1">
+                                          <a:rPr sz="1500">
                                             <a:latin typeface="Cambria Math" panose="02040503050406030204" pitchFamily="18" charset="0"/>
                                           </a:rPr>
                                         </m:ctrlPr>
@@ -5991,7 +5909,7 @@
                                     <m:d>
                                       <m:dPr>
                                         <m:ctrlPr>
-                                          <a:rPr sz="1500" i="1">
+                                          <a:rPr sz="1500">
                                             <a:latin typeface="Cambria Math" panose="02040503050406030204" pitchFamily="18" charset="0"/>
                                           </a:rPr>
                                         </m:ctrlPr>
@@ -6028,7 +5946,7 @@
                                     <m:sSub>
                                       <m:sSubPr>
                                         <m:ctrlPr>
-                                          <a:rPr sz="1500" i="1">
+                                          <a:rPr sz="1500">
                                             <a:latin typeface="Cambria Math" panose="02040503050406030204" pitchFamily="18" charset="0"/>
                                           </a:rPr>
                                         </m:ctrlPr>
@@ -6065,7 +5983,7 @@
                                     <m:sSub>
                                       <m:sSubPr>
                                         <m:ctrlPr>
-                                          <a:rPr sz="1500" i="1">
+                                          <a:rPr sz="1500">
                                             <a:latin typeface="Cambria Math" panose="02040503050406030204" pitchFamily="18" charset="0"/>
                                           </a:rPr>
                                         </m:ctrlPr>
@@ -6111,7 +6029,7 @@
                                     <m:sSup>
                                       <m:sSupPr>
                                         <m:ctrlPr>
-                                          <a:rPr sz="1500" i="1">
+                                          <a:rPr sz="1500">
                                             <a:latin typeface="Cambria Math" panose="02040503050406030204" pitchFamily="18" charset="0"/>
                                           </a:rPr>
                                         </m:ctrlPr>
@@ -6142,7 +6060,7 @@
                                     <m:d>
                                       <m:dPr>
                                         <m:ctrlPr>
-                                          <a:rPr sz="1500" i="1">
+                                          <a:rPr sz="1500">
                                             <a:latin typeface="Cambria Math" panose="02040503050406030204" pitchFamily="18" charset="0"/>
                                           </a:rPr>
                                         </m:ctrlPr>
@@ -6179,7 +6097,7 @@
                                     <m:sSubSup>
                                       <m:sSubSupPr>
                                         <m:ctrlPr>
-                                          <a:rPr sz="1500" i="1">
+                                          <a:rPr sz="1500">
                                             <a:latin typeface="Cambria Math" panose="02040503050406030204" pitchFamily="18" charset="0"/>
                                           </a:rPr>
                                         </m:ctrlPr>
@@ -6418,7 +6336,7 @@
                     <m:oMathParaPr>
                       <m:jc m:val="center"/>
                     </m:oMathParaPr>
-                    <m:oMath xmlns:m="http://schemas.openxmlformats.org/officeDocument/2006/math">
+                    <m:oMath>
                       <m:r>
                         <a:rPr lang="en-US">
                           <a:latin typeface="Cambria Math" panose="02040503050406030204" pitchFamily="18" charset="0"/>
@@ -6438,7 +6356,7 @@
                             <m:accPr>
                               <m:chr m:val="⃗"/>
                               <m:ctrlPr>
-                                <a:rPr lang="ar-AE" i="1">
+                                <a:rPr lang="ar-AE">
                                   <a:latin typeface="Cambria Math" panose="02040503050406030204" pitchFamily="18" charset="0"/>
                                 </a:rPr>
                               </m:ctrlPr>
@@ -6471,7 +6389,7 @@
                           <m:begChr m:val="{"/>
                           <m:endChr m:val="}"/>
                           <m:ctrlPr>
-                            <a:rPr lang="ar-AE" i="1">
+                            <a:rPr lang="ar-AE">
                               <a:latin typeface="Cambria Math" panose="02040503050406030204" pitchFamily="18" charset="0"/>
                             </a:rPr>
                           </m:ctrlPr>
@@ -6496,7 +6414,7 @@
                                 <m:accPr>
                                   <m:chr m:val="⃗"/>
                                   <m:ctrlPr>
-                                    <a:rPr lang="ar-AE" i="1">
+                                    <a:rPr lang="ar-AE">
                                       <a:latin typeface="Cambria Math" panose="02040503050406030204" pitchFamily="18" charset="0"/>
                                     </a:rPr>
                                   </m:ctrlPr>
@@ -6549,7 +6467,7 @@
                               <m:sSup>
                                 <m:sSupPr>
                                   <m:ctrlPr>
-                                    <a:rPr lang="ar-AE" i="1">
+                                    <a:rPr lang="ar-AE">
                                       <a:latin typeface="Cambria Math" panose="02040503050406030204" pitchFamily="18" charset="0"/>
                                     </a:rPr>
                                   </m:ctrlPr>
@@ -6586,7 +6504,7 @@
                               <m:d>
                                 <m:dPr>
                                   <m:ctrlPr>
-                                    <a:rPr lang="ar-AE" i="1">
+                                    <a:rPr lang="ar-AE">
                                       <a:latin typeface="Cambria Math" panose="02040503050406030204" pitchFamily="18" charset="0"/>
                                     </a:rPr>
                                   </m:ctrlPr>
@@ -6623,7 +6541,7 @@
                               <m:sSup>
                                 <m:sSupPr>
                                   <m:ctrlPr>
-                                    <a:rPr lang="ar-AE" i="1">
+                                    <a:rPr lang="ar-AE">
                                       <a:latin typeface="Cambria Math" panose="02040503050406030204" pitchFamily="18" charset="0"/>
                                     </a:rPr>
                                   </m:ctrlPr>
@@ -6794,7 +6712,7 @@
                       <m:accPr>
                         <m:chr m:val="̂"/>
                         <m:ctrlPr>
-                          <a:rPr i="1">
+                          <a:rPr>
                             <a:latin typeface="Cambria Math" panose="02040503050406030204" pitchFamily="18" charset="0"/>
                           </a:rPr>
                         </m:ctrlPr>
@@ -6831,23 +6749,17 @@
                     <m:oMathParaPr>
                       <m:jc m:val="center"/>
                     </m:oMathParaPr>
-                    <m:oMath xmlns:m="http://schemas.openxmlformats.org/officeDocument/2006/math">
+                    <m:oMath>
                       <m:r>
                         <a:rPr>
                           <a:latin typeface="Cambria Math" panose="02040503050406030204" pitchFamily="18" charset="0"/>
                         </a:rPr>
-                        <m:t>0</m:t>
-                      </m:r>
-                      <m:r>
-                        <a:rPr>
-                          <a:latin typeface="Cambria Math" panose="02040503050406030204" pitchFamily="18" charset="0"/>
-                        </a:rPr>
-                        <m:t>=</m:t>
+                        <m:t>0=</m:t>
                       </m:r>
                       <m:f>
                         <m:fPr>
                           <m:ctrlPr>
-                            <a:rPr i="1">
+                            <a:rPr>
                               <a:latin typeface="Cambria Math" panose="02040503050406030204" pitchFamily="18" charset="0"/>
                             </a:rPr>
                           </m:ctrlPr>
@@ -6874,7 +6786,7 @@
                           <m:d>
                             <m:dPr>
                               <m:ctrlPr>
-                                <a:rPr i="1">
+                                <a:rPr>
                                   <a:latin typeface="Cambria Math" panose="02040503050406030204" pitchFamily="18" charset="0"/>
                                 </a:rPr>
                               </m:ctrlPr>
@@ -6919,7 +6831,7 @@
                       <m:f>
                         <m:fPr>
                           <m:ctrlPr>
-                            <a:rPr i="1">
+                            <a:rPr>
                               <a:latin typeface="Cambria Math" panose="02040503050406030204" pitchFamily="18" charset="0"/>
                             </a:rPr>
                           </m:ctrlPr>
@@ -6955,7 +6867,7 @@
                               <m:d>
                                 <m:dPr>
                                   <m:ctrlPr>
-                                    <a:rPr i="1">
+                                    <a:rPr>
                                       <a:latin typeface="Cambria Math" panose="02040503050406030204" pitchFamily="18" charset="0"/>
                                     </a:rPr>
                                   </m:ctrlPr>
@@ -7007,7 +6919,7 @@
                           <m:sSup>
                             <m:sSupPr>
                               <m:ctrlPr>
-                                <a:rPr i="1">
+                                <a:rPr>
                                   <a:latin typeface="Cambria Math" panose="02040503050406030204" pitchFamily="18" charset="0"/>
                                 </a:rPr>
                               </m:ctrlPr>
@@ -7063,7 +6975,7 @@
                                     <m:accPr>
                                       <m:chr m:val="̂"/>
                                       <m:ctrlPr>
-                                        <a:rPr i="1">
+                                        <a:rPr>
                                           <a:latin typeface="Cambria Math" panose="02040503050406030204" pitchFamily="18" charset="0"/>
                                         </a:rPr>
                                       </m:ctrlPr>
@@ -7100,7 +7012,7 @@
                           <m:sSup>
                             <m:sSupPr>
                               <m:ctrlPr>
-                                <a:rPr i="1">
+                                <a:rPr>
                                   <a:latin typeface="Cambria Math" panose="02040503050406030204" pitchFamily="18" charset="0"/>
                                 </a:rPr>
                               </m:ctrlPr>
@@ -7137,7 +7049,7 @@
                             <m:accPr>
                               <m:chr m:val="̂"/>
                               <m:ctrlPr>
-                                <a:rPr i="1">
+                                <a:rPr>
                                   <a:latin typeface="Cambria Math" panose="02040503050406030204" pitchFamily="18" charset="0"/>
                                 </a:rPr>
                               </m:ctrlPr>
@@ -7188,18 +7100,12 @@
                     <m:oMathParaPr>
                       <m:jc m:val="center"/>
                     </m:oMathParaPr>
-                    <m:oMath xmlns:m="http://schemas.openxmlformats.org/officeDocument/2006/math">
+                    <m:oMath>
                       <m:r>
                         <a:rPr>
                           <a:latin typeface="Cambria Math" panose="02040503050406030204" pitchFamily="18" charset="0"/>
                         </a:rPr>
-                        <m:t>0</m:t>
-                      </m:r>
-                      <m:r>
-                        <a:rPr>
-                          <a:latin typeface="Cambria Math" panose="02040503050406030204" pitchFamily="18" charset="0"/>
-                        </a:rPr>
-                        <m:t>=</m:t>
+                        <m:t>0=</m:t>
                       </m:r>
                       <m:r>
                         <a:rPr>
@@ -7225,7 +7131,7 @@
                           <m:d>
                             <m:dPr>
                               <m:ctrlPr>
-                                <a:rPr i="1">
+                                <a:rPr>
                                   <a:latin typeface="Cambria Math" panose="02040503050406030204" pitchFamily="18" charset="0"/>
                                 </a:rPr>
                               </m:ctrlPr>
@@ -7289,7 +7195,7 @@
                                 <m:accPr>
                                   <m:chr m:val="̂"/>
                                   <m:ctrlPr>
-                                    <a:rPr i="1">
+                                    <a:rPr>
                                       <a:latin typeface="Cambria Math" panose="02040503050406030204" pitchFamily="18" charset="0"/>
                                     </a:rPr>
                                   </m:ctrlPr>
@@ -7328,7 +7234,7 @@
                             <m:accPr>
                               <m:chr m:val="̂"/>
                               <m:ctrlPr>
-                                <a:rPr i="1">
+                                <a:rPr>
                                   <a:latin typeface="Cambria Math" panose="02040503050406030204" pitchFamily="18" charset="0"/>
                                 </a:rPr>
                               </m:ctrlPr>
@@ -7389,7 +7295,7 @@
                         <m:d>
                           <m:dPr>
                             <m:ctrlPr>
-                              <a:rPr i="1">
+                              <a:rPr>
                                 <a:latin typeface="Cambria Math" panose="02040503050406030204" pitchFamily="18" charset="0"/>
                               </a:rPr>
                             </m:ctrlPr>
@@ -7469,7 +7375,7 @@
                               <m:accPr>
                                 <m:chr m:val="̂"/>
                                 <m:ctrlPr>
-                                  <a:rPr i="1">
+                                  <a:rPr>
                                     <a:latin typeface="Cambria Math" panose="02040503050406030204" pitchFamily="18" charset="0"/>
                                   </a:rPr>
                                 </m:ctrlPr>
@@ -7651,7 +7557,7 @@
                       <m:accPr>
                         <m:chr m:val="̂"/>
                         <m:ctrlPr>
-                          <a:rPr i="1">
+                          <a:rPr>
                             <a:latin typeface="Cambria Math" panose="02040503050406030204" pitchFamily="18" charset="0"/>
                           </a:rPr>
                         </m:ctrlPr>
@@ -7681,12 +7587,12 @@
                     <m:oMathParaPr>
                       <m:jc m:val="center"/>
                     </m:oMathParaPr>
-                    <m:oMath xmlns:m="http://schemas.openxmlformats.org/officeDocument/2006/math">
+                    <m:oMath>
                       <m:acc>
                         <m:accPr>
                           <m:chr m:val="̂"/>
                           <m:ctrlPr>
-                            <a:rPr i="1">
+                            <a:rPr>
                               <a:latin typeface="Cambria Math" panose="02040503050406030204" pitchFamily="18" charset="0"/>
                             </a:rPr>
                           </m:ctrlPr>
@@ -7721,7 +7627,7 @@
                       <m:f>
                         <m:fPr>
                           <m:ctrlPr>
-                            <a:rPr i="1">
+                            <a:rPr>
                               <a:latin typeface="Cambria Math" panose="02040503050406030204" pitchFamily="18" charset="0"/>
                             </a:rPr>
                           </m:ctrlPr>
@@ -7751,7 +7657,7 @@
                               <m:d>
                                 <m:dPr>
                                   <m:ctrlPr>
-                                    <a:rPr i="1">
+                                    <a:rPr>
                                       <a:latin typeface="Cambria Math" panose="02040503050406030204" pitchFamily="18" charset="0"/>
                                     </a:rPr>
                                   </m:ctrlPr>
@@ -7829,7 +7735,7 @@
                                     <m:accPr>
                                       <m:chr m:val="̂"/>
                                       <m:ctrlPr>
-                                        <a:rPr i="1">
+                                        <a:rPr>
                                           <a:latin typeface="Cambria Math" panose="02040503050406030204" pitchFamily="18" charset="0"/>
                                         </a:rPr>
                                       </m:ctrlPr>
@@ -7900,11 +7806,11 @@
                     <m:oMathParaPr>
                       <m:jc m:val="center"/>
                     </m:oMathParaPr>
-                    <m:oMath xmlns:m="http://schemas.openxmlformats.org/officeDocument/2006/math">
+                    <m:oMath>
                       <m:f>
                         <m:fPr>
                           <m:ctrlPr>
-                            <a:rPr i="1">
+                            <a:rPr>
                               <a:latin typeface="Cambria Math" panose="02040503050406030204" pitchFamily="18" charset="0"/>
                             </a:rPr>
                           </m:ctrlPr>
@@ -7940,7 +7846,7 @@
                               <m:d>
                                 <m:dPr>
                                   <m:ctrlPr>
-                                    <a:rPr i="1">
+                                    <a:rPr>
                                       <a:latin typeface="Cambria Math" panose="02040503050406030204" pitchFamily="18" charset="0"/>
                                     </a:rPr>
                                   </m:ctrlPr>
@@ -7984,7 +7890,7 @@
                         <m:accPr>
                           <m:chr m:val="̇"/>
                           <m:ctrlPr>
-                            <a:rPr i="1">
+                            <a:rPr>
                               <a:latin typeface="Cambria Math" panose="02040503050406030204" pitchFamily="18" charset="0"/>
                             </a:rPr>
                           </m:ctrlPr>
@@ -8013,7 +7919,7 @@
                       <m:d>
                         <m:dPr>
                           <m:ctrlPr>
-                            <a:rPr i="1">
+                            <a:rPr>
                               <a:latin typeface="Cambria Math" panose="02040503050406030204" pitchFamily="18" charset="0"/>
                             </a:rPr>
                           </m:ctrlPr>
@@ -8023,30 +7929,12 @@
                             <a:rPr>
                               <a:latin typeface="Cambria Math" panose="02040503050406030204" pitchFamily="18" charset="0"/>
                             </a:rPr>
-                            <m:t>0</m:t>
-                          </m:r>
-                          <m:r>
-                            <a:rPr>
-                              <a:latin typeface="Cambria Math" panose="02040503050406030204" pitchFamily="18" charset="0"/>
-                            </a:rPr>
-                            <m:t>,</m:t>
-                          </m:r>
-                          <m:r>
-                            <a:rPr>
-                              <a:latin typeface="Cambria Math" panose="02040503050406030204" pitchFamily="18" charset="0"/>
-                            </a:rPr>
-                            <m:t>1</m:t>
-                          </m:r>
-                          <m:r>
-                            <a:rPr>
-                              <a:latin typeface="Cambria Math" panose="02040503050406030204" pitchFamily="18" charset="0"/>
-                            </a:rPr>
-                            <m:t>/</m:t>
+                            <m:t>0,1/</m:t>
                           </m:r>
                           <m:sSub>
                             <m:sSubPr>
                               <m:ctrlPr>
-                                <a:rPr i="1">
+                                <a:rPr>
                                   <a:latin typeface="Cambria Math" panose="02040503050406030204" pitchFamily="18" charset="0"/>
                                 </a:rPr>
                               </m:ctrlPr>
@@ -8103,13 +7991,7 @@
                       <a:rPr>
                         <a:latin typeface="Cambria Math" panose="02040503050406030204" pitchFamily="18" charset="0"/>
                       </a:rPr>
-                      <m:t>→</m:t>
-                    </m:r>
-                    <m:r>
-                      <a:rPr>
-                        <a:latin typeface="Cambria Math" panose="02040503050406030204" pitchFamily="18" charset="0"/>
-                      </a:rPr>
-                      <m:t>∞</m:t>
+                      <m:t>→∞</m:t>
                     </m:r>
                   </m:oMath>
                 </a14:m>
@@ -8141,12 +8023,12 @@
                     <m:oMathParaPr>
                       <m:jc m:val="center"/>
                     </m:oMathParaPr>
-                    <m:oMath xmlns:m="http://schemas.openxmlformats.org/officeDocument/2006/math">
+                    <m:oMath>
                       <m:acc>
                         <m:accPr>
                           <m:chr m:val="̂"/>
                           <m:ctrlPr>
-                            <a:rPr i="1">
+                            <a:rPr>
                               <a:latin typeface="Cambria Math" panose="02040503050406030204" pitchFamily="18" charset="0"/>
                             </a:rPr>
                           </m:ctrlPr>
@@ -8164,7 +8046,7 @@
                         <m:accPr>
                           <m:chr m:val="̇"/>
                           <m:ctrlPr>
-                            <a:rPr i="1">
+                            <a:rPr>
                               <a:latin typeface="Cambria Math" panose="02040503050406030204" pitchFamily="18" charset="0"/>
                             </a:rPr>
                           </m:ctrlPr>
@@ -8187,7 +8069,7 @@
                       <m:d>
                         <m:dPr>
                           <m:ctrlPr>
-                            <a:rPr i="1">
+                            <a:rPr>
                               <a:latin typeface="Cambria Math" panose="02040503050406030204" pitchFamily="18" charset="0"/>
                             </a:rPr>
                           </m:ctrlPr>
@@ -8208,7 +8090,7 @@
                           <m:f>
                             <m:fPr>
                               <m:ctrlPr>
-                                <a:rPr i="1">
+                                <a:rPr>
                                   <a:latin typeface="Cambria Math" panose="02040503050406030204" pitchFamily="18" charset="0"/>
                                 </a:rPr>
                               </m:ctrlPr>
@@ -8237,7 +8119,7 @@
                               <m:d>
                                 <m:dPr>
                                   <m:ctrlPr>
-                                    <a:rPr i="1">
+                                    <a:rPr>
                                       <a:latin typeface="Cambria Math" panose="02040503050406030204" pitchFamily="18" charset="0"/>
                                     </a:rPr>
                                   </m:ctrlPr>
@@ -8392,11 +8274,11 @@
                     <m:oMathParaPr>
                       <m:jc m:val="center"/>
                     </m:oMathParaPr>
-                    <m:oMath xmlns:m="http://schemas.openxmlformats.org/officeDocument/2006/math">
+                    <m:oMath>
                       <m:f>
                         <m:fPr>
                           <m:ctrlPr>
-                            <a:rPr i="1">
+                            <a:rPr>
                               <a:latin typeface="Cambria Math" panose="02040503050406030204" pitchFamily="18" charset="0"/>
                             </a:rPr>
                           </m:ctrlPr>
@@ -8423,7 +8305,7 @@
                           <m:d>
                             <m:dPr>
                               <m:ctrlPr>
-                                <a:rPr i="1">
+                                <a:rPr>
                                   <a:latin typeface="Cambria Math" panose="02040503050406030204" pitchFamily="18" charset="0"/>
                                 </a:rPr>
                               </m:ctrlPr>
@@ -8457,7 +8339,7 @@
                         <m:accPr>
                           <m:chr m:val="̇"/>
                           <m:ctrlPr>
-                            <a:rPr i="1">
+                            <a:rPr>
                               <a:latin typeface="Cambria Math" panose="02040503050406030204" pitchFamily="18" charset="0"/>
                             </a:rPr>
                           </m:ctrlPr>
@@ -8486,7 +8368,7 @@
                       <m:d>
                         <m:dPr>
                           <m:ctrlPr>
-                            <a:rPr i="1">
+                            <a:rPr>
                               <a:latin typeface="Cambria Math" panose="02040503050406030204" pitchFamily="18" charset="0"/>
                             </a:rPr>
                           </m:ctrlPr>
@@ -8496,30 +8378,12 @@
                             <a:rPr>
                               <a:latin typeface="Cambria Math" panose="02040503050406030204" pitchFamily="18" charset="0"/>
                             </a:rPr>
-                            <m:t>0</m:t>
-                          </m:r>
-                          <m:r>
-                            <a:rPr>
-                              <a:latin typeface="Cambria Math" panose="02040503050406030204" pitchFamily="18" charset="0"/>
-                            </a:rPr>
-                            <m:t>,</m:t>
-                          </m:r>
-                          <m:r>
-                            <a:rPr>
-                              <a:latin typeface="Cambria Math" panose="02040503050406030204" pitchFamily="18" charset="0"/>
-                            </a:rPr>
-                            <m:t>1</m:t>
-                          </m:r>
-                          <m:r>
-                            <a:rPr>
-                              <a:latin typeface="Cambria Math" panose="02040503050406030204" pitchFamily="18" charset="0"/>
-                            </a:rPr>
-                            <m:t>/</m:t>
+                            <m:t>0,1/</m:t>
                           </m:r>
                           <m:sSub>
                             <m:sSubPr>
                               <m:ctrlPr>
-                                <a:rPr i="1">
+                                <a:rPr>
                                   <a:latin typeface="Cambria Math" panose="02040503050406030204" pitchFamily="18" charset="0"/>
                                 </a:rPr>
                               </m:ctrlPr>
@@ -8569,7 +8433,7 @@
                       <m:accPr>
                         <m:chr m:val="̂"/>
                         <m:ctrlPr>
-                          <a:rPr i="1">
+                          <a:rPr>
                             <a:latin typeface="Cambria Math" panose="02040503050406030204" pitchFamily="18" charset="0"/>
                           </a:rPr>
                         </m:ctrlPr>
@@ -8805,7 +8669,7 @@
                     <m:oMathParaPr>
                       <m:jc m:val="center"/>
                     </m:oMathParaPr>
-                    <m:oMath xmlns:m="http://schemas.openxmlformats.org/officeDocument/2006/math">
+                    <m:oMath>
                       <m:d>
                         <m:dPr>
                           <m:ctrlPr>
@@ -8836,7 +8700,7 @@
                                 <m:f>
                                   <m:fPr>
                                     <m:ctrlPr>
-                                      <a:rPr lang="ar-AE" i="1">
+                                      <a:rPr lang="ar-AE">
                                         <a:latin typeface="Cambria Math" panose="02040503050406030204" pitchFamily="18" charset="0"/>
                                       </a:rPr>
                                     </m:ctrlPr>
@@ -8871,7 +8735,7 @@
                                 <m:f>
                                   <m:fPr>
                                     <m:ctrlPr>
-                                      <a:rPr lang="ar-AE" i="1">
+                                      <a:rPr lang="ar-AE">
                                         <a:latin typeface="Cambria Math" panose="02040503050406030204" pitchFamily="18" charset="0"/>
                                       </a:rPr>
                                     </m:ctrlPr>
@@ -8900,7 +8764,7 @@
                                     <m:sSup>
                                       <m:sSupPr>
                                         <m:ctrlPr>
-                                          <a:rPr lang="ar-AE" i="1">
+                                          <a:rPr lang="ar-AE">
                                             <a:latin typeface="Cambria Math" panose="02040503050406030204" pitchFamily="18" charset="0"/>
                                           </a:rPr>
                                         </m:ctrlPr>
@@ -8965,7 +8829,7 @@
                                 <m:f>
                                   <m:fPr>
                                     <m:ctrlPr>
-                                      <a:rPr lang="ar-AE" i="1">
+                                      <a:rPr lang="ar-AE">
                                         <a:latin typeface="Cambria Math" panose="02040503050406030204" pitchFamily="18" charset="0"/>
                                       </a:rPr>
                                     </m:ctrlPr>
@@ -8982,7 +8846,7 @@
                                     <m:sSup>
                                       <m:sSupPr>
                                         <m:ctrlPr>
-                                          <a:rPr lang="ar-AE" i="1">
+                                          <a:rPr lang="ar-AE">
                                             <a:latin typeface="Cambria Math" panose="02040503050406030204" pitchFamily="18" charset="0"/>
                                           </a:rPr>
                                         </m:ctrlPr>
@@ -9011,7 +8875,7 @@
                                     <m:chr m:val="∑"/>
                                     <m:limLoc m:val="undOvr"/>
                                     <m:ctrlPr>
-                                      <a:rPr lang="ar-AE" i="1">
+                                      <a:rPr lang="ar-AE">
                                         <a:latin typeface="Cambria Math" panose="02040503050406030204" pitchFamily="18" charset="0"/>
                                       </a:rPr>
                                     </m:ctrlPr>
@@ -9045,7 +8909,7 @@
                                         <m:sSub>
                                           <m:sSubPr>
                                             <m:ctrlPr>
-                                              <a:rPr lang="ar-AE" i="1">
+                                              <a:rPr lang="ar-AE">
                                                 <a:latin typeface="Cambria Math" panose="02040503050406030204" pitchFamily="18" charset="0"/>
                                               </a:rPr>
                                             </m:ctrlPr>
@@ -9096,7 +8960,7 @@
                                 <m:f>
                                   <m:fPr>
                                     <m:ctrlPr>
-                                      <a:rPr lang="ar-AE" i="1">
+                                      <a:rPr lang="ar-AE">
                                         <a:latin typeface="Cambria Math" panose="02040503050406030204" pitchFamily="18" charset="0"/>
                                       </a:rPr>
                                     </m:ctrlPr>
@@ -9119,7 +8983,7 @@
                                     <m:sSup>
                                       <m:sSupPr>
                                         <m:ctrlPr>
-                                          <a:rPr lang="ar-AE" i="1">
+                                          <a:rPr lang="ar-AE">
                                             <a:latin typeface="Cambria Math" panose="02040503050406030204" pitchFamily="18" charset="0"/>
                                           </a:rPr>
                                         </m:ctrlPr>
@@ -9152,7 +9016,7 @@
                                 <m:f>
                                   <m:fPr>
                                     <m:ctrlPr>
-                                      <a:rPr lang="ar-AE" i="1">
+                                      <a:rPr lang="ar-AE">
                                         <a:latin typeface="Cambria Math" panose="02040503050406030204" pitchFamily="18" charset="0"/>
                                       </a:rPr>
                                     </m:ctrlPr>
@@ -9175,7 +9039,7 @@
                                     <m:sSup>
                                       <m:sSupPr>
                                         <m:ctrlPr>
-                                          <a:rPr lang="ar-AE" i="1">
+                                          <a:rPr lang="ar-AE">
                                             <a:latin typeface="Cambria Math" panose="02040503050406030204" pitchFamily="18" charset="0"/>
                                           </a:rPr>
                                         </m:ctrlPr>
@@ -9204,7 +9068,7 @@
                                     <m:chr m:val="∑"/>
                                     <m:limLoc m:val="undOvr"/>
                                     <m:ctrlPr>
-                                      <a:rPr lang="ar-AE" i="1">
+                                      <a:rPr lang="ar-AE">
                                         <a:latin typeface="Cambria Math" panose="02040503050406030204" pitchFamily="18" charset="0"/>
                                       </a:rPr>
                                     </m:ctrlPr>
@@ -9247,7 +9111,7 @@
                                             <m:sSub>
                                               <m:sSubPr>
                                                 <m:ctrlPr>
-                                                  <a:rPr lang="ar-AE" i="1">
+                                                  <a:rPr lang="ar-AE">
                                                     <a:latin typeface="Cambria Math" panose="02040503050406030204" pitchFamily="18" charset="0"/>
                                                   </a:rPr>
                                                 </m:ctrlPr>
@@ -9370,7 +9234,7 @@
                       <m:accPr>
                         <m:chr m:val="‾"/>
                         <m:ctrlPr>
-                          <a:rPr lang="ar-AE" i="1">
+                          <a:rPr lang="ar-AE">
                             <a:latin typeface="Cambria Math" panose="02040503050406030204" pitchFamily="18" charset="0"/>
                           </a:rPr>
                         </m:ctrlPr>
@@ -9397,13 +9261,13 @@
                     <m:oMathParaPr>
                       <m:jc m:val="center"/>
                     </m:oMathParaPr>
-                    <m:oMath xmlns:m="http://schemas.openxmlformats.org/officeDocument/2006/math">
+                    <m:oMath>
                       <m:nary>
                         <m:naryPr>
                           <m:chr m:val="∑"/>
                           <m:limLoc m:val="undOvr"/>
                           <m:ctrlPr>
-                            <a:rPr lang="ar-AE" i="1">
+                            <a:rPr lang="ar-AE">
                               <a:latin typeface="Cambria Math" panose="02040503050406030204" pitchFamily="18" charset="0"/>
                             </a:rPr>
                           </m:ctrlPr>
@@ -9419,13 +9283,7 @@
                             <a:rPr lang="ar-AE">
                               <a:latin typeface="Cambria Math" panose="02040503050406030204" pitchFamily="18" charset="0"/>
                             </a:rPr>
-                            <m:t>=</m:t>
-                          </m:r>
-                          <m:r>
-                            <a:rPr lang="ar-AE">
-                              <a:latin typeface="Cambria Math" panose="02040503050406030204" pitchFamily="18" charset="0"/>
-                            </a:rPr>
-                            <m:t>1</m:t>
+                            <m:t>=1</m:t>
                           </m:r>
                         </m:sub>
                         <m:sup>
@@ -9457,7 +9315,7 @@
                           <m:sSub>
                             <m:sSubPr>
                               <m:ctrlPr>
-                                <a:rPr lang="ar-AE" i="1">
+                                <a:rPr lang="ar-AE">
                                   <a:latin typeface="Cambria Math" panose="02040503050406030204" pitchFamily="18" charset="0"/>
                                 </a:rPr>
                               </m:ctrlPr>
@@ -9497,13 +9355,7 @@
                         <a:rPr lang="ar-AE">
                           <a:latin typeface="Cambria Math" panose="02040503050406030204" pitchFamily="18" charset="0"/>
                         </a:rPr>
-                        <m:t>=</m:t>
-                      </m:r>
-                      <m:r>
-                        <a:rPr lang="ar-AE">
-                          <a:latin typeface="Cambria Math" panose="02040503050406030204" pitchFamily="18" charset="0"/>
-                        </a:rPr>
-                        <m:t>0</m:t>
+                        <m:t>=0</m:t>
                       </m:r>
                     </m:oMath>
                   </m:oMathPara>
@@ -9519,12 +9371,12 @@
                     <m:oMathParaPr>
                       <m:jc m:val="center"/>
                     </m:oMathParaPr>
-                    <m:oMath xmlns:m="http://schemas.openxmlformats.org/officeDocument/2006/math">
+                    <m:oMath>
                       <m:acc>
                         <m:accPr>
                           <m:chr m:val="̅"/>
                           <m:ctrlPr>
-                            <a:rPr lang="ar-AE" i="1" smtClean="0">
+                            <a:rPr lang="en-US" b="0" i="1" smtClean="0">
                               <a:latin typeface="Cambria Math" panose="02040503050406030204" pitchFamily="18" charset="0"/>
                             </a:rPr>
                           </m:ctrlPr>
@@ -9574,7 +9426,7 @@
                           <m:chr m:val="∑"/>
                           <m:limLoc m:val="undOvr"/>
                           <m:ctrlPr>
-                            <a:rPr lang="ar-AE" i="1" smtClean="0">
+                            <a:rPr lang="en-US" b="0" i="0" smtClean="0">
                               <a:latin typeface="Cambria Math" panose="02040503050406030204" pitchFamily="18" charset="0"/>
                             </a:rPr>
                           </m:ctrlPr>
@@ -9594,13 +9446,7 @@
                             <a:rPr lang="ar-AE">
                               <a:latin typeface="Cambria Math" panose="02040503050406030204" pitchFamily="18" charset="0"/>
                             </a:rPr>
-                            <m:t>=</m:t>
-                          </m:r>
-                          <m:r>
-                            <a:rPr lang="ar-AE">
-                              <a:latin typeface="Cambria Math" panose="02040503050406030204" pitchFamily="18" charset="0"/>
-                            </a:rPr>
-                            <m:t>1</m:t>
+                            <m:t>=1</m:t>
                           </m:r>
                         </m:sub>
                         <m:sup>
@@ -9615,7 +9461,7 @@
                           <m:sSub>
                             <m:sSubPr>
                               <m:ctrlPr>
-                                <a:rPr lang="ar-AE" i="1">
+                                <a:rPr lang="ar-AE">
                                   <a:latin typeface="Cambria Math" panose="02040503050406030204" pitchFamily="18" charset="0"/>
                                 </a:rPr>
                               </m:ctrlPr>
@@ -9699,14 +9545,7 @@
                           <a:latin typeface="Cambria Math" panose="02040503050406030204" pitchFamily="18" charset="0"/>
                           <a:ea typeface="Cambria Math" panose="02040503050406030204" pitchFamily="18" charset="0"/>
                         </a:rPr>
-                        <m:t>∞</m:t>
-                      </m:r>
-                      <m:r>
-                        <a:rPr lang="en-US" b="0" i="1" smtClean="0">
-                          <a:latin typeface="Cambria Math" panose="02040503050406030204" pitchFamily="18" charset="0"/>
-                          <a:ea typeface="Cambria Math" panose="02040503050406030204" pitchFamily="18" charset="0"/>
-                        </a:rPr>
-                        <m:t>  </m:t>
+                        <m:t>∞  </m:t>
                       </m:r>
                     </m:oMath>
                   </m:oMathPara>
@@ -9859,7 +9698,7 @@
                     <m:oMathParaPr>
                       <m:jc m:val="center"/>
                     </m:oMathParaPr>
-                    <m:oMath xmlns:m="http://schemas.openxmlformats.org/officeDocument/2006/math">
+                    <m:oMath>
                       <m:d>
                         <m:dPr>
                           <m:ctrlPr>
@@ -9890,7 +9729,7 @@
                                 <m:f>
                                   <m:fPr>
                                     <m:ctrlPr>
-                                      <a:rPr lang="ar-AE" i="1">
+                                      <a:rPr lang="ar-AE">
                                         <a:latin typeface="Cambria Math" panose="02040503050406030204" pitchFamily="18" charset="0"/>
                                       </a:rPr>
                                     </m:ctrlPr>
@@ -9925,7 +9764,7 @@
                                 <m:f>
                                   <m:fPr>
                                     <m:ctrlPr>
-                                      <a:rPr lang="ar-AE" i="1">
+                                      <a:rPr lang="ar-AE">
                                         <a:latin typeface="Cambria Math" panose="02040503050406030204" pitchFamily="18" charset="0"/>
                                       </a:rPr>
                                     </m:ctrlPr>
@@ -9954,7 +9793,7 @@
                                     <m:sSup>
                                       <m:sSupPr>
                                         <m:ctrlPr>
-                                          <a:rPr lang="ar-AE" i="1">
+                                          <a:rPr lang="ar-AE">
                                             <a:latin typeface="Cambria Math" panose="02040503050406030204" pitchFamily="18" charset="0"/>
                                           </a:rPr>
                                         </m:ctrlPr>
@@ -10019,7 +9858,7 @@
                                 <m:f>
                                   <m:fPr>
                                     <m:ctrlPr>
-                                      <a:rPr lang="ar-AE" i="1">
+                                      <a:rPr lang="ar-AE">
                                         <a:latin typeface="Cambria Math" panose="02040503050406030204" pitchFamily="18" charset="0"/>
                                       </a:rPr>
                                     </m:ctrlPr>
@@ -10036,7 +9875,7 @@
                                     <m:sSup>
                                       <m:sSupPr>
                                         <m:ctrlPr>
-                                          <a:rPr lang="ar-AE" i="1">
+                                          <a:rPr lang="ar-AE">
                                             <a:latin typeface="Cambria Math" panose="02040503050406030204" pitchFamily="18" charset="0"/>
                                           </a:rPr>
                                         </m:ctrlPr>
@@ -10065,7 +9904,7 @@
                                     <m:chr m:val="∑"/>
                                     <m:limLoc m:val="undOvr"/>
                                     <m:ctrlPr>
-                                      <a:rPr lang="ar-AE" i="1">
+                                      <a:rPr lang="ar-AE">
                                         <a:latin typeface="Cambria Math" panose="02040503050406030204" pitchFamily="18" charset="0"/>
                                       </a:rPr>
                                     </m:ctrlPr>
@@ -10099,7 +9938,7 @@
                                         <m:sSub>
                                           <m:sSubPr>
                                             <m:ctrlPr>
-                                              <a:rPr lang="ar-AE" i="1">
+                                              <a:rPr lang="ar-AE">
                                                 <a:latin typeface="Cambria Math" panose="02040503050406030204" pitchFamily="18" charset="0"/>
                                               </a:rPr>
                                             </m:ctrlPr>
@@ -10150,7 +9989,7 @@
                                 <m:f>
                                   <m:fPr>
                                     <m:ctrlPr>
-                                      <a:rPr lang="ar-AE" i="1">
+                                      <a:rPr lang="ar-AE">
                                         <a:latin typeface="Cambria Math" panose="02040503050406030204" pitchFamily="18" charset="0"/>
                                       </a:rPr>
                                     </m:ctrlPr>
@@ -10173,7 +10012,7 @@
                                     <m:sSup>
                                       <m:sSupPr>
                                         <m:ctrlPr>
-                                          <a:rPr lang="ar-AE" i="1">
+                                          <a:rPr lang="ar-AE">
                                             <a:latin typeface="Cambria Math" panose="02040503050406030204" pitchFamily="18" charset="0"/>
                                           </a:rPr>
                                         </m:ctrlPr>
@@ -10206,7 +10045,7 @@
                                 <m:f>
                                   <m:fPr>
                                     <m:ctrlPr>
-                                      <a:rPr lang="ar-AE" i="1">
+                                      <a:rPr lang="ar-AE">
                                         <a:latin typeface="Cambria Math" panose="02040503050406030204" pitchFamily="18" charset="0"/>
                                       </a:rPr>
                                     </m:ctrlPr>
@@ -10229,7 +10068,7 @@
                                     <m:sSup>
                                       <m:sSupPr>
                                         <m:ctrlPr>
-                                          <a:rPr lang="ar-AE" i="1">
+                                          <a:rPr lang="ar-AE">
                                             <a:latin typeface="Cambria Math" panose="02040503050406030204" pitchFamily="18" charset="0"/>
                                           </a:rPr>
                                         </m:ctrlPr>
@@ -10258,7 +10097,7 @@
                                     <m:chr m:val="∑"/>
                                     <m:limLoc m:val="undOvr"/>
                                     <m:ctrlPr>
-                                      <a:rPr lang="ar-AE" i="1">
+                                      <a:rPr lang="ar-AE">
                                         <a:latin typeface="Cambria Math" panose="02040503050406030204" pitchFamily="18" charset="0"/>
                                       </a:rPr>
                                     </m:ctrlPr>
@@ -10301,7 +10140,7 @@
                                             <m:sSub>
                                               <m:sSubPr>
                                                 <m:ctrlPr>
-                                                  <a:rPr lang="ar-AE" i="1">
+                                                  <a:rPr lang="ar-AE">
                                                     <a:latin typeface="Cambria Math" panose="02040503050406030204" pitchFamily="18" charset="0"/>
                                                   </a:rPr>
                                                 </m:ctrlPr>
@@ -10426,7 +10265,7 @@
                     <m:sSup>
                       <m:sSupPr>
                         <m:ctrlPr>
-                          <a:rPr lang="ar-AE" i="1">
+                          <a:rPr lang="ar-AE">
                             <a:latin typeface="Cambria Math" panose="02040503050406030204" pitchFamily="18" charset="0"/>
                           </a:rPr>
                         </m:ctrlPr>
@@ -10461,11 +10300,11 @@
                     <m:oMathParaPr>
                       <m:jc m:val="center"/>
                     </m:oMathParaPr>
-                    <m:oMath xmlns:m="http://schemas.openxmlformats.org/officeDocument/2006/math">
+                    <m:oMath>
                       <m:f>
                         <m:fPr>
                           <m:ctrlPr>
-                            <a:rPr lang="ar-AE" i="1">
+                            <a:rPr lang="ar-AE">
                               <a:latin typeface="Cambria Math" panose="02040503050406030204" pitchFamily="18" charset="0"/>
                             </a:rPr>
                           </m:ctrlPr>
@@ -10482,7 +10321,7 @@
                           <m:sSup>
                             <m:sSupPr>
                               <m:ctrlPr>
-                                <a:rPr lang="ar-AE" i="1">
+                                <a:rPr lang="ar-AE">
                                   <a:latin typeface="Cambria Math" panose="02040503050406030204" pitchFamily="18" charset="0"/>
                                 </a:rPr>
                               </m:ctrlPr>
@@ -10511,7 +10350,7 @@
                           <m:chr m:val="∑"/>
                           <m:limLoc m:val="undOvr"/>
                           <m:ctrlPr>
-                            <a:rPr lang="ar-AE" i="1">
+                            <a:rPr lang="ar-AE">
                               <a:latin typeface="Cambria Math" panose="02040503050406030204" pitchFamily="18" charset="0"/>
                             </a:rPr>
                           </m:ctrlPr>
@@ -10527,13 +10366,7 @@
                             <a:rPr lang="ar-AE">
                               <a:latin typeface="Cambria Math" panose="02040503050406030204" pitchFamily="18" charset="0"/>
                             </a:rPr>
-                            <m:t>=</m:t>
-                          </m:r>
-                          <m:r>
-                            <a:rPr lang="ar-AE">
-                              <a:latin typeface="Cambria Math" panose="02040503050406030204" pitchFamily="18" charset="0"/>
-                            </a:rPr>
-                            <m:t>1</m:t>
+                            <m:t>=1</m:t>
                           </m:r>
                         </m:sub>
                         <m:sup>
@@ -10566,7 +10399,7 @@
                                   <m:sSub>
                                     <m:sSubPr>
                                       <m:ctrlPr>
-                                        <a:rPr lang="ar-AE" i="1">
+                                        <a:rPr lang="ar-AE">
                                           <a:latin typeface="Cambria Math" panose="02040503050406030204" pitchFamily="18" charset="0"/>
                                         </a:rPr>
                                       </m:ctrlPr>
@@ -10637,15 +10470,12 @@
                 </a:pPr>
                 <a14:m>
                   <m:oMathPara xmlns:m="http://schemas.openxmlformats.org/officeDocument/2006/math">
-                    <m:oMathParaPr>
-                      <m:jc m:val="centerGroup"/>
-                    </m:oMathParaPr>
-                    <m:oMath xmlns:m="http://schemas.openxmlformats.org/officeDocument/2006/math">
+                    <m:oMath>
                       <m:acc>
                         <m:accPr>
                           <m:chr m:val="̅"/>
                           <m:ctrlPr>
-                            <a:rPr lang="ar-AE" i="1" smtClean="0">
+                            <a:rPr lang="ar-AE" b="0" i="1" smtClean="0">
                               <a:latin typeface="Cambria Math" panose="02040503050406030204" pitchFamily="18" charset="0"/>
                             </a:rPr>
                           </m:ctrlPr>
@@ -10695,7 +10525,7 @@
                           <m:chr m:val="∑"/>
                           <m:limLoc m:val="undOvr"/>
                           <m:ctrlPr>
-                            <a:rPr lang="ar-AE" i="1" smtClean="0">
+                            <a:rPr lang="en-US" b="0" i="0" smtClean="0">
                               <a:latin typeface="Cambria Math" panose="02040503050406030204" pitchFamily="18" charset="0"/>
                             </a:rPr>
                           </m:ctrlPr>
@@ -10715,13 +10545,7 @@
                             <a:rPr lang="en-US">
                               <a:latin typeface="Cambria Math" panose="02040503050406030204" pitchFamily="18" charset="0"/>
                             </a:rPr>
-                            <m:t>=</m:t>
-                          </m:r>
-                          <m:r>
-                            <a:rPr lang="en-US">
-                              <a:latin typeface="Cambria Math" panose="02040503050406030204" pitchFamily="18" charset="0"/>
-                            </a:rPr>
-                            <m:t>1</m:t>
+                            <m:t>=1</m:t>
                           </m:r>
                         </m:sub>
                         <m:sup>
@@ -10736,7 +10560,7 @@
                           <m:sSub>
                             <m:sSubPr>
                               <m:ctrlPr>
-                                <a:rPr lang="ar-AE" i="1">
+                                <a:rPr lang="ar-AE">
                                   <a:latin typeface="Cambria Math" panose="02040503050406030204" pitchFamily="18" charset="0"/>
                                 </a:rPr>
                               </m:ctrlPr>
@@ -10820,14 +10644,7 @@
                           <a:latin typeface="Cambria Math" panose="02040503050406030204" pitchFamily="18" charset="0"/>
                           <a:ea typeface="Cambria Math" panose="02040503050406030204" pitchFamily="18" charset="0"/>
                         </a:rPr>
-                        <m:t>∞</m:t>
-                      </m:r>
-                      <m:r>
-                        <a:rPr lang="el-GR" b="0" i="1" smtClean="0">
-                          <a:latin typeface="Cambria Math" panose="02040503050406030204" pitchFamily="18" charset="0"/>
-                          <a:ea typeface="Cambria Math" panose="02040503050406030204" pitchFamily="18" charset="0"/>
-                        </a:rPr>
-                        <m:t> </m:t>
+                        <m:t>∞ </m:t>
                       </m:r>
                     </m:oMath>
                   </m:oMathPara>
@@ -10840,14 +10657,11 @@
                 </a:pPr>
                 <a14:m>
                   <m:oMathPara xmlns:m="http://schemas.openxmlformats.org/officeDocument/2006/math">
-                    <m:oMathParaPr>
-                      <m:jc m:val="centerGroup"/>
-                    </m:oMathParaPr>
-                    <m:oMath xmlns:m="http://schemas.openxmlformats.org/officeDocument/2006/math">
+                    <m:oMath>
                       <m:f>
                         <m:fPr>
                           <m:ctrlPr>
-                            <a:rPr lang="ar-AE" i="1" smtClean="0">
+                            <a:rPr lang="ar-AE">
                               <a:latin typeface="Cambria Math" panose="02040503050406030204" pitchFamily="18" charset="0"/>
                             </a:rPr>
                           </m:ctrlPr>
@@ -10874,7 +10688,7 @@
                           <m:chr m:val="∑"/>
                           <m:limLoc m:val="undOvr"/>
                           <m:ctrlPr>
-                            <a:rPr lang="ar-AE" i="1">
+                            <a:rPr lang="ar-AE">
                               <a:latin typeface="Cambria Math" panose="02040503050406030204" pitchFamily="18" charset="0"/>
                             </a:rPr>
                           </m:ctrlPr>
@@ -10890,13 +10704,7 @@
                             <a:rPr lang="ar-AE">
                               <a:latin typeface="Cambria Math" panose="02040503050406030204" pitchFamily="18" charset="0"/>
                             </a:rPr>
-                            <m:t>=</m:t>
-                          </m:r>
-                          <m:r>
-                            <a:rPr lang="ar-AE">
-                              <a:latin typeface="Cambria Math" panose="02040503050406030204" pitchFamily="18" charset="0"/>
-                            </a:rPr>
-                            <m:t>1</m:t>
+                            <m:t>=1</m:t>
                           </m:r>
                         </m:sub>
                         <m:sup>
@@ -10929,7 +10737,7 @@
                                   <m:sSub>
                                     <m:sSubPr>
                                       <m:ctrlPr>
-                                        <a:rPr lang="ar-AE" i="1">
+                                        <a:rPr lang="ar-AE">
                                           <a:latin typeface="Cambria Math" panose="02040503050406030204" pitchFamily="18" charset="0"/>
                                         </a:rPr>
                                       </m:ctrlPr>
@@ -10986,7 +10794,7 @@
                       <m:sSup>
                         <m:sSupPr>
                           <m:ctrlPr>
-                            <a:rPr lang="ar-AE" i="1">
+                            <a:rPr lang="ar-AE">
                               <a:latin typeface="Cambria Math" panose="02040503050406030204" pitchFamily="18" charset="0"/>
                             </a:rPr>
                           </m:ctrlPr>
@@ -11035,7 +10843,7 @@
                       <m:accPr>
                         <m:chr m:val="‾"/>
                         <m:ctrlPr>
-                          <a:rPr lang="ar-AE" i="1">
+                          <a:rPr lang="ar-AE">
                             <a:latin typeface="Cambria Math" panose="02040503050406030204" pitchFamily="18" charset="0"/>
                           </a:rPr>
                         </m:ctrlPr>
@@ -11066,14 +10874,11 @@
                 </a:pPr>
                 <a14:m>
                   <m:oMathPara xmlns:m="http://schemas.openxmlformats.org/officeDocument/2006/math">
-                    <m:oMathParaPr>
-                      <m:jc m:val="centerGroup"/>
-                    </m:oMathParaPr>
-                    <m:oMath xmlns:m="http://schemas.openxmlformats.org/officeDocument/2006/math">
+                    <m:oMath>
                       <m:sSup>
                         <m:sSupPr>
                           <m:ctrlPr>
-                            <a:rPr lang="ar-AE" i="1">
+                            <a:rPr lang="ar-AE">
                               <a:latin typeface="Cambria Math" panose="02040503050406030204" pitchFamily="18" charset="0"/>
                             </a:rPr>
                           </m:ctrlPr>
@@ -11104,7 +10909,7 @@
                       <m:f>
                         <m:fPr>
                           <m:ctrlPr>
-                            <a:rPr lang="ar-AE" i="1" smtClean="0">
+                            <a:rPr lang="ar-AE">
                               <a:latin typeface="Cambria Math" panose="02040503050406030204" pitchFamily="18" charset="0"/>
                             </a:rPr>
                           </m:ctrlPr>
@@ -11128,13 +10933,7 @@
                             <a:rPr lang="en-US" b="0" i="1" smtClean="0">
                               <a:latin typeface="Cambria Math" panose="02040503050406030204" pitchFamily="18" charset="0"/>
                             </a:rPr>
-                            <m:t>−</m:t>
-                          </m:r>
-                          <m:r>
-                            <a:rPr lang="en-US" b="0" i="1" smtClean="0">
-                              <a:latin typeface="Cambria Math" panose="02040503050406030204" pitchFamily="18" charset="0"/>
-                            </a:rPr>
-                            <m:t>1</m:t>
+                            <m:t>−1</m:t>
                           </m:r>
                         </m:den>
                       </m:f>
@@ -11143,7 +10942,7 @@
                           <m:chr m:val="∑"/>
                           <m:limLoc m:val="undOvr"/>
                           <m:ctrlPr>
-                            <a:rPr lang="ar-AE" i="1">
+                            <a:rPr lang="ar-AE">
                               <a:latin typeface="Cambria Math" panose="02040503050406030204" pitchFamily="18" charset="0"/>
                             </a:rPr>
                           </m:ctrlPr>
@@ -11159,13 +10958,7 @@
                             <a:rPr lang="ar-AE">
                               <a:latin typeface="Cambria Math" panose="02040503050406030204" pitchFamily="18" charset="0"/>
                             </a:rPr>
-                            <m:t>=</m:t>
-                          </m:r>
-                          <m:r>
-                            <a:rPr lang="ar-AE">
-                              <a:latin typeface="Cambria Math" panose="02040503050406030204" pitchFamily="18" charset="0"/>
-                            </a:rPr>
-                            <m:t>1</m:t>
+                            <m:t>=1</m:t>
                           </m:r>
                         </m:sub>
                         <m:sup>
@@ -11198,7 +10991,7 @@
                                   <m:sSub>
                                     <m:sSubPr>
                                       <m:ctrlPr>
-                                        <a:rPr lang="ar-AE" i="1">
+                                        <a:rPr lang="ar-AE">
                                           <a:latin typeface="Cambria Math" panose="02040503050406030204" pitchFamily="18" charset="0"/>
                                         </a:rPr>
                                       </m:ctrlPr>
@@ -11431,11 +11224,31 @@
             </a:r>
           </a:p>
           <a:p>
-            <a:pPr lvl="0"/>
             <a:r>
               <a:rPr dirty="0"/>
-              <a:t>MLE used widely for machine learning models, including some deep learning models</a:t>
+              <a:t>MLE used widely for machine learning models, including </a:t>
             </a:r>
+            <a:r>
+              <a:rPr lang="en-US" dirty="0"/>
+              <a:t>many </a:t>
+            </a:r>
+            <a:r>
+              <a:rPr dirty="0"/>
+              <a:t>deep</a:t>
+            </a:r>
+            <a:r>
+              <a:rPr lang="en-US" dirty="0"/>
+              <a:t> </a:t>
+            </a:r>
+            <a:r>
+              <a:rPr dirty="0"/>
+              <a:t>learning model</a:t>
+            </a:r>
+            <a:r>
+              <a:rPr lang="en-US" dirty="0"/>
+              <a:t>s</a:t>
+            </a:r>
+            <a:endParaRPr dirty="0"/>
           </a:p>
         </p:txBody>
       </p:sp>
@@ -11605,10 +11418,7 @@
                 <a:pPr/>
                 <a14:m>
                   <m:oMathPara xmlns:m="http://schemas.openxmlformats.org/officeDocument/2006/math">
-                    <m:oMathParaPr>
-                      <m:jc m:val="centerGroup"/>
-                    </m:oMathParaPr>
-                    <m:oMath xmlns:m="http://schemas.openxmlformats.org/officeDocument/2006/math">
+                    <m:oMath>
                       <m:r>
                         <a:rPr lang="ar-AE" smtClean="0">
                           <a:latin typeface="Cambria Math" panose="02040503050406030204" pitchFamily="18" charset="0"/>
@@ -11628,7 +11438,7 @@
                             <m:accPr>
                               <m:chr m:val="⃗"/>
                               <m:ctrlPr>
-                                <a:rPr lang="ar-AE" i="1">
+                                <a:rPr lang="ar-AE">
                                   <a:latin typeface="Cambria Math" panose="02040503050406030204" pitchFamily="18" charset="0"/>
                                 </a:rPr>
                               </m:ctrlPr>
@@ -11703,6 +11513,7 @@
                                         <m:ctrlPr>
                                           <a:rPr lang="ar-AE" i="1">
                                             <a:latin typeface="Cambria Math" panose="02040503050406030204" pitchFamily="18" charset="0"/>
+                                            <a:ea typeface="Cambria Math" panose="02040503050406030204" pitchFamily="18" charset="0"/>
                                           </a:rPr>
                                         </m:ctrlPr>
                                       </m:sSupPr>
@@ -11720,13 +11531,7 @@
                                           <a:rPr lang="en-US" i="1">
                                             <a:latin typeface="Cambria Math" panose="02040503050406030204" pitchFamily="18" charset="0"/>
                                           </a:rPr>
-                                          <m:t>2</m:t>
-                                        </m:r>
-                                        <m:r>
-                                          <a:rPr lang="en-US" i="1">
-                                            <a:latin typeface="Cambria Math" panose="02040503050406030204" pitchFamily="18" charset="0"/>
-                                          </a:rPr>
-                                          <m:t> </m:t>
+                                          <m:t>2 </m:t>
                                         </m:r>
                                       </m:sup>
                                     </m:sSup>
@@ -11743,6 +11548,7 @@
                                         <m:ctrlPr>
                                           <a:rPr lang="ar-AE" i="1">
                                             <a:latin typeface="Cambria Math" panose="02040503050406030204" pitchFamily="18" charset="0"/>
+                                            <a:ea typeface="Cambria Math" panose="02040503050406030204" pitchFamily="18" charset="0"/>
                                           </a:rPr>
                                         </m:ctrlPr>
                                       </m:sSupPr>
@@ -11778,7 +11584,7 @@
                                 <m:f>
                                   <m:fPr>
                                     <m:ctrlPr>
-                                      <a:rPr lang="ar-AE" i="1" smtClean="0">
+                                      <a:rPr lang="ar-AE" i="1">
                                         <a:latin typeface="Cambria Math" panose="02040503050406030204" pitchFamily="18" charset="0"/>
                                       </a:rPr>
                                     </m:ctrlPr>
@@ -11789,6 +11595,7 @@
                                         <m:ctrlPr>
                                           <a:rPr lang="ar-AE" i="1">
                                             <a:latin typeface="Cambria Math" panose="02040503050406030204" pitchFamily="18" charset="0"/>
+                                            <a:ea typeface="Cambria Math" panose="02040503050406030204" pitchFamily="18" charset="0"/>
                                           </a:rPr>
                                         </m:ctrlPr>
                                       </m:sSupPr>
@@ -11806,13 +11613,7 @@
                                           <a:rPr lang="en-US" i="1">
                                             <a:latin typeface="Cambria Math" panose="02040503050406030204" pitchFamily="18" charset="0"/>
                                           </a:rPr>
-                                          <m:t>2</m:t>
-                                        </m:r>
-                                        <m:r>
-                                          <a:rPr lang="en-US" i="1">
-                                            <a:latin typeface="Cambria Math" panose="02040503050406030204" pitchFamily="18" charset="0"/>
-                                          </a:rPr>
-                                          <m:t> </m:t>
+                                          <m:t>2 </m:t>
                                         </m:r>
                                       </m:sup>
                                     </m:sSup>
@@ -11827,8 +11628,9 @@
                                     <m:sSup>
                                       <m:sSupPr>
                                         <m:ctrlPr>
-                                          <a:rPr lang="ar-AE" i="1" smtClean="0">
+                                          <a:rPr lang="ar-AE" i="1">
                                             <a:latin typeface="Cambria Math" panose="02040503050406030204" pitchFamily="18" charset="0"/>
+                                            <a:ea typeface="Cambria Math" panose="02040503050406030204" pitchFamily="18" charset="0"/>
                                           </a:rPr>
                                         </m:ctrlPr>
                                       </m:sSupPr>
@@ -11861,7 +11663,7 @@
                                     <m:sSup>
                                       <m:sSupPr>
                                         <m:ctrlPr>
-                                          <a:rPr lang="ar-AE" i="1">
+                                          <a:rPr lang="en-US" b="0" i="1" smtClean="0">
                                             <a:latin typeface="Cambria Math" panose="02040503050406030204" pitchFamily="18" charset="0"/>
                                           </a:rPr>
                                         </m:ctrlPr>
@@ -11896,6 +11698,7 @@
                                         <m:ctrlPr>
                                           <a:rPr lang="en-US" i="1">
                                             <a:latin typeface="Cambria Math" panose="02040503050406030204" pitchFamily="18" charset="0"/>
+                                            <a:ea typeface="Cambria Math" panose="02040503050406030204" pitchFamily="18" charset="0"/>
                                           </a:rPr>
                                         </m:ctrlPr>
                                       </m:sSupPr>
@@ -11937,6 +11740,7 @@
                                         <m:ctrlPr>
                                           <a:rPr lang="ar-AE" i="1">
                                             <a:latin typeface="Cambria Math" panose="02040503050406030204" pitchFamily="18" charset="0"/>
+                                            <a:ea typeface="Cambria Math" panose="02040503050406030204" pitchFamily="18" charset="0"/>
                                           </a:rPr>
                                         </m:ctrlPr>
                                       </m:sSupPr>
@@ -11954,13 +11758,7 @@
                                           <a:rPr lang="en-US" i="1">
                                             <a:latin typeface="Cambria Math" panose="02040503050406030204" pitchFamily="18" charset="0"/>
                                           </a:rPr>
-                                          <m:t>2</m:t>
-                                        </m:r>
-                                        <m:r>
-                                          <a:rPr lang="en-US" i="1">
-                                            <a:latin typeface="Cambria Math" panose="02040503050406030204" pitchFamily="18" charset="0"/>
-                                          </a:rPr>
-                                          <m:t> </m:t>
+                                          <m:t>2 </m:t>
                                         </m:r>
                                       </m:sup>
                                     </m:sSup>
@@ -11977,6 +11775,7 @@
                                         <m:ctrlPr>
                                           <a:rPr lang="ar-AE" i="1">
                                             <a:latin typeface="Cambria Math" panose="02040503050406030204" pitchFamily="18" charset="0"/>
+                                            <a:ea typeface="Cambria Math" panose="02040503050406030204" pitchFamily="18" charset="0"/>
                                           </a:rPr>
                                         </m:ctrlPr>
                                       </m:sSupPr>
@@ -12009,7 +11808,7 @@
                                     <m:sSup>
                                       <m:sSupPr>
                                         <m:ctrlPr>
-                                          <a:rPr lang="ar-AE" i="1">
+                                          <a:rPr lang="en-US" i="1">
                                             <a:latin typeface="Cambria Math" panose="02040503050406030204" pitchFamily="18" charset="0"/>
                                           </a:rPr>
                                         </m:ctrlPr>
@@ -12044,6 +11843,7 @@
                                         <m:ctrlPr>
                                           <a:rPr lang="en-US" i="1">
                                             <a:latin typeface="Cambria Math" panose="02040503050406030204" pitchFamily="18" charset="0"/>
+                                            <a:ea typeface="Cambria Math" panose="02040503050406030204" pitchFamily="18" charset="0"/>
                                           </a:rPr>
                                         </m:ctrlPr>
                                       </m:sSupPr>
@@ -12083,6 +11883,7 @@
                                         <m:ctrlPr>
                                           <a:rPr lang="ar-AE" i="1">
                                             <a:latin typeface="Cambria Math" panose="02040503050406030204" pitchFamily="18" charset="0"/>
+                                            <a:ea typeface="Cambria Math" panose="02040503050406030204" pitchFamily="18" charset="0"/>
                                           </a:rPr>
                                         </m:ctrlPr>
                                       </m:sSupPr>
@@ -12100,13 +11901,7 @@
                                           <a:rPr lang="en-US" i="1">
                                             <a:latin typeface="Cambria Math" panose="02040503050406030204" pitchFamily="18" charset="0"/>
                                           </a:rPr>
-                                          <m:t>2</m:t>
-                                        </m:r>
-                                        <m:r>
-                                          <a:rPr lang="en-US" i="1">
-                                            <a:latin typeface="Cambria Math" panose="02040503050406030204" pitchFamily="18" charset="0"/>
-                                          </a:rPr>
-                                          <m:t> </m:t>
+                                          <m:t>2 </m:t>
                                         </m:r>
                                       </m:sup>
                                     </m:sSup>
@@ -12123,6 +11918,7 @@
                                         <m:ctrlPr>
                                           <a:rPr lang="ar-AE" i="1">
                                             <a:latin typeface="Cambria Math" panose="02040503050406030204" pitchFamily="18" charset="0"/>
+                                            <a:ea typeface="Cambria Math" panose="02040503050406030204" pitchFamily="18" charset="0"/>
                                           </a:rPr>
                                         </m:ctrlPr>
                                       </m:sSupPr>
@@ -12149,6 +11945,7 @@
                                         <m:ctrlPr>
                                           <a:rPr lang="en-US" i="1">
                                             <a:latin typeface="Cambria Math" panose="02040503050406030204" pitchFamily="18" charset="0"/>
+                                            <a:ea typeface="Cambria Math" panose="02040503050406030204" pitchFamily="18" charset="0"/>
                                           </a:rPr>
                                         </m:ctrlPr>
                                       </m:sSupPr>
@@ -12186,10 +11983,7 @@
                 <a:pPr/>
                 <a14:m>
                   <m:oMathPara xmlns:m="http://schemas.openxmlformats.org/officeDocument/2006/math">
-                    <m:oMathParaPr>
-                      <m:jc m:val="centerGroup"/>
-                    </m:oMathParaPr>
-                    <m:oMath xmlns:m="http://schemas.openxmlformats.org/officeDocument/2006/math">
+                    <m:oMath>
                       <m:r>
                         <a:rPr lang="ar-AE" smtClean="0">
                           <a:latin typeface="Cambria Math" panose="02040503050406030204" pitchFamily="18" charset="0"/>
@@ -12238,7 +12032,7 @@
                                 <m:f>
                                   <m:fPr>
                                     <m:ctrlPr>
-                                      <a:rPr lang="ar-AE" i="1">
+                                      <a:rPr lang="en-US" b="0" i="1" smtClean="0">
                                         <a:latin typeface="Cambria Math" panose="02040503050406030204" pitchFamily="18" charset="0"/>
                                       </a:rPr>
                                     </m:ctrlPr>
@@ -12263,6 +12057,7 @@
                                         <m:ctrlPr>
                                           <a:rPr lang="en-US" i="1">
                                             <a:latin typeface="Cambria Math" panose="02040503050406030204" pitchFamily="18" charset="0"/>
+                                            <a:ea typeface="Cambria Math" panose="02040503050406030204" pitchFamily="18" charset="0"/>
                                           </a:rPr>
                                         </m:ctrlPr>
                                       </m:sSupPr>
@@ -12297,7 +12092,7 @@
                                 <m:f>
                                   <m:fPr>
                                     <m:ctrlPr>
-                                      <a:rPr lang="ar-AE" i="1">
+                                      <a:rPr lang="en-US" i="1">
                                         <a:latin typeface="Cambria Math" panose="02040503050406030204" pitchFamily="18" charset="0"/>
                                       </a:rPr>
                                     </m:ctrlPr>
@@ -12358,7 +12153,7 @@
                                     <m:sSub>
                                       <m:sSubPr>
                                         <m:ctrlPr>
-                                          <a:rPr lang="ar-AE" i="1">
+                                          <a:rPr lang="ar-AE">
                                             <a:latin typeface="Cambria Math" panose="02040503050406030204" pitchFamily="18" charset="0"/>
                                           </a:rPr>
                                         </m:ctrlPr>
@@ -12407,7 +12202,7 @@
                                 <m:f>
                                   <m:fPr>
                                     <m:ctrlPr>
-                                      <a:rPr lang="ar-AE" i="1">
+                                      <a:rPr lang="en-US" i="1">
                                         <a:latin typeface="Cambria Math" panose="02040503050406030204" pitchFamily="18" charset="0"/>
                                       </a:rPr>
                                     </m:ctrlPr>
@@ -12468,7 +12263,7 @@
                                     <m:sSub>
                                       <m:sSubPr>
                                         <m:ctrlPr>
-                                          <a:rPr lang="ar-AE" i="1">
+                                          <a:rPr lang="ar-AE">
                                             <a:latin typeface="Cambria Math" panose="02040503050406030204" pitchFamily="18" charset="0"/>
                                           </a:rPr>
                                         </m:ctrlPr>
@@ -12515,7 +12310,7 @@
                                 <m:f>
                                   <m:fPr>
                                     <m:ctrlPr>
-                                      <a:rPr lang="ar-AE" i="1">
+                                      <a:rPr lang="en-US" b="0" i="1" smtClean="0">
                                         <a:latin typeface="Cambria Math" panose="02040503050406030204" pitchFamily="18" charset="0"/>
                                       </a:rPr>
                                     </m:ctrlPr>
@@ -12532,7 +12327,7 @@
                                     <m:sSup>
                                       <m:sSupPr>
                                         <m:ctrlPr>
-                                          <a:rPr lang="en-US" i="1" smtClean="0">
+                                          <a:rPr lang="en-US" b="0" i="1" smtClean="0">
                                             <a:latin typeface="Cambria Math" panose="02040503050406030204" pitchFamily="18" charset="0"/>
                                           </a:rPr>
                                         </m:ctrlPr>
@@ -12573,7 +12368,7 @@
                                 <m:f>
                                   <m:fPr>
                                     <m:ctrlPr>
-                                      <a:rPr lang="ar-AE" i="1">
+                                      <a:rPr lang="en-US" b="0" i="1" smtClean="0">
                                         <a:latin typeface="Cambria Math" panose="02040503050406030204" pitchFamily="18" charset="0"/>
                                       </a:rPr>
                                     </m:ctrlPr>
@@ -12592,6 +12387,7 @@
                                         <m:ctrlPr>
                                           <a:rPr lang="en-US" i="1">
                                             <a:latin typeface="Cambria Math" panose="02040503050406030204" pitchFamily="18" charset="0"/>
+                                            <a:ea typeface="Cambria Math" panose="02040503050406030204" pitchFamily="18" charset="0"/>
                                           </a:rPr>
                                         </m:ctrlPr>
                                       </m:sSupPr>
@@ -12621,7 +12417,7 @@
                                     <m:chr m:val="∑"/>
                                     <m:limLoc m:val="undOvr"/>
                                     <m:ctrlPr>
-                                      <a:rPr lang="ar-AE" i="1">
+                                      <a:rPr lang="ar-AE">
                                         <a:latin typeface="Cambria Math" panose="02040503050406030204" pitchFamily="18" charset="0"/>
                                       </a:rPr>
                                     </m:ctrlPr>
@@ -12664,7 +12460,7 @@
                                             <m:sSub>
                                               <m:sSubPr>
                                                 <m:ctrlPr>
-                                                  <a:rPr lang="ar-AE" i="1">
+                                                  <a:rPr lang="ar-AE">
                                                     <a:latin typeface="Cambria Math" panose="02040503050406030204" pitchFamily="18" charset="0"/>
                                                   </a:rPr>
                                                 </m:ctrlPr>
@@ -12733,7 +12529,7 @@
                       <m:accPr>
                         <m:chr m:val="̅"/>
                         <m:ctrlPr>
-                          <a:rPr lang="ar-AE" i="1" smtClean="0">
+                          <a:rPr lang="en-US" b="0" i="1" smtClean="0">
                             <a:latin typeface="Cambria Math" panose="02040503050406030204" pitchFamily="18" charset="0"/>
                           </a:rPr>
                         </m:ctrlPr>
@@ -12817,10 +12613,7 @@
                 <a:pPr/>
                 <a14:m>
                   <m:oMathPara xmlns:m="http://schemas.openxmlformats.org/officeDocument/2006/math">
-                    <m:oMathParaPr>
-                      <m:jc m:val="centerGroup"/>
-                    </m:oMathParaPr>
-                    <m:oMath xmlns:m="http://schemas.openxmlformats.org/officeDocument/2006/math">
+                    <m:oMath>
                       <m:r>
                         <a:rPr lang="ar-AE">
                           <a:latin typeface="Cambria Math" panose="02040503050406030204" pitchFamily="18" charset="0"/>
@@ -12840,7 +12633,7 @@
                             <m:accPr>
                               <m:chr m:val="⃗"/>
                               <m:ctrlPr>
-                                <a:rPr lang="ar-AE" i="1">
+                                <a:rPr lang="ar-AE">
                                   <a:latin typeface="Cambria Math" panose="02040503050406030204" pitchFamily="18" charset="0"/>
                                 </a:rPr>
                               </m:ctrlPr>
@@ -12904,7 +12697,7 @@
                                 <m:f>
                                   <m:fPr>
                                     <m:ctrlPr>
-                                      <a:rPr lang="ar-AE" i="1">
+                                      <a:rPr lang="en-US" b="0" i="1" smtClean="0">
                                         <a:latin typeface="Cambria Math" panose="02040503050406030204" pitchFamily="18" charset="0"/>
                                       </a:rPr>
                                     </m:ctrlPr>
@@ -12929,6 +12722,7 @@
                                         <m:ctrlPr>
                                           <a:rPr lang="en-US" i="1">
                                             <a:latin typeface="Cambria Math" panose="02040503050406030204" pitchFamily="18" charset="0"/>
+                                            <a:ea typeface="Cambria Math" panose="02040503050406030204" pitchFamily="18" charset="0"/>
                                           </a:rPr>
                                         </m:ctrlPr>
                                       </m:sSupPr>
@@ -12981,7 +12775,7 @@
                                 <m:f>
                                   <m:fPr>
                                     <m:ctrlPr>
-                                      <a:rPr lang="ar-AE" i="1">
+                                      <a:rPr lang="en-US" b="0" i="1" smtClean="0">
                                         <a:latin typeface="Cambria Math" panose="02040503050406030204" pitchFamily="18" charset="0"/>
                                       </a:rPr>
                                     </m:ctrlPr>
@@ -12998,7 +12792,7 @@
                                     <m:sSup>
                                       <m:sSupPr>
                                         <m:ctrlPr>
-                                          <a:rPr lang="en-US" i="1" smtClean="0">
+                                          <a:rPr lang="en-US" b="0" i="1" smtClean="0">
                                             <a:latin typeface="Cambria Math" panose="02040503050406030204" pitchFamily="18" charset="0"/>
                                           </a:rPr>
                                         </m:ctrlPr>
@@ -13182,7 +12976,7 @@
                     <m:oMathParaPr>
                       <m:jc m:val="center"/>
                     </m:oMathParaPr>
-                    <m:oMath xmlns:m="http://schemas.openxmlformats.org/officeDocument/2006/math">
+                    <m:oMath>
                       <m:r>
                         <a:rPr>
                           <a:latin typeface="Cambria Math" panose="02040503050406030204" pitchFamily="18" charset="0"/>
@@ -13202,7 +12996,7 @@
                             <m:accPr>
                               <m:chr m:val="⃗"/>
                               <m:ctrlPr>
-                                <a:rPr i="1">
+                                <a:rPr>
                                   <a:latin typeface="Cambria Math" panose="02040503050406030204" pitchFamily="18" charset="0"/>
                                 </a:rPr>
                               </m:ctrlPr>
@@ -13254,7 +13048,7 @@
                                 <m:f>
                                   <m:fPr>
                                     <m:ctrlPr>
-                                      <a:rPr i="1">
+                                      <a:rPr>
                                         <a:latin typeface="Cambria Math" panose="02040503050406030204" pitchFamily="18" charset="0"/>
                                       </a:rPr>
                                     </m:ctrlPr>
@@ -13271,7 +13065,7 @@
                                     <m:sSup>
                                       <m:sSupPr>
                                         <m:ctrlPr>
-                                          <a:rPr i="1">
+                                          <a:rPr>
                                             <a:latin typeface="Cambria Math" panose="02040503050406030204" pitchFamily="18" charset="0"/>
                                           </a:rPr>
                                         </m:ctrlPr>
@@ -13318,7 +13112,7 @@
                                 <m:f>
                                   <m:fPr>
                                     <m:ctrlPr>
-                                      <a:rPr i="1">
+                                      <a:rPr>
                                         <a:latin typeface="Cambria Math" panose="02040503050406030204" pitchFamily="18" charset="0"/>
                                       </a:rPr>
                                     </m:ctrlPr>
@@ -13341,7 +13135,7 @@
                                     <m:sSup>
                                       <m:sSupPr>
                                         <m:ctrlPr>
-                                          <a:rPr i="1">
+                                          <a:rPr>
                                             <a:latin typeface="Cambria Math" panose="02040503050406030204" pitchFamily="18" charset="0"/>
                                           </a:rPr>
                                         </m:ctrlPr>
@@ -13448,7 +13242,7 @@
                     <m:sSup>
                       <m:sSupPr>
                         <m:ctrlPr>
-                          <a:rPr i="1">
+                          <a:rPr>
                             <a:latin typeface="Cambria Math" panose="02040503050406030204" pitchFamily="18" charset="0"/>
                           </a:rPr>
                         </m:ctrlPr>
@@ -13591,14 +13385,27 @@
             <a:pPr lvl="0"/>
             <a:r>
               <a:rPr dirty="0"/>
-              <a:t>As sample size increases, Fisher Information decreases</a:t>
+              <a:t>As sample size increases, Fisher Information </a:t>
             </a:r>
+            <a:r>
+              <a:rPr lang="en-US" dirty="0"/>
+              <a:t>increases</a:t>
+            </a:r>
+            <a:endParaRPr dirty="0"/>
           </a:p>
           <a:p>
             <a:pPr lvl="0"/>
             <a:r>
               <a:rPr dirty="0"/>
-              <a:t>Variance of MLE decreases with decreasing Fisher Information</a:t>
+              <a:t>Variance of MLE decreases with </a:t>
+            </a:r>
+            <a:r>
+              <a:rPr lang="en-US" dirty="0"/>
+              <a:t>increasing</a:t>
+            </a:r>
+            <a:r>
+              <a:rPr dirty="0"/>
+              <a:t> Fisher Information</a:t>
             </a:r>
           </a:p>
         </p:txBody>
@@ -13939,7 +13746,7 @@
                     <m:oMathParaPr>
                       <m:jc m:val="center"/>
                     </m:oMathParaPr>
-                    <m:oMath xmlns:m="http://schemas.openxmlformats.org/officeDocument/2006/math">
+                    <m:oMath>
                       <m:r>
                         <a:rPr>
                           <a:latin typeface="Cambria Math" panose="02040503050406030204" pitchFamily="18" charset="0"/>
@@ -13949,7 +13756,7 @@
                       <m:d>
                         <m:dPr>
                           <m:ctrlPr>
-                            <a:rPr i="1">
+                            <a:rPr>
                               <a:latin typeface="Cambria Math" panose="02040503050406030204" pitchFamily="18" charset="0"/>
                             </a:rPr>
                           </m:ctrlPr>
@@ -13974,7 +13781,7 @@
                                 <m:accPr>
                                   <m:chr m:val="⃗"/>
                                   <m:ctrlPr>
-                                    <a:rPr i="1">
+                                    <a:rPr>
                                       <a:latin typeface="Cambria Math" panose="02040503050406030204" pitchFamily="18" charset="0"/>
                                     </a:rPr>
                                   </m:ctrlPr>
@@ -14001,7 +13808,7 @@
                       <m:sSub>
                         <m:sSubPr>
                           <m:ctrlPr>
-                            <a:rPr i="1">
+                            <a:rPr>
                               <a:latin typeface="Cambria Math" panose="02040503050406030204" pitchFamily="18" charset="0"/>
                             </a:rPr>
                           </m:ctrlPr>
@@ -14051,7 +13858,7 @@
                             <m:accPr>
                               <m:chr m:val="⃗"/>
                               <m:ctrlPr>
-                                <a:rPr i="1">
+                                <a:rPr>
                                   <a:latin typeface="Cambria Math" panose="02040503050406030204" pitchFamily="18" charset="0"/>
                                 </a:rPr>
                               </m:ctrlPr>
@@ -14103,7 +13910,7 @@
                                 <m:f>
                                   <m:fPr>
                                     <m:ctrlPr>
-                                      <a:rPr i="1">
+                                      <a:rPr>
                                         <a:latin typeface="Cambria Math" panose="02040503050406030204" pitchFamily="18" charset="0"/>
                                       </a:rPr>
                                     </m:ctrlPr>
@@ -14124,7 +13931,7 @@
                                     <m:d>
                                       <m:dPr>
                                         <m:ctrlPr>
-                                          <a:rPr i="1">
+                                          <a:rPr>
                                             <a:latin typeface="Cambria Math" panose="02040503050406030204" pitchFamily="18" charset="0"/>
                                           </a:rPr>
                                         </m:ctrlPr>
@@ -14161,7 +13968,7 @@
                                     <m:sSub>
                                       <m:sSubPr>
                                         <m:ctrlPr>
-                                          <a:rPr i="1">
+                                          <a:rPr>
                                             <a:latin typeface="Cambria Math" panose="02040503050406030204" pitchFamily="18" charset="0"/>
                                           </a:rPr>
                                         </m:ctrlPr>
@@ -14192,7 +13999,7 @@
                                 <m:f>
                                   <m:fPr>
                                     <m:ctrlPr>
-                                      <a:rPr i="1">
+                                      <a:rPr>
                                         <a:latin typeface="Cambria Math" panose="02040503050406030204" pitchFamily="18" charset="0"/>
                                       </a:rPr>
                                     </m:ctrlPr>
@@ -14213,7 +14020,7 @@
                                     <m:d>
                                       <m:dPr>
                                         <m:ctrlPr>
-                                          <a:rPr i="1">
+                                          <a:rPr>
                                             <a:latin typeface="Cambria Math" panose="02040503050406030204" pitchFamily="18" charset="0"/>
                                           </a:rPr>
                                         </m:ctrlPr>
@@ -14250,7 +14057,7 @@
                                     <m:sSub>
                                       <m:sSubPr>
                                         <m:ctrlPr>
-                                          <a:rPr i="1">
+                                          <a:rPr>
                                             <a:latin typeface="Cambria Math" panose="02040503050406030204" pitchFamily="18" charset="0"/>
                                           </a:rPr>
                                         </m:ctrlPr>
@@ -14291,7 +14098,7 @@
                                 <m:f>
                                   <m:fPr>
                                     <m:ctrlPr>
-                                      <a:rPr i="1">
+                                      <a:rPr>
                                         <a:latin typeface="Cambria Math" panose="02040503050406030204" pitchFamily="18" charset="0"/>
                                       </a:rPr>
                                     </m:ctrlPr>
@@ -14312,7 +14119,7 @@
                                     <m:d>
                                       <m:dPr>
                                         <m:ctrlPr>
-                                          <a:rPr i="1">
+                                          <a:rPr>
                                             <a:latin typeface="Cambria Math" panose="02040503050406030204" pitchFamily="18" charset="0"/>
                                           </a:rPr>
                                         </m:ctrlPr>
@@ -14349,7 +14156,7 @@
                                     <m:sSub>
                                       <m:sSubPr>
                                         <m:ctrlPr>
-                                          <a:rPr i="1">
+                                          <a:rPr>
                                             <a:latin typeface="Cambria Math" panose="02040503050406030204" pitchFamily="18" charset="0"/>
                                           </a:rPr>
                                         </m:ctrlPr>
@@ -14404,7 +14211,7 @@
                           <m:accPr>
                             <m:chr m:val="̂"/>
                             <m:ctrlPr>
-                              <a:rPr i="1">
+                              <a:rPr>
                                 <a:latin typeface="Cambria Math" panose="02040503050406030204" pitchFamily="18" charset="0"/>
                               </a:rPr>
                             </m:ctrlPr>
@@ -14449,7 +14256,7 @@
                           <m:accPr>
                             <m:chr m:val="̂"/>
                             <m:ctrlPr>
-                              <a:rPr i="1">
+                              <a:rPr>
                                 <a:latin typeface="Cambria Math" panose="02040503050406030204" pitchFamily="18" charset="0"/>
                               </a:rPr>
                             </m:ctrlPr>
@@ -14475,13 +14282,7 @@
                           <a:rPr>
                             <a:latin typeface="Cambria Math" panose="02040503050406030204" pitchFamily="18" charset="0"/>
                           </a:rPr>
-                          <m:t>+</m:t>
-                        </m:r>
-                        <m:r>
-                          <a:rPr>
-                            <a:latin typeface="Cambria Math" panose="02040503050406030204" pitchFamily="18" charset="0"/>
-                          </a:rPr>
-                          <m:t>1</m:t>
+                          <m:t>+1</m:t>
                         </m:r>
                       </m:sub>
                     </m:sSub>
@@ -14501,7 +14302,7 @@
                     <m:oMathParaPr>
                       <m:jc m:val="center"/>
                     </m:oMathParaPr>
-                    <m:oMath xmlns:m="http://schemas.openxmlformats.org/officeDocument/2006/math">
+                    <m:oMath>
                       <m:sSub>
                         <m:sSubPr>
                           <m:ctrlPr>
@@ -14515,7 +14316,7 @@
                             <m:accPr>
                               <m:chr m:val="̂"/>
                               <m:ctrlPr>
-                                <a:rPr i="1">
+                                <a:rPr>
                                   <a:latin typeface="Cambria Math" panose="02040503050406030204" pitchFamily="18" charset="0"/>
                                 </a:rPr>
                               </m:ctrlPr>
@@ -14541,13 +14342,7 @@
                             <a:rPr>
                               <a:latin typeface="Cambria Math" panose="02040503050406030204" pitchFamily="18" charset="0"/>
                             </a:rPr>
-                            <m:t>+</m:t>
-                          </m:r>
-                          <m:r>
-                            <a:rPr>
-                              <a:latin typeface="Cambria Math" panose="02040503050406030204" pitchFamily="18" charset="0"/>
-                            </a:rPr>
-                            <m:t>1</m:t>
+                            <m:t>+1</m:t>
                           </m:r>
                         </m:sub>
                       </m:sSub>
@@ -14570,7 +14365,7 @@
                             <m:accPr>
                               <m:chr m:val="̂"/>
                               <m:ctrlPr>
-                                <a:rPr i="1">
+                                <a:rPr>
                                   <a:latin typeface="Cambria Math" panose="02040503050406030204" pitchFamily="18" charset="0"/>
                                 </a:rPr>
                               </m:ctrlPr>
@@ -14615,7 +14410,7 @@
                       <m:sSub>
                         <m:sSubPr>
                           <m:ctrlPr>
-                            <a:rPr i="1">
+                            <a:rPr>
                               <a:latin typeface="Cambria Math" panose="02040503050406030204" pitchFamily="18" charset="0"/>
                             </a:rPr>
                           </m:ctrlPr>
@@ -14665,7 +14460,7 @@
                             <m:accPr>
                               <m:chr m:val="̂"/>
                               <m:ctrlPr>
-                                <a:rPr i="1">
+                                <a:rPr>
                                   <a:latin typeface="Cambria Math" panose="02040503050406030204" pitchFamily="18" charset="0"/>
                                 </a:rPr>
                               </m:ctrlPr>
@@ -15334,7 +15129,7 @@
                           <m:accPr>
                             <m:chr m:val="̂"/>
                             <m:ctrlPr>
-                              <a:rPr i="1">
+                              <a:rPr>
                                 <a:latin typeface="Cambria Math" panose="02040503050406030204" pitchFamily="18" charset="0"/>
                               </a:rPr>
                             </m:ctrlPr>
@@ -15379,7 +15174,7 @@
                           <m:accPr>
                             <m:chr m:val="̂"/>
                             <m:ctrlPr>
-                              <a:rPr i="1">
+                              <a:rPr>
                                 <a:latin typeface="Cambria Math" panose="02040503050406030204" pitchFamily="18" charset="0"/>
                               </a:rPr>
                             </m:ctrlPr>
@@ -15405,13 +15200,7 @@
                           <a:rPr>
                             <a:latin typeface="Cambria Math" panose="02040503050406030204" pitchFamily="18" charset="0"/>
                           </a:rPr>
-                          <m:t>+</m:t>
-                        </m:r>
-                        <m:r>
-                          <a:rPr>
-                            <a:latin typeface="Cambria Math" panose="02040503050406030204" pitchFamily="18" charset="0"/>
-                          </a:rPr>
-                          <m:t>1</m:t>
+                          <m:t>+1</m:t>
                         </m:r>
                       </m:sub>
                     </m:sSub>
@@ -15431,7 +15220,7 @@
                     <m:oMathParaPr>
                       <m:jc m:val="center"/>
                     </m:oMathParaPr>
-                    <m:oMath xmlns:m="http://schemas.openxmlformats.org/officeDocument/2006/math">
+                    <m:oMath>
                       <m:sSub>
                         <m:sSubPr>
                           <m:ctrlPr>
@@ -15445,7 +15234,7 @@
                             <m:accPr>
                               <m:chr m:val="̂"/>
                               <m:ctrlPr>
-                                <a:rPr i="1">
+                                <a:rPr>
                                   <a:latin typeface="Cambria Math" panose="02040503050406030204" pitchFamily="18" charset="0"/>
                                 </a:rPr>
                               </m:ctrlPr>
@@ -15471,13 +15260,7 @@
                             <a:rPr>
                               <a:latin typeface="Cambria Math" panose="02040503050406030204" pitchFamily="18" charset="0"/>
                             </a:rPr>
-                            <m:t>+</m:t>
-                          </m:r>
-                          <m:r>
-                            <a:rPr>
-                              <a:latin typeface="Cambria Math" panose="02040503050406030204" pitchFamily="18" charset="0"/>
-                            </a:rPr>
-                            <m:t>1</m:t>
+                            <m:t>+1</m:t>
                           </m:r>
                         </m:sub>
                       </m:sSub>
@@ -15500,7 +15283,7 @@
                             <m:accPr>
                               <m:chr m:val="̂"/>
                               <m:ctrlPr>
-                                <a:rPr i="1">
+                                <a:rPr>
                                   <a:latin typeface="Cambria Math" panose="02040503050406030204" pitchFamily="18" charset="0"/>
                                 </a:rPr>
                               </m:ctrlPr>
@@ -15545,7 +15328,7 @@
                       <m:sSub>
                         <m:sSubPr>
                           <m:ctrlPr>
-                            <a:rPr i="1">
+                            <a:rPr>
                               <a:latin typeface="Cambria Math" panose="02040503050406030204" pitchFamily="18" charset="0"/>
                             </a:rPr>
                           </m:ctrlPr>
@@ -15595,7 +15378,7 @@
                             <m:accPr>
                               <m:chr m:val="̂"/>
                               <m:ctrlPr>
-                                <a:rPr i="1">
+                                <a:rPr>
                                   <a:latin typeface="Cambria Math" panose="02040503050406030204" pitchFamily="18" charset="0"/>
                                 </a:rPr>
                               </m:ctrlPr>
@@ -15868,7 +15651,7 @@
                           <m:accPr>
                             <m:chr m:val="̂"/>
                             <m:ctrlPr>
-                              <a:rPr i="1">
+                              <a:rPr>
                                 <a:latin typeface="Cambria Math" panose="02040503050406030204" pitchFamily="18" charset="0"/>
                               </a:rPr>
                             </m:ctrlPr>
@@ -15913,7 +15696,7 @@
                           <m:accPr>
                             <m:chr m:val="̂"/>
                             <m:ctrlPr>
-                              <a:rPr i="1">
+                              <a:rPr>
                                 <a:latin typeface="Cambria Math" panose="02040503050406030204" pitchFamily="18" charset="0"/>
                               </a:rPr>
                             </m:ctrlPr>
@@ -15939,13 +15722,7 @@
                           <a:rPr>
                             <a:latin typeface="Cambria Math" panose="02040503050406030204" pitchFamily="18" charset="0"/>
                           </a:rPr>
-                          <m:t>+</m:t>
-                        </m:r>
-                        <m:r>
-                          <a:rPr>
-                            <a:latin typeface="Cambria Math" panose="02040503050406030204" pitchFamily="18" charset="0"/>
-                          </a:rPr>
-                          <m:t>1</m:t>
+                          <m:t>+1</m:t>
                         </m:r>
                       </m:sub>
                     </m:sSub>
@@ -15965,7 +15742,7 @@
                     <m:oMathParaPr>
                       <m:jc m:val="center"/>
                     </m:oMathParaPr>
-                    <m:oMath xmlns:m="http://schemas.openxmlformats.org/officeDocument/2006/math">
+                    <m:oMath>
                       <m:sSub>
                         <m:sSubPr>
                           <m:ctrlPr>
@@ -15979,7 +15756,7 @@
                             <m:accPr>
                               <m:chr m:val="̂"/>
                               <m:ctrlPr>
-                                <a:rPr i="1">
+                                <a:rPr>
                                   <a:latin typeface="Cambria Math" panose="02040503050406030204" pitchFamily="18" charset="0"/>
                                 </a:rPr>
                               </m:ctrlPr>
@@ -16005,13 +15782,7 @@
                             <a:rPr>
                               <a:latin typeface="Cambria Math" panose="02040503050406030204" pitchFamily="18" charset="0"/>
                             </a:rPr>
-                            <m:t>+</m:t>
-                          </m:r>
-                          <m:r>
-                            <a:rPr>
-                              <a:latin typeface="Cambria Math" panose="02040503050406030204" pitchFamily="18" charset="0"/>
-                            </a:rPr>
-                            <m:t>1</m:t>
+                            <m:t>+1</m:t>
                           </m:r>
                         </m:sub>
                       </m:sSub>
@@ -16034,7 +15805,7 @@
                             <m:accPr>
                               <m:chr m:val="̂"/>
                               <m:ctrlPr>
-                                <a:rPr i="1">
+                                <a:rPr>
                                   <a:latin typeface="Cambria Math" panose="02040503050406030204" pitchFamily="18" charset="0"/>
                                 </a:rPr>
                               </m:ctrlPr>
@@ -16079,7 +15850,7 @@
                       <m:sSub>
                         <m:sSubPr>
                           <m:ctrlPr>
-                            <a:rPr i="1">
+                            <a:rPr>
                               <a:latin typeface="Cambria Math" panose="02040503050406030204" pitchFamily="18" charset="0"/>
                             </a:rPr>
                           </m:ctrlPr>
@@ -16129,7 +15900,7 @@
                             <m:accPr>
                               <m:chr m:val="̂"/>
                               <m:ctrlPr>
-                                <a:rPr i="1">
+                                <a:rPr>
                                   <a:latin typeface="Cambria Math" panose="02040503050406030204" pitchFamily="18" charset="0"/>
                                 </a:rPr>
                               </m:ctrlPr>
@@ -16185,13 +15956,13 @@
                     <m:oMathParaPr>
                       <m:jc m:val="center"/>
                     </m:oMathParaPr>
-                    <m:oMath xmlns:m="http://schemas.openxmlformats.org/officeDocument/2006/math">
+                    <m:oMath>
                       <m:d>
                         <m:dPr>
                           <m:begChr m:val="|"/>
                           <m:endChr m:val="|"/>
                           <m:ctrlPr>
-                            <a:rPr lang="en-US" i="1">
+                            <a:rPr lang="ar-AE" i="1">
                               <a:latin typeface="Cambria Math" panose="02040503050406030204" pitchFamily="18" charset="0"/>
                             </a:rPr>
                           </m:ctrlPr>
@@ -16200,7 +15971,7 @@
                           <m:sSub>
                             <m:sSubPr>
                               <m:ctrlPr>
-                                <a:rPr lang="ar-AE" i="1">
+                                <a:rPr lang="ar-AE">
                                   <a:latin typeface="Cambria Math" panose="02040503050406030204" pitchFamily="18" charset="0"/>
                                 </a:rPr>
                               </m:ctrlPr>
@@ -16250,7 +16021,7 @@
                                 <m:accPr>
                                   <m:chr m:val="⃗"/>
                                   <m:ctrlPr>
-                                    <a:rPr lang="ar-AE" i="1">
+                                    <a:rPr lang="ar-AE">
                                       <a:latin typeface="Cambria Math" panose="02040503050406030204" pitchFamily="18" charset="0"/>
                                     </a:rPr>
                                   </m:ctrlPr>
@@ -16854,7 +16625,11 @@
                 </a:r>
                 <a:r>
                   <a:rPr dirty="0"/>
-                  <a:t> is to generate the observed data</a:t>
+                  <a:t> is to </a:t>
+                </a:r>
+                <a:r>
+                  <a:rPr b="1" dirty="0"/>
+                  <a:t>generate the observed data</a:t>
                 </a:r>
               </a:p>
               <a:p>
@@ -16891,7 +16666,7 @@
                         <m:sSub>
                           <m:sSubPr>
                             <m:ctrlPr>
-                              <a:rPr i="1">
+                              <a:rPr>
                                 <a:latin typeface="Cambria Math" panose="02040503050406030204" pitchFamily="18" charset="0"/>
                               </a:rPr>
                             </m:ctrlPr>
@@ -16922,7 +16697,7 @@
                         <m:sSub>
                           <m:sSubPr>
                             <m:ctrlPr>
-                              <a:rPr i="1">
+                              <a:rPr>
                                 <a:latin typeface="Cambria Math" panose="02040503050406030204" pitchFamily="18" charset="0"/>
                               </a:rPr>
                             </m:ctrlPr>
@@ -16953,7 +16728,7 @@
                         <m:sSub>
                           <m:sSubPr>
                             <m:ctrlPr>
-                              <a:rPr i="1">
+                              <a:rPr>
                                 <a:latin typeface="Cambria Math" panose="02040503050406030204" pitchFamily="18" charset="0"/>
                               </a:rPr>
                             </m:ctrlPr>
@@ -17014,7 +16789,7 @@
                     <m:d>
                       <m:dPr>
                         <m:ctrlPr>
-                          <a:rPr i="1">
+                          <a:rPr>
                             <a:latin typeface="Cambria Math" panose="02040503050406030204" pitchFamily="18" charset="0"/>
                           </a:rPr>
                         </m:ctrlPr>
@@ -17057,7 +16832,7 @@
                     <m:d>
                       <m:dPr>
                         <m:ctrlPr>
-                          <a:rPr i="1">
+                          <a:rPr>
                             <a:latin typeface="Cambria Math" panose="02040503050406030204" pitchFamily="18" charset="0"/>
                           </a:rPr>
                         </m:ctrlPr>
@@ -17134,7 +16909,7 @@
                     <m:sSub>
                       <m:sSubPr>
                         <m:ctrlPr>
-                          <a:rPr i="1">
+                          <a:rPr>
                             <a:latin typeface="Cambria Math" panose="02040503050406030204" pitchFamily="18" charset="0"/>
                           </a:rPr>
                         </m:ctrlPr>
@@ -17179,7 +16954,7 @@
                     <m:sSub>
                       <m:sSubPr>
                         <m:ctrlPr>
-                          <a:rPr i="1">
+                          <a:rPr>
                             <a:latin typeface="Cambria Math" panose="02040503050406030204" pitchFamily="18" charset="0"/>
                           </a:rPr>
                         </m:ctrlPr>
@@ -17210,7 +16985,7 @@
                     <m:sSub>
                       <m:sSubPr>
                         <m:ctrlPr>
-                          <a:rPr i="1">
+                          <a:rPr>
                             <a:latin typeface="Cambria Math" panose="02040503050406030204" pitchFamily="18" charset="0"/>
                           </a:rPr>
                         </m:ctrlPr>
@@ -17241,7 +17016,7 @@
                     <m:sSub>
                       <m:sSubPr>
                         <m:ctrlPr>
-                          <a:rPr i="1">
+                          <a:rPr>
                             <a:latin typeface="Cambria Math" panose="02040503050406030204" pitchFamily="18" charset="0"/>
                           </a:rPr>
                         </m:ctrlPr>
@@ -17289,7 +17064,7 @@
                         <m:sSub>
                           <m:sSubPr>
                             <m:ctrlPr>
-                              <a:rPr i="1">
+                              <a:rPr>
                                 <a:latin typeface="Cambria Math" panose="02040503050406030204" pitchFamily="18" charset="0"/>
                               </a:rPr>
                             </m:ctrlPr>
@@ -17661,11 +17436,11 @@
                     <m:oMathParaPr>
                       <m:jc m:val="center"/>
                     </m:oMathParaPr>
-                    <m:oMath xmlns:m="http://schemas.openxmlformats.org/officeDocument/2006/math">
+                    <m:oMath>
                       <m:sSub>
                         <m:sSubPr>
                           <m:ctrlPr>
-                            <a:rPr lang="ar-AE" i="1">
+                            <a:rPr lang="ar-AE">
                               <a:latin typeface="Cambria Math" panose="02040503050406030204" pitchFamily="18" charset="0"/>
                             </a:rPr>
                           </m:ctrlPr>
@@ -17689,13 +17464,7 @@
                             <a:rPr lang="ar-AE">
                               <a:latin typeface="Cambria Math" panose="02040503050406030204" pitchFamily="18" charset="0"/>
                             </a:rPr>
-                            <m:t>+</m:t>
-                          </m:r>
-                          <m:r>
-                            <a:rPr lang="ar-AE">
-                              <a:latin typeface="Cambria Math" panose="02040503050406030204" pitchFamily="18" charset="0"/>
-                            </a:rPr>
-                            <m:t>1</m:t>
+                            <m:t>+1</m:t>
                           </m:r>
                         </m:sub>
                       </m:sSub>
@@ -17708,7 +17477,7 @@
                       <m:sSub>
                         <m:sSubPr>
                           <m:ctrlPr>
-                            <a:rPr lang="ar-AE" i="1">
+                            <a:rPr lang="ar-AE">
                               <a:latin typeface="Cambria Math" panose="02040503050406030204" pitchFamily="18" charset="0"/>
                             </a:rPr>
                           </m:ctrlPr>
@@ -17751,7 +17520,7 @@
                       <m:sSub>
                         <m:sSubPr>
                           <m:ctrlPr>
-                            <a:rPr lang="ar-AE" i="1">
+                            <a:rPr lang="ar-AE">
                               <a:latin typeface="Cambria Math" panose="02040503050406030204" pitchFamily="18" charset="0"/>
                             </a:rPr>
                           </m:ctrlPr>
@@ -17769,7 +17538,7 @@
                             <m:accPr>
                               <m:chr m:val="̂"/>
                               <m:ctrlPr>
-                                <a:rPr lang="ar-AE" i="1">
+                                <a:rPr lang="ar-AE">
                                   <a:latin typeface="Cambria Math" panose="02040503050406030204" pitchFamily="18" charset="0"/>
                                 </a:rPr>
                               </m:ctrlPr>
@@ -17805,7 +17574,7 @@
                           <m:sSub>
                             <m:sSubPr>
                               <m:ctrlPr>
-                                <a:rPr lang="ar-AE" i="1">
+                                <a:rPr lang="ar-AE">
                                   <a:latin typeface="Cambria Math" panose="02040503050406030204" pitchFamily="18" charset="0"/>
                                 </a:rPr>
                               </m:ctrlPr>
@@ -17848,7 +17617,7 @@
                               <m:sSub>
                                 <m:sSubPr>
                                   <m:ctrlPr>
-                                    <a:rPr lang="ar-AE" i="1">
+                                    <a:rPr lang="ar-AE">
                                       <a:latin typeface="Cambria Math" panose="02040503050406030204" pitchFamily="18" charset="0"/>
                                     </a:rPr>
                                   </m:ctrlPr>
@@ -17892,7 +17661,7 @@
                     <m:sSub>
                       <m:sSubPr>
                         <m:ctrlPr>
-                          <a:rPr lang="ar-AE" i="1">
+                          <a:rPr lang="ar-AE">
                             <a:latin typeface="Cambria Math" panose="02040503050406030204" pitchFamily="18" charset="0"/>
                           </a:rPr>
                         </m:ctrlPr>
@@ -17910,7 +17679,7 @@
                           <m:accPr>
                             <m:chr m:val="̂"/>
                             <m:ctrlPr>
-                              <a:rPr lang="ar-AE" i="1">
+                              <a:rPr lang="ar-AE">
                                 <a:latin typeface="Cambria Math" panose="02040503050406030204" pitchFamily="18" charset="0"/>
                               </a:rPr>
                             </m:ctrlPr>
@@ -17937,7 +17706,7 @@
                         <m:begChr m:val="["/>
                         <m:endChr m:val="]"/>
                         <m:ctrlPr>
-                          <a:rPr lang="ar-AE" i="1">
+                          <a:rPr lang="ar-AE" b="0" i="1" smtClean="0">
                             <a:latin typeface="Cambria Math" panose="02040503050406030204" pitchFamily="18" charset="0"/>
                           </a:rPr>
                         </m:ctrlPr>
@@ -17973,7 +17742,7 @@
                       <m:accPr>
                         <m:chr m:val="̂"/>
                         <m:ctrlPr>
-                          <a:rPr lang="ar-AE" i="1">
+                          <a:rPr lang="ar-AE">
                             <a:latin typeface="Cambria Math" panose="02040503050406030204" pitchFamily="18" charset="0"/>
                           </a:rPr>
                         </m:ctrlPr>
@@ -18608,7 +18377,7 @@
                     <m:d>
                       <m:dPr>
                         <m:ctrlPr>
-                          <a:rPr lang="ar-AE" i="1">
+                          <a:rPr lang="ar-AE">
                             <a:latin typeface="Cambria Math" panose="02040503050406030204" pitchFamily="18" charset="0"/>
                           </a:rPr>
                         </m:ctrlPr>
@@ -18649,7 +18418,7 @@
                     <m:sSub>
                       <m:sSubPr>
                         <m:ctrlPr>
-                          <a:rPr lang="ar-AE" i="1">
+                          <a:rPr lang="ar-AE">
                             <a:latin typeface="Cambria Math" panose="02040503050406030204" pitchFamily="18" charset="0"/>
                           </a:rPr>
                         </m:ctrlPr>
@@ -18680,7 +18449,7 @@
                     <m:sSub>
                       <m:sSubPr>
                         <m:ctrlPr>
-                          <a:rPr lang="ar-AE" i="1">
+                          <a:rPr lang="ar-AE">
                             <a:latin typeface="Cambria Math" panose="02040503050406030204" pitchFamily="18" charset="0"/>
                           </a:rPr>
                         </m:ctrlPr>
@@ -18734,7 +18503,7 @@
                     <m:oMathParaPr>
                       <m:jc m:val="center"/>
                     </m:oMathParaPr>
-                    <m:oMath xmlns:m="http://schemas.openxmlformats.org/officeDocument/2006/math">
+                    <m:oMath>
                       <m:r>
                         <a:rPr lang="en-US">
                           <a:latin typeface="Cambria Math" panose="02040503050406030204" pitchFamily="18" charset="0"/>
@@ -18753,7 +18522,7 @@
                           <m:sSub>
                             <m:sSubPr>
                               <m:ctrlPr>
-                                <a:rPr lang="ar-AE" i="1">
+                                <a:rPr lang="ar-AE">
                                   <a:latin typeface="Cambria Math" panose="02040503050406030204" pitchFamily="18" charset="0"/>
                                 </a:rPr>
                               </m:ctrlPr>
@@ -18813,7 +18582,7 @@
                           <m:sSub>
                             <m:sSubPr>
                               <m:ctrlPr>
-                                <a:rPr lang="ar-AE" i="1">
+                                <a:rPr lang="ar-AE">
                                   <a:latin typeface="Cambria Math" panose="02040503050406030204" pitchFamily="18" charset="0"/>
                                 </a:rPr>
                               </m:ctrlPr>
@@ -18867,7 +18636,7 @@
                           <m:sSub>
                             <m:sSubPr>
                               <m:ctrlPr>
-                                <a:rPr lang="ar-AE" i="1">
+                                <a:rPr lang="ar-AE">
                                   <a:latin typeface="Cambria Math" panose="02040503050406030204" pitchFamily="18" charset="0"/>
                                 </a:rPr>
                               </m:ctrlPr>
@@ -18906,7 +18675,7 @@
                       <m:f>
                         <m:fPr>
                           <m:ctrlPr>
-                            <a:rPr lang="ar-AE" i="1">
+                            <a:rPr lang="ar-AE">
                               <a:latin typeface="Cambria Math" panose="02040503050406030204" pitchFamily="18" charset="0"/>
                             </a:rPr>
                           </m:ctrlPr>
@@ -18952,7 +18721,7 @@
                           <m:sSub>
                             <m:sSubPr>
                               <m:ctrlPr>
-                                <a:rPr lang="ar-AE" i="1">
+                                <a:rPr lang="ar-AE">
                                   <a:latin typeface="Cambria Math" panose="02040503050406030204" pitchFamily="18" charset="0"/>
                                 </a:rPr>
                               </m:ctrlPr>
@@ -18985,7 +18754,7 @@
                       <m:sSup>
                         <m:sSupPr>
                           <m:ctrlPr>
-                            <a:rPr lang="ar-AE" i="1" smtClean="0">
+                            <a:rPr lang="ar-AE">
                               <a:latin typeface="Cambria Math" panose="02040503050406030204" pitchFamily="18" charset="0"/>
                             </a:rPr>
                           </m:ctrlPr>
@@ -19027,14 +18796,11 @@
                 </a:pPr>
                 <a14:m>
                   <m:oMathPara xmlns:m="http://schemas.openxmlformats.org/officeDocument/2006/math">
-                    <m:oMathParaPr>
-                      <m:jc m:val="centerGroup"/>
-                    </m:oMathParaPr>
-                    <m:oMath xmlns:m="http://schemas.openxmlformats.org/officeDocument/2006/math">
+                    <m:oMath>
                       <m:f>
                         <m:fPr>
                           <m:ctrlPr>
-                            <a:rPr lang="ar-AE" i="1" smtClean="0">
+                            <a:rPr lang="ar-AE" b="0" i="1" smtClean="0">
                               <a:latin typeface="Cambria Math" panose="02040503050406030204" pitchFamily="18" charset="0"/>
                             </a:rPr>
                           </m:ctrlPr>
@@ -19071,7 +18837,7 @@
                       <m:d>
                         <m:dPr>
                           <m:ctrlPr>
-                            <a:rPr lang="ar-AE" i="1" smtClean="0">
+                            <a:rPr lang="ar-AE">
                               <a:latin typeface="Cambria Math" panose="02040503050406030204" pitchFamily="18" charset="0"/>
                             </a:rPr>
                           </m:ctrlPr>
@@ -19095,7 +18861,7 @@
                               <m:sSub>
                                 <m:sSubPr>
                                   <m:ctrlPr>
-                                    <a:rPr lang="ar-AE" i="1">
+                                    <a:rPr lang="ar-AE">
                                       <a:latin typeface="Cambria Math" panose="02040503050406030204" pitchFamily="18" charset="0"/>
                                     </a:rPr>
                                   </m:ctrlPr>
@@ -19149,7 +18915,7 @@
                               <m:sSub>
                                 <m:sSubPr>
                                   <m:ctrlPr>
-                                    <a:rPr lang="ar-AE" i="1">
+                                    <a:rPr lang="ar-AE">
                                       <a:latin typeface="Cambria Math" panose="02040503050406030204" pitchFamily="18" charset="0"/>
                                     </a:rPr>
                                   </m:ctrlPr>
@@ -19188,7 +18954,7 @@
                           <m:f>
                             <m:fPr>
                               <m:ctrlPr>
-                                <a:rPr lang="ar-AE" i="1">
+                                <a:rPr lang="ar-AE">
                                   <a:latin typeface="Cambria Math" panose="02040503050406030204" pitchFamily="18" charset="0"/>
                                 </a:rPr>
                               </m:ctrlPr>
@@ -19234,7 +19000,7 @@
                               <m:sSub>
                                 <m:sSubPr>
                                   <m:ctrlPr>
-                                    <a:rPr lang="ar-AE" i="1">
+                                    <a:rPr lang="ar-AE">
                                       <a:latin typeface="Cambria Math" panose="02040503050406030204" pitchFamily="18" charset="0"/>
                                     </a:rPr>
                                   </m:ctrlPr>
@@ -19267,7 +19033,7 @@
                           <m:sSup>
                             <m:sSupPr>
                               <m:ctrlPr>
-                                <a:rPr lang="ar-AE" i="1">
+                                <a:rPr lang="ar-AE">
                                   <a:latin typeface="Cambria Math" panose="02040503050406030204" pitchFamily="18" charset="0"/>
                                 </a:rPr>
                               </m:ctrlPr>
@@ -19295,13 +19061,7 @@
                         <a:rPr lang="en-US" b="0" i="1" smtClean="0">
                           <a:latin typeface="Cambria Math" panose="02040503050406030204" pitchFamily="18" charset="0"/>
                         </a:rPr>
-                        <m:t>=</m:t>
-                      </m:r>
-                      <m:r>
-                        <a:rPr lang="en-US" b="0" i="1" smtClean="0">
-                          <a:latin typeface="Cambria Math" panose="02040503050406030204" pitchFamily="18" charset="0"/>
-                        </a:rPr>
-                        <m:t>0</m:t>
+                        <m:t>=0</m:t>
                       </m:r>
                     </m:oMath>
                   </m:oMathPara>
@@ -19314,14 +19074,11 @@
                 </a:pPr>
                 <a14:m>
                   <m:oMathPara xmlns:m="http://schemas.openxmlformats.org/officeDocument/2006/math">
-                    <m:oMathParaPr>
-                      <m:jc m:val="centerGroup"/>
-                    </m:oMathParaPr>
-                    <m:oMath xmlns:m="http://schemas.openxmlformats.org/officeDocument/2006/math">
+                    <m:oMath>
                       <m:sSup>
                         <m:sSupPr>
                           <m:ctrlPr>
-                            <a:rPr lang="ar-AE" i="1" smtClean="0">
+                            <a:rPr lang="ar-AE" smtClean="0">
                               <a:latin typeface="Cambria Math" panose="02040503050406030204" pitchFamily="18" charset="0"/>
                             </a:rPr>
                           </m:ctrlPr>
@@ -19355,7 +19112,7 @@
                           <m:sSub>
                             <m:sSubPr>
                               <m:ctrlPr>
-                                <a:rPr lang="ar-AE" i="1">
+                                <a:rPr lang="ar-AE">
                                   <a:latin typeface="Cambria Math" panose="02040503050406030204" pitchFamily="18" charset="0"/>
                                 </a:rPr>
                               </m:ctrlPr>
@@ -19388,7 +19145,7 @@
                       <m:sSup>
                         <m:sSupPr>
                           <m:ctrlPr>
-                            <a:rPr lang="ar-AE" i="1">
+                            <a:rPr lang="ar-AE">
                               <a:latin typeface="Cambria Math" panose="02040503050406030204" pitchFamily="18" charset="0"/>
                             </a:rPr>
                           </m:ctrlPr>
@@ -19422,7 +19179,7 @@
                           <m:sSub>
                             <m:sSubPr>
                               <m:ctrlPr>
-                                <a:rPr lang="ar-AE" i="1">
+                                <a:rPr lang="ar-AE">
                                   <a:latin typeface="Cambria Math" panose="02040503050406030204" pitchFamily="18" charset="0"/>
                                 </a:rPr>
                               </m:ctrlPr>
@@ -19462,13 +19219,7 @@
                         <a:rPr lang="en-US" b="0" i="0" smtClean="0">
                           <a:latin typeface="Cambria Math" panose="02040503050406030204" pitchFamily="18" charset="0"/>
                         </a:rPr>
-                        <m:t>=</m:t>
-                      </m:r>
-                      <m:r>
-                        <a:rPr lang="en-US" b="0" i="0" smtClean="0">
-                          <a:latin typeface="Cambria Math" panose="02040503050406030204" pitchFamily="18" charset="0"/>
-                        </a:rPr>
-                        <m:t>0</m:t>
+                        <m:t>=0</m:t>
                       </m:r>
                     </m:oMath>
                   </m:oMathPara>
@@ -19507,7 +19258,7 @@
                     <m:oMathParaPr>
                       <m:jc m:val="center"/>
                     </m:oMathParaPr>
-                    <m:oMath xmlns:m="http://schemas.openxmlformats.org/officeDocument/2006/math">
+                    <m:oMath>
                       <m:r>
                         <a:rPr lang="en-US">
                           <a:latin typeface="Cambria Math" panose="02040503050406030204" pitchFamily="18" charset="0"/>
@@ -19523,7 +19274,7 @@
                       <m:f>
                         <m:fPr>
                           <m:ctrlPr>
-                            <a:rPr lang="ar-AE" i="1">
+                            <a:rPr lang="ar-AE">
                               <a:latin typeface="Cambria Math" panose="02040503050406030204" pitchFamily="18" charset="0"/>
                             </a:rPr>
                           </m:ctrlPr>
@@ -19553,7 +19304,7 @@
                               <m:sSub>
                                 <m:sSubPr>
                                   <m:ctrlPr>
-                                    <a:rPr lang="ar-AE" i="1">
+                                    <a:rPr lang="ar-AE">
                                       <a:latin typeface="Cambria Math" panose="02040503050406030204" pitchFamily="18" charset="0"/>
                                     </a:rPr>
                                   </m:ctrlPr>
@@ -19603,7 +19354,7 @@
                               <m:sSub>
                                 <m:sSubPr>
                                   <m:ctrlPr>
-                                    <a:rPr lang="ar-AE" i="1">
+                                    <a:rPr lang="ar-AE">
                                       <a:latin typeface="Cambria Math" panose="02040503050406030204" pitchFamily="18" charset="0"/>
                                     </a:rPr>
                                   </m:ctrlPr>
@@ -19775,7 +19526,7 @@
                     <m:sSub>
                       <m:sSubPr>
                         <m:ctrlPr>
-                          <a:rPr lang="ar-AE" i="1">
+                          <a:rPr lang="ar-AE">
                             <a:latin typeface="Cambria Math" panose="02040503050406030204" pitchFamily="18" charset="0"/>
                           </a:rPr>
                         </m:ctrlPr>
@@ -19799,13 +19550,7 @@
                           <a:rPr lang="ar-AE">
                             <a:latin typeface="Cambria Math" panose="02040503050406030204" pitchFamily="18" charset="0"/>
                           </a:rPr>
-                          <m:t>+</m:t>
-                        </m:r>
-                        <m:r>
-                          <a:rPr lang="ar-AE">
-                            <a:latin typeface="Cambria Math" panose="02040503050406030204" pitchFamily="18" charset="0"/>
-                          </a:rPr>
-                          <m:t>1</m:t>
+                          <m:t>+1</m:t>
                         </m:r>
                       </m:sub>
                     </m:sSub>
@@ -19826,14 +19571,11 @@
                 </a:pPr>
                 <a14:m>
                   <m:oMathPara xmlns:m="http://schemas.openxmlformats.org/officeDocument/2006/math">
-                    <m:oMathParaPr>
-                      <m:jc m:val="centerGroup"/>
-                    </m:oMathParaPr>
-                    <m:oMath xmlns:m="http://schemas.openxmlformats.org/officeDocument/2006/math">
+                    <m:oMath>
                       <m:sSub>
                         <m:sSubPr>
                           <m:ctrlPr>
-                            <a:rPr lang="ar-AE" i="1">
+                            <a:rPr lang="ar-AE">
                               <a:latin typeface="Cambria Math" panose="02040503050406030204" pitchFamily="18" charset="0"/>
                             </a:rPr>
                           </m:ctrlPr>
@@ -19857,13 +19599,7 @@
                             <a:rPr lang="en-US" b="0" i="1" smtClean="0">
                               <a:latin typeface="Cambria Math" panose="02040503050406030204" pitchFamily="18" charset="0"/>
                             </a:rPr>
-                            <m:t>+</m:t>
-                          </m:r>
-                          <m:r>
-                            <a:rPr lang="en-US" b="0" i="1" smtClean="0">
-                              <a:latin typeface="Cambria Math" panose="02040503050406030204" pitchFamily="18" charset="0"/>
-                            </a:rPr>
-                            <m:t>1</m:t>
+                            <m:t>+1</m:t>
                           </m:r>
                         </m:sub>
                       </m:sSub>
@@ -19876,7 +19612,7 @@
                       <m:sSub>
                         <m:sSubPr>
                           <m:ctrlPr>
-                            <a:rPr lang="ar-AE" i="1">
+                            <a:rPr lang="ar-AE">
                               <a:latin typeface="Cambria Math" panose="02040503050406030204" pitchFamily="18" charset="0"/>
                             </a:rPr>
                           </m:ctrlPr>
@@ -19907,7 +19643,7 @@
                       <m:f>
                         <m:fPr>
                           <m:ctrlPr>
-                            <a:rPr lang="ar-AE" i="1">
+                            <a:rPr lang="ar-AE">
                               <a:latin typeface="Cambria Math" panose="02040503050406030204" pitchFamily="18" charset="0"/>
                             </a:rPr>
                           </m:ctrlPr>
@@ -19937,7 +19673,7 @@
                               <m:sSub>
                                 <m:sSubPr>
                                   <m:ctrlPr>
-                                    <a:rPr lang="ar-AE" i="1">
+                                    <a:rPr lang="ar-AE">
                                       <a:latin typeface="Cambria Math" panose="02040503050406030204" pitchFamily="18" charset="0"/>
                                     </a:rPr>
                                   </m:ctrlPr>
@@ -19987,7 +19723,7 @@
                               <m:sSub>
                                 <m:sSubPr>
                                   <m:ctrlPr>
-                                    <a:rPr lang="ar-AE" i="1">
+                                    <a:rPr lang="ar-AE">
                                       <a:latin typeface="Cambria Math" panose="02040503050406030204" pitchFamily="18" charset="0"/>
                                     </a:rPr>
                                   </m:ctrlPr>
@@ -20024,14 +19760,11 @@
                 </a:pPr>
                 <a14:m>
                   <m:oMathPara xmlns:m="http://schemas.openxmlformats.org/officeDocument/2006/math">
-                    <m:oMathParaPr>
-                      <m:jc m:val="centerGroup"/>
-                    </m:oMathParaPr>
-                    <m:oMath xmlns:m="http://schemas.openxmlformats.org/officeDocument/2006/math">
+                    <m:oMath>
                       <m:sSub>
                         <m:sSubPr>
                           <m:ctrlPr>
-                            <a:rPr lang="ar-AE" i="1" smtClean="0">
+                            <a:rPr lang="ar-AE">
                               <a:latin typeface="Cambria Math" panose="02040503050406030204" pitchFamily="18" charset="0"/>
                             </a:rPr>
                           </m:ctrlPr>
@@ -20055,13 +19788,7 @@
                             <a:rPr lang="en-US" b="0" i="1" smtClean="0">
                               <a:latin typeface="Cambria Math" panose="02040503050406030204" pitchFamily="18" charset="0"/>
                             </a:rPr>
-                            <m:t>+</m:t>
-                          </m:r>
-                          <m:r>
-                            <a:rPr lang="en-US" b="0" i="1" smtClean="0">
-                              <a:latin typeface="Cambria Math" panose="02040503050406030204" pitchFamily="18" charset="0"/>
-                            </a:rPr>
-                            <m:t>1</m:t>
+                            <m:t>+1</m:t>
                           </m:r>
                         </m:sub>
                       </m:sSub>
@@ -20074,7 +19801,7 @@
                       <m:sSub>
                         <m:sSubPr>
                           <m:ctrlPr>
-                            <a:rPr lang="ar-AE" i="1">
+                            <a:rPr lang="ar-AE">
                               <a:latin typeface="Cambria Math" panose="02040503050406030204" pitchFamily="18" charset="0"/>
                             </a:rPr>
                           </m:ctrlPr>
@@ -20311,7 +20038,7 @@
                           <m:accPr>
                             <m:chr m:val="⃗"/>
                             <m:ctrlPr>
-                              <a:rPr i="1">
+                              <a:rPr>
                                 <a:latin typeface="Cambria Math" panose="02040503050406030204" pitchFamily="18" charset="0"/>
                               </a:rPr>
                             </m:ctrlPr>
@@ -20345,7 +20072,7 @@
                     <m:sSup>
                       <m:sSupPr>
                         <m:ctrlPr>
-                          <a:rPr i="1">
+                          <a:rPr>
                             <a:latin typeface="Cambria Math" panose="02040503050406030204" pitchFamily="18" charset="0"/>
                           </a:rPr>
                         </m:ctrlPr>
@@ -20389,7 +20116,7 @@
                           <m:accPr>
                             <m:chr m:val="⃗"/>
                             <m:ctrlPr>
-                              <a:rPr i="1">
+                              <a:rPr>
                                 <a:latin typeface="Cambria Math" panose="02040503050406030204" pitchFamily="18" charset="0"/>
                               </a:rPr>
                             </m:ctrlPr>
@@ -20432,11 +20159,11 @@
                     <m:oMathParaPr>
                       <m:jc m:val="center"/>
                     </m:oMathParaPr>
-                    <m:oMath xmlns:m="http://schemas.openxmlformats.org/officeDocument/2006/math">
+                    <m:oMath>
                       <m:sSub>
                         <m:sSubPr>
                           <m:ctrlPr>
-                            <a:rPr i="1">
+                            <a:rPr>
                               <a:latin typeface="Cambria Math" panose="02040503050406030204" pitchFamily="18" charset="0"/>
                             </a:rPr>
                           </m:ctrlPr>
@@ -20460,13 +20187,7 @@
                             <a:rPr>
                               <a:latin typeface="Cambria Math" panose="02040503050406030204" pitchFamily="18" charset="0"/>
                             </a:rPr>
-                            <m:t>+</m:t>
-                          </m:r>
-                          <m:r>
-                            <a:rPr>
-                              <a:latin typeface="Cambria Math" panose="02040503050406030204" pitchFamily="18" charset="0"/>
-                            </a:rPr>
-                            <m:t>1</m:t>
+                            <m:t>+1</m:t>
                           </m:r>
                         </m:sub>
                       </m:sSub>
@@ -20479,7 +20200,7 @@
                       <m:sSub>
                         <m:sSubPr>
                           <m:ctrlPr>
-                            <a:rPr i="1">
+                            <a:rPr>
                               <a:latin typeface="Cambria Math" panose="02040503050406030204" pitchFamily="18" charset="0"/>
                             </a:rPr>
                           </m:ctrlPr>
@@ -20536,7 +20257,7 @@
                               <m:sSubSup>
                                 <m:sSubSupPr>
                                   <m:ctrlPr>
-                                    <a:rPr i="1">
+                                    <a:rPr>
                                       <a:latin typeface="Cambria Math" panose="02040503050406030204" pitchFamily="18" charset="0"/>
                                     </a:rPr>
                                   </m:ctrlPr>
@@ -20588,7 +20309,7 @@
                                     <m:accPr>
                                       <m:chr m:val="⃗"/>
                                       <m:ctrlPr>
-                                        <a:rPr i="1">
+                                        <a:rPr>
                                           <a:latin typeface="Cambria Math" panose="02040503050406030204" pitchFamily="18" charset="0"/>
                                         </a:rPr>
                                       </m:ctrlPr>
@@ -20612,20 +20333,14 @@
                             <a:rPr>
                               <a:latin typeface="Cambria Math" panose="02040503050406030204" pitchFamily="18" charset="0"/>
                             </a:rPr>
-                            <m:t>−</m:t>
-                          </m:r>
-                          <m:r>
-                            <a:rPr>
-                              <a:latin typeface="Cambria Math" panose="02040503050406030204" pitchFamily="18" charset="0"/>
-                            </a:rPr>
-                            <m:t>1</m:t>
+                            <m:t>−1</m:t>
                           </m:r>
                         </m:sup>
                       </m:sSup>
                       <m:sSub>
                         <m:sSubPr>
                           <m:ctrlPr>
-                            <a:rPr i="1">
+                            <a:rPr>
                               <a:latin typeface="Cambria Math" panose="02040503050406030204" pitchFamily="18" charset="0"/>
                             </a:rPr>
                           </m:ctrlPr>
@@ -20669,7 +20384,7 @@
                             <m:accPr>
                               <m:chr m:val="⃗"/>
                               <m:ctrlPr>
-                                <a:rPr i="1">
+                                <a:rPr>
                                   <a:latin typeface="Cambria Math" panose="02040503050406030204" pitchFamily="18" charset="0"/>
                                 </a:rPr>
                               </m:ctrlPr>
@@ -20874,11 +20589,11 @@
                     <m:oMathParaPr>
                       <m:jc m:val="center"/>
                     </m:oMathParaPr>
-                    <m:oMath xmlns:m="http://schemas.openxmlformats.org/officeDocument/2006/math">
+                    <m:oMath>
                       <m:sSub>
                         <m:sSubPr>
                           <m:ctrlPr>
-                            <a:rPr sz="2200" i="1">
+                            <a:rPr sz="2200">
                               <a:latin typeface="Cambria Math" panose="02040503050406030204" pitchFamily="18" charset="0"/>
                             </a:rPr>
                           </m:ctrlPr>
@@ -20902,13 +20617,7 @@
                             <a:rPr sz="2200">
                               <a:latin typeface="Cambria Math" panose="02040503050406030204" pitchFamily="18" charset="0"/>
                             </a:rPr>
-                            <m:t>+</m:t>
-                          </m:r>
-                          <m:r>
-                            <a:rPr sz="2200">
-                              <a:latin typeface="Cambria Math" panose="02040503050406030204" pitchFamily="18" charset="0"/>
-                            </a:rPr>
-                            <m:t>1</m:t>
+                            <m:t>+1</m:t>
                           </m:r>
                         </m:sub>
                       </m:sSub>
@@ -20921,7 +20630,7 @@
                       <m:sSub>
                         <m:sSubPr>
                           <m:ctrlPr>
-                            <a:rPr sz="2200" i="1">
+                            <a:rPr sz="2200">
                               <a:latin typeface="Cambria Math" panose="02040503050406030204" pitchFamily="18" charset="0"/>
                             </a:rPr>
                           </m:ctrlPr>
@@ -20978,7 +20687,7 @@
                               <m:sSubSup>
                                 <m:sSubSupPr>
                                   <m:ctrlPr>
-                                    <a:rPr sz="2200" i="1">
+                                    <a:rPr sz="2200">
                                       <a:latin typeface="Cambria Math" panose="02040503050406030204" pitchFamily="18" charset="0"/>
                                     </a:rPr>
                                   </m:ctrlPr>
@@ -21030,7 +20739,7 @@
                                     <m:accPr>
                                       <m:chr m:val="⃗"/>
                                       <m:ctrlPr>
-                                        <a:rPr sz="2200" i="1">
+                                        <a:rPr sz="2200">
                                           <a:latin typeface="Cambria Math" panose="02040503050406030204" pitchFamily="18" charset="0"/>
                                         </a:rPr>
                                       </m:ctrlPr>
@@ -21054,20 +20763,14 @@
                             <a:rPr sz="2200">
                               <a:latin typeface="Cambria Math" panose="02040503050406030204" pitchFamily="18" charset="0"/>
                             </a:rPr>
-                            <m:t>−</m:t>
-                          </m:r>
-                          <m:r>
-                            <a:rPr sz="2200">
-                              <a:latin typeface="Cambria Math" panose="02040503050406030204" pitchFamily="18" charset="0"/>
-                            </a:rPr>
-                            <m:t>1</m:t>
+                            <m:t>−1</m:t>
                           </m:r>
                         </m:sup>
                       </m:sSup>
                       <m:sSub>
                         <m:sSubPr>
                           <m:ctrlPr>
-                            <a:rPr sz="2200" i="1">
+                            <a:rPr sz="2200">
                               <a:latin typeface="Cambria Math" panose="02040503050406030204" pitchFamily="18" charset="0"/>
                             </a:rPr>
                           </m:ctrlPr>
@@ -21111,7 +20814,7 @@
                             <m:accPr>
                               <m:chr m:val="⃗"/>
                               <m:ctrlPr>
-                                <a:rPr sz="2200" i="1">
+                                <a:rPr sz="2200">
                                   <a:latin typeface="Cambria Math" panose="02040503050406030204" pitchFamily="18" charset="0"/>
                                 </a:rPr>
                               </m:ctrlPr>
@@ -21717,8 +21420,8 @@
           <a:chExt cx="0" cy="0"/>
         </a:xfrm>
       </p:grpSpPr>
-      <mc:AlternateContent xmlns:mc="http://schemas.openxmlformats.org/markup-compatibility/2006" xmlns:a14="http://schemas.microsoft.com/office/drawing/2010/main">
-        <mc:Choice Requires="a14">
+      <mc:AlternateContent xmlns:mc="http://schemas.openxmlformats.org/markup-compatibility/2006">
+        <mc:Choice xmlns:a14="http://schemas.microsoft.com/office/drawing/2010/main" Requires="a14">
           <p:sp>
             <p:nvSpPr>
               <p:cNvPr id="3" name="Content Placeholder 2"/>
@@ -21790,7 +21493,7 @@
                     <m:d>
                       <m:dPr>
                         <m:ctrlPr>
-                          <a:rPr i="1">
+                          <a:rPr>
                             <a:latin typeface="Cambria Math" panose="02040503050406030204" pitchFamily="18" charset="0"/>
                           </a:rPr>
                         </m:ctrlPr>
@@ -21854,7 +21557,7 @@
                         <m:sSub>
                           <m:sSubPr>
                             <m:ctrlPr>
-                              <a:rPr i="1">
+                              <a:rPr>
                                 <a:latin typeface="Cambria Math" panose="02040503050406030204" pitchFamily="18" charset="0"/>
                               </a:rPr>
                             </m:ctrlPr>
@@ -21885,7 +21588,7 @@
                         <m:sSub>
                           <m:sSubPr>
                             <m:ctrlPr>
-                              <a:rPr i="1">
+                              <a:rPr>
                                 <a:latin typeface="Cambria Math" panose="02040503050406030204" pitchFamily="18" charset="0"/>
                               </a:rPr>
                             </m:ctrlPr>
@@ -21916,7 +21619,7 @@
                         <m:sSub>
                           <m:sSubPr>
                             <m:ctrlPr>
-                              <a:rPr i="1">
+                              <a:rPr>
                                 <a:latin typeface="Cambria Math" panose="02040503050406030204" pitchFamily="18" charset="0"/>
                               </a:rPr>
                             </m:ctrlPr>
@@ -21944,7 +21647,19 @@
                 </a14:m>
                 <a:r>
                   <a:rPr dirty="0"/>
-                  <a:t>, the likelihood is the product of the densities:</a:t>
+                  <a:t>, the </a:t>
+                </a:r>
+                <a:r>
+                  <a:rPr b="1" dirty="0"/>
+                  <a:t>likelihood is the product of the densities</a:t>
+                </a:r>
+                <a:r>
+                  <a:rPr lang="en-US" b="1" dirty="0"/>
+                  <a:t> of each observation</a:t>
+                </a:r>
+                <a:r>
+                  <a:rPr dirty="0"/>
+                  <a:t>:</a:t>
                 </a:r>
               </a:p>
               <a:p>
@@ -21956,7 +21671,7 @@
                     <m:oMathParaPr>
                       <m:jc m:val="center"/>
                     </m:oMathParaPr>
-                    <m:oMath xmlns:m="http://schemas.openxmlformats.org/officeDocument/2006/math">
+                    <m:oMath>
                       <m:r>
                         <a:rPr>
                           <a:latin typeface="Cambria Math" panose="02040503050406030204" pitchFamily="18" charset="0"/>
@@ -21966,7 +21681,7 @@
                       <m:d>
                         <m:dPr>
                           <m:ctrlPr>
-                            <a:rPr i="1">
+                            <a:rPr>
                               <a:latin typeface="Cambria Math" panose="02040503050406030204" pitchFamily="18" charset="0"/>
                             </a:rPr>
                           </m:ctrlPr>
@@ -22003,7 +21718,7 @@
                           <m:chr m:val="∏"/>
                           <m:limLoc m:val="undOvr"/>
                           <m:ctrlPr>
-                            <a:rPr i="1">
+                            <a:rPr>
                               <a:latin typeface="Cambria Math" panose="02040503050406030204" pitchFamily="18" charset="0"/>
                             </a:rPr>
                           </m:ctrlPr>
@@ -22019,13 +21734,7 @@
                             <a:rPr>
                               <a:latin typeface="Cambria Math" panose="02040503050406030204" pitchFamily="18" charset="0"/>
                             </a:rPr>
-                            <m:t>=</m:t>
-                          </m:r>
-                          <m:r>
-                            <a:rPr>
-                              <a:latin typeface="Cambria Math" panose="02040503050406030204" pitchFamily="18" charset="0"/>
-                            </a:rPr>
-                            <m:t>1</m:t>
+                            <m:t>=1</m:t>
                           </m:r>
                         </m:sub>
                         <m:sup>
@@ -22057,7 +21766,7 @@
                           <m:sSub>
                             <m:sSubPr>
                               <m:ctrlPr>
-                                <a:rPr i="1">
+                                <a:rPr>
                                   <a:latin typeface="Cambria Math" panose="02040503050406030204" pitchFamily="18" charset="0"/>
                                 </a:rPr>
                               </m:ctrlPr>
@@ -22129,7 +21838,7 @@
                     <m:sSub>
                       <m:sSubPr>
                         <m:ctrlPr>
-                          <a:rPr i="1">
+                          <a:rPr>
                             <a:latin typeface="Cambria Math" panose="02040503050406030204" pitchFamily="18" charset="0"/>
                           </a:rPr>
                         </m:ctrlPr>
@@ -22160,7 +21869,7 @@
                     <m:sSub>
                       <m:sSubPr>
                         <m:ctrlPr>
-                          <a:rPr i="1">
+                          <a:rPr>
                             <a:latin typeface="Cambria Math" panose="02040503050406030204" pitchFamily="18" charset="0"/>
                           </a:rPr>
                         </m:ctrlPr>
@@ -22191,7 +21900,7 @@
                     <m:sSub>
                       <m:sSubPr>
                         <m:ctrlPr>
-                          <a:rPr i="1">
+                          <a:rPr>
                             <a:latin typeface="Cambria Math" panose="02040503050406030204" pitchFamily="18" charset="0"/>
                           </a:rPr>
                         </m:ctrlPr>
@@ -22229,7 +21938,7 @@
                     <m:oMathParaPr>
                       <m:jc m:val="center"/>
                     </m:oMathParaPr>
-                    <m:oMath xmlns:m="http://schemas.openxmlformats.org/officeDocument/2006/math">
+                    <m:oMath>
                       <m:r>
                         <a:rPr>
                           <a:latin typeface="Cambria Math" panose="02040503050406030204" pitchFamily="18" charset="0"/>
@@ -22239,7 +21948,7 @@
                       <m:d>
                         <m:dPr>
                           <m:ctrlPr>
-                            <a:rPr i="1">
+                            <a:rPr>
                               <a:latin typeface="Cambria Math" panose="02040503050406030204" pitchFamily="18" charset="0"/>
                             </a:rPr>
                           </m:ctrlPr>
@@ -22280,7 +21989,7 @@
                       <m:d>
                         <m:dPr>
                           <m:ctrlPr>
-                            <a:rPr i="1">
+                            <a:rPr>
                               <a:latin typeface="Cambria Math" panose="02040503050406030204" pitchFamily="18" charset="0"/>
                             </a:rPr>
                           </m:ctrlPr>
@@ -22295,7 +22004,7 @@
                           <m:d>
                             <m:dPr>
                               <m:ctrlPr>
-                                <a:rPr i="1">
+                                <a:rPr>
                                   <a:latin typeface="Cambria Math" panose="02040503050406030204" pitchFamily="18" charset="0"/>
                                 </a:rPr>
                               </m:ctrlPr>
@@ -22334,7 +22043,7 @@
                           <m:chr m:val="∑"/>
                           <m:limLoc m:val="undOvr"/>
                           <m:ctrlPr>
-                            <a:rPr i="1">
+                            <a:rPr>
                               <a:latin typeface="Cambria Math" panose="02040503050406030204" pitchFamily="18" charset="0"/>
                             </a:rPr>
                           </m:ctrlPr>
@@ -22350,13 +22059,7 @@
                             <a:rPr>
                               <a:latin typeface="Cambria Math" panose="02040503050406030204" pitchFamily="18" charset="0"/>
                             </a:rPr>
-                            <m:t>=</m:t>
-                          </m:r>
-                          <m:r>
-                            <a:rPr>
-                              <a:latin typeface="Cambria Math" panose="02040503050406030204" pitchFamily="18" charset="0"/>
-                            </a:rPr>
-                            <m:t>1</m:t>
+                            <m:t>=1</m:t>
                           </m:r>
                         </m:sub>
                         <m:sup>
@@ -22385,7 +22088,7 @@
                       <m:d>
                         <m:dPr>
                           <m:ctrlPr>
-                            <a:rPr i="1">
+                            <a:rPr>
                               <a:latin typeface="Cambria Math" panose="02040503050406030204" pitchFamily="18" charset="0"/>
                             </a:rPr>
                           </m:ctrlPr>
@@ -22409,7 +22112,7 @@
                               <m:sSub>
                                 <m:sSubPr>
                                   <m:ctrlPr>
-                                    <a:rPr i="1">
+                                    <a:rPr>
                                       <a:latin typeface="Cambria Math" panose="02040503050406030204" pitchFamily="18" charset="0"/>
                                     </a:rPr>
                                   </m:ctrlPr>
@@ -22455,7 +22158,7 @@
             </p:txBody>
           </p:sp>
         </mc:Choice>
-        <mc:Fallback xmlns="">
+        <mc:Fallback>
           <p:sp>
             <p:nvSpPr>
               <p:cNvPr id="3" name="Content Placeholder 2"/>
@@ -22474,7 +22177,7 @@
               <a:blipFill>
                 <a:blip r:embed="rId2"/>
                 <a:stretch>
-                  <a:fillRect l="-667" t="-2110" r="-1111"/>
+                  <a:fillRect l="-667" t="-2110"/>
                 </a:stretch>
               </a:blipFill>
             </p:spPr>
@@ -22637,13 +22340,7 @@
                       <a:rPr>
                         <a:latin typeface="Cambria Math" panose="02040503050406030204" pitchFamily="18" charset="0"/>
                       </a:rPr>
-                      <m:t>=</m:t>
-                    </m:r>
-                    <m:r>
-                      <a:rPr>
-                        <a:latin typeface="Cambria Math" panose="02040503050406030204" pitchFamily="18" charset="0"/>
-                      </a:rPr>
-                      <m:t>0</m:t>
+                      <m:t>=0</m:t>
                     </m:r>
                   </m:oMath>
                 </a14:m>
@@ -22663,13 +22360,7 @@
                       <a:rPr>
                         <a:latin typeface="Cambria Math" panose="02040503050406030204" pitchFamily="18" charset="0"/>
                       </a:rPr>
-                      <m:t>=</m:t>
-                    </m:r>
-                    <m:r>
-                      <a:rPr>
-                        <a:latin typeface="Cambria Math" panose="02040503050406030204" pitchFamily="18" charset="0"/>
-                      </a:rPr>
-                      <m:t>1</m:t>
+                      <m:t>=1</m:t>
                     </m:r>
                   </m:oMath>
                 </a14:m>
@@ -22822,25 +22513,7 @@
                       <a:rPr sz="2000">
                         <a:latin typeface="Cambria Math" panose="02040503050406030204" pitchFamily="18" charset="0"/>
                       </a:rPr>
-                      <m:t>=</m:t>
-                    </m:r>
-                    <m:r>
-                      <a:rPr sz="2000">
-                        <a:latin typeface="Cambria Math" panose="02040503050406030204" pitchFamily="18" charset="0"/>
-                      </a:rPr>
-                      <m:t>0</m:t>
-                    </m:r>
-                    <m:r>
-                      <a:rPr sz="2000">
-                        <a:latin typeface="Cambria Math" panose="02040503050406030204" pitchFamily="18" charset="0"/>
-                      </a:rPr>
-                      <m:t>.</m:t>
-                    </m:r>
-                    <m:r>
-                      <a:rPr sz="2000">
-                        <a:latin typeface="Cambria Math" panose="02040503050406030204" pitchFamily="18" charset="0"/>
-                      </a:rPr>
-                      <m:t>5</m:t>
+                      <m:t>=0.5</m:t>
                     </m:r>
                   </m:oMath>
                 </a14:m>
@@ -22863,13 +22536,7 @@
                       <a:rPr sz="2000">
                         <a:latin typeface="Cambria Math" panose="02040503050406030204" pitchFamily="18" charset="0"/>
                       </a:rPr>
-                      <m:t>=</m:t>
-                    </m:r>
-                    <m:r>
-                      <a:rPr sz="2000">
-                        <a:latin typeface="Cambria Math" panose="02040503050406030204" pitchFamily="18" charset="0"/>
-                      </a:rPr>
-                      <m:t>0</m:t>
+                      <m:t>=0</m:t>
                     </m:r>
                   </m:oMath>
                 </a14:m>
@@ -22889,13 +22556,7 @@
                       <a:rPr sz="2000">
                         <a:latin typeface="Cambria Math" panose="02040503050406030204" pitchFamily="18" charset="0"/>
                       </a:rPr>
-                      <m:t>=</m:t>
-                    </m:r>
-                    <m:r>
-                      <a:rPr sz="2000">
-                        <a:latin typeface="Cambria Math" panose="02040503050406030204" pitchFamily="18" charset="0"/>
-                      </a:rPr>
-                      <m:t>1</m:t>
+                      <m:t>=1</m:t>
                     </m:r>
                   </m:oMath>
                 </a14:m>
@@ -23346,7 +23007,7 @@
                     <m:oMathParaPr>
                       <m:jc m:val="center"/>
                     </m:oMathParaPr>
-                    <m:oMath xmlns:m="http://schemas.openxmlformats.org/officeDocument/2006/math">
+                    <m:oMath>
                       <m:r>
                         <a:rPr sz="2200">
                           <a:latin typeface="Cambria Math" panose="02040503050406030204" pitchFamily="18" charset="0"/>
@@ -23356,7 +23017,7 @@
                       <m:d>
                         <m:dPr>
                           <m:ctrlPr>
-                            <a:rPr sz="2200" i="1">
+                            <a:rPr sz="2200">
                               <a:latin typeface="Cambria Math" panose="02040503050406030204" pitchFamily="18" charset="0"/>
                             </a:rPr>
                           </m:ctrlPr>
@@ -23393,7 +23054,7 @@
                           <m:chr m:val="∏"/>
                           <m:limLoc m:val="undOvr"/>
                           <m:ctrlPr>
-                            <a:rPr sz="2200" i="1">
+                            <a:rPr sz="2200">
                               <a:latin typeface="Cambria Math" panose="02040503050406030204" pitchFamily="18" charset="0"/>
                             </a:rPr>
                           </m:ctrlPr>
@@ -23409,13 +23070,7 @@
                             <a:rPr sz="2200">
                               <a:latin typeface="Cambria Math" panose="02040503050406030204" pitchFamily="18" charset="0"/>
                             </a:rPr>
-                            <m:t>=</m:t>
-                          </m:r>
-                          <m:r>
-                            <a:rPr sz="2200">
-                              <a:latin typeface="Cambria Math" panose="02040503050406030204" pitchFamily="18" charset="0"/>
-                            </a:rPr>
-                            <m:t>1</m:t>
+                            <m:t>=1</m:t>
                           </m:r>
                         </m:sub>
                         <m:sup>
@@ -23447,7 +23102,7 @@
                           <m:sSub>
                             <m:sSubPr>
                               <m:ctrlPr>
-                                <a:rPr sz="2200" i="1">
+                                <a:rPr sz="2200">
                                   <a:latin typeface="Cambria Math" panose="02040503050406030204" pitchFamily="18" charset="0"/>
                                 </a:rPr>
                               </m:ctrlPr>
@@ -23510,7 +23165,7 @@
                     <m:oMathParaPr>
                       <m:jc m:val="center"/>
                     </m:oMathParaPr>
-                    <m:oMath xmlns:m="http://schemas.openxmlformats.org/officeDocument/2006/math">
+                    <m:oMath>
                       <m:r>
                         <a:rPr sz="2200">
                           <a:latin typeface="Cambria Math" panose="02040503050406030204" pitchFamily="18" charset="0"/>
@@ -23520,7 +23175,7 @@
                       <m:d>
                         <m:dPr>
                           <m:ctrlPr>
-                            <a:rPr sz="2200" i="1">
+                            <a:rPr sz="2200">
                               <a:latin typeface="Cambria Math" panose="02040503050406030204" pitchFamily="18" charset="0"/>
                             </a:rPr>
                           </m:ctrlPr>
@@ -23561,7 +23216,7 @@
                       <m:d>
                         <m:dPr>
                           <m:ctrlPr>
-                            <a:rPr sz="2200" i="1">
+                            <a:rPr sz="2200">
                               <a:latin typeface="Cambria Math" panose="02040503050406030204" pitchFamily="18" charset="0"/>
                             </a:rPr>
                           </m:ctrlPr>
@@ -23576,7 +23231,7 @@
                           <m:d>
                             <m:dPr>
                               <m:ctrlPr>
-                                <a:rPr sz="2200" i="1">
+                                <a:rPr sz="2200">
                                   <a:latin typeface="Cambria Math" panose="02040503050406030204" pitchFamily="18" charset="0"/>
                                 </a:rPr>
                               </m:ctrlPr>
@@ -23615,7 +23270,7 @@
                           <m:chr m:val="∑"/>
                           <m:limLoc m:val="undOvr"/>
                           <m:ctrlPr>
-                            <a:rPr sz="2200" i="1">
+                            <a:rPr sz="2200">
                               <a:latin typeface="Cambria Math" panose="02040503050406030204" pitchFamily="18" charset="0"/>
                             </a:rPr>
                           </m:ctrlPr>
@@ -23654,7 +23309,7 @@
                       <m:d>
                         <m:dPr>
                           <m:ctrlPr>
-                            <a:rPr sz="2200" i="1">
+                            <a:rPr sz="2200">
                               <a:latin typeface="Cambria Math" panose="02040503050406030204" pitchFamily="18" charset="0"/>
                             </a:rPr>
                           </m:ctrlPr>
@@ -23678,7 +23333,7 @@
                               <m:sSub>
                                 <m:sSubPr>
                                   <m:ctrlPr>
-                                    <a:rPr sz="2200" i="1">
+                                    <a:rPr sz="2200">
                                       <a:latin typeface="Cambria Math" panose="02040503050406030204" pitchFamily="18" charset="0"/>
                                     </a:rPr>
                                   </m:ctrlPr>
@@ -23882,7 +23537,7 @@
                           <m:accPr>
                             <m:chr m:val="⃗"/>
                             <m:ctrlPr>
-                              <a:rPr i="1">
+                              <a:rPr>
                                 <a:latin typeface="Cambria Math" panose="02040503050406030204" pitchFamily="18" charset="0"/>
                               </a:rPr>
                             </m:ctrlPr>
@@ -23941,7 +23596,7 @@
                     <m:oMathParaPr>
                       <m:jc m:val="center"/>
                     </m:oMathParaPr>
-                    <m:oMath xmlns:m="http://schemas.openxmlformats.org/officeDocument/2006/math">
+                    <m:oMath>
                       <m:r>
                         <a:rPr>
                           <a:latin typeface="Cambria Math" panose="02040503050406030204" pitchFamily="18" charset="0"/>
@@ -23961,7 +23616,7 @@
                             <m:accPr>
                               <m:chr m:val="⃗"/>
                               <m:ctrlPr>
-                                <a:rPr i="1">
+                                <a:rPr>
                                   <a:latin typeface="Cambria Math" panose="02040503050406030204" pitchFamily="18" charset="0"/>
                                 </a:rPr>
                               </m:ctrlPr>
@@ -23994,7 +23649,7 @@
                           <m:begChr m:val="{"/>
                           <m:endChr m:val="}"/>
                           <m:ctrlPr>
-                            <a:rPr i="1">
+                            <a:rPr>
                               <a:latin typeface="Cambria Math" panose="02040503050406030204" pitchFamily="18" charset="0"/>
                             </a:rPr>
                           </m:ctrlPr>
@@ -24019,7 +23674,7 @@
                                 <m:accPr>
                                   <m:chr m:val="⃗"/>
                                   <m:ctrlPr>
-                                    <a:rPr i="1">
+                                    <a:rPr>
                                       <a:latin typeface="Cambria Math" panose="02040503050406030204" pitchFamily="18" charset="0"/>
                                     </a:rPr>
                                   </m:ctrlPr>
@@ -24072,7 +23727,7 @@
                               <m:sSup>
                                 <m:sSupPr>
                                   <m:ctrlPr>
-                                    <a:rPr i="1">
+                                    <a:rPr>
                                       <a:latin typeface="Cambria Math" panose="02040503050406030204" pitchFamily="18" charset="0"/>
                                     </a:rPr>
                                   </m:ctrlPr>
@@ -24109,7 +23764,7 @@
                               <m:d>
                                 <m:dPr>
                                   <m:ctrlPr>
-                                    <a:rPr i="1">
+                                    <a:rPr>
                                       <a:latin typeface="Cambria Math" panose="02040503050406030204" pitchFamily="18" charset="0"/>
                                     </a:rPr>
                                   </m:ctrlPr>
@@ -24146,7 +23801,7 @@
                               <m:sSup>
                                 <m:sSupPr>
                                   <m:ctrlPr>
-                                    <a:rPr i="1">
+                                    <a:rPr>
                                       <a:latin typeface="Cambria Math" panose="02040503050406030204" pitchFamily="18" charset="0"/>
                                     </a:rPr>
                                   </m:ctrlPr>
@@ -24193,11 +23848,11 @@
                     <m:oMathParaPr>
                       <m:jc m:val="center"/>
                     </m:oMathParaPr>
-                    <m:oMath xmlns:m="http://schemas.openxmlformats.org/officeDocument/2006/math">
+                    <m:oMath>
                       <m:f>
                         <m:fPr>
                           <m:ctrlPr>
-                            <a:rPr i="1">
+                            <a:rPr>
                               <a:latin typeface="Cambria Math" panose="02040503050406030204" pitchFamily="18" charset="0"/>
                             </a:rPr>
                           </m:ctrlPr>
@@ -24224,7 +23879,7 @@
                           <m:d>
                             <m:dPr>
                               <m:ctrlPr>
-                                <a:rPr i="1">
+                                <a:rPr>
                                   <a:latin typeface="Cambria Math" panose="02040503050406030204" pitchFamily="18" charset="0"/>
                                 </a:rPr>
                               </m:ctrlPr>
@@ -24258,7 +23913,7 @@
                         <m:accPr>
                           <m:chr m:val="̇"/>
                           <m:ctrlPr>
-                            <a:rPr i="1">
+                            <a:rPr>
                               <a:latin typeface="Cambria Math" panose="02040503050406030204" pitchFamily="18" charset="0"/>
                             </a:rPr>
                           </m:ctrlPr>
@@ -24287,7 +23942,7 @@
                       <m:d>
                         <m:dPr>
                           <m:ctrlPr>
-                            <a:rPr i="1">
+                            <a:rPr>
                               <a:latin typeface="Cambria Math" panose="02040503050406030204" pitchFamily="18" charset="0"/>
                             </a:rPr>
                           </m:ctrlPr>
@@ -24297,30 +23952,12 @@
                             <a:rPr>
                               <a:latin typeface="Cambria Math" panose="02040503050406030204" pitchFamily="18" charset="0"/>
                             </a:rPr>
-                            <m:t>0</m:t>
-                          </m:r>
-                          <m:r>
-                            <a:rPr>
-                              <a:latin typeface="Cambria Math" panose="02040503050406030204" pitchFamily="18" charset="0"/>
-                            </a:rPr>
-                            <m:t>,</m:t>
-                          </m:r>
-                          <m:r>
-                            <a:rPr>
-                              <a:latin typeface="Cambria Math" panose="02040503050406030204" pitchFamily="18" charset="0"/>
-                            </a:rPr>
-                            <m:t>1</m:t>
-                          </m:r>
-                          <m:r>
-                            <a:rPr>
-                              <a:latin typeface="Cambria Math" panose="02040503050406030204" pitchFamily="18" charset="0"/>
-                            </a:rPr>
-                            <m:t>/</m:t>
+                            <m:t>0,1/</m:t>
                           </m:r>
                           <m:sSub>
                             <m:sSubPr>
                               <m:ctrlPr>
-                                <a:rPr i="1">
+                                <a:rPr>
                                   <a:latin typeface="Cambria Math" panose="02040503050406030204" pitchFamily="18" charset="0"/>
                                 </a:rPr>
                               </m:ctrlPr>
@@ -24375,13 +24012,7 @@
                       <a:rPr>
                         <a:latin typeface="Cambria Math" panose="02040503050406030204" pitchFamily="18" charset="0"/>
                       </a:rPr>
-                      <m:t>→</m:t>
-                    </m:r>
-                    <m:r>
-                      <a:rPr>
-                        <a:latin typeface="Cambria Math" panose="02040503050406030204" pitchFamily="18" charset="0"/>
-                      </a:rPr>
-                      <m:t>∞</m:t>
+                      <m:t>→∞</m:t>
                     </m:r>
                   </m:oMath>
                 </a14:m>
@@ -24413,12 +24044,12 @@
                     <m:oMathParaPr>
                       <m:jc m:val="center"/>
                     </m:oMathParaPr>
-                    <m:oMath xmlns:m="http://schemas.openxmlformats.org/officeDocument/2006/math">
+                    <m:oMath>
                       <m:acc>
                         <m:accPr>
                           <m:chr m:val="̂"/>
                           <m:ctrlPr>
-                            <a:rPr i="1">
+                            <a:rPr>
                               <a:latin typeface="Cambria Math" panose="02040503050406030204" pitchFamily="18" charset="0"/>
                             </a:rPr>
                           </m:ctrlPr>
@@ -24436,7 +24067,7 @@
                         <m:accPr>
                           <m:chr m:val="̇"/>
                           <m:ctrlPr>
-                            <a:rPr i="1">
+                            <a:rPr>
                               <a:latin typeface="Cambria Math" panose="02040503050406030204" pitchFamily="18" charset="0"/>
                             </a:rPr>
                           </m:ctrlPr>
@@ -24459,7 +24090,7 @@
                       <m:d>
                         <m:dPr>
                           <m:ctrlPr>
-                            <a:rPr i="1">
+                            <a:rPr>
                               <a:latin typeface="Cambria Math" panose="02040503050406030204" pitchFamily="18" charset="0"/>
                             </a:rPr>
                           </m:ctrlPr>
@@ -24480,7 +24111,7 @@
                           <m:f>
                             <m:fPr>
                               <m:ctrlPr>
-                                <a:rPr i="1">
+                                <a:rPr>
                                   <a:latin typeface="Cambria Math" panose="02040503050406030204" pitchFamily="18" charset="0"/>
                                 </a:rPr>
                               </m:ctrlPr>
@@ -24509,7 +24140,7 @@
                               <m:d>
                                 <m:dPr>
                                   <m:ctrlPr>
-                                    <a:rPr i="1">
+                                    <a:rPr>
                                       <a:latin typeface="Cambria Math" panose="02040503050406030204" pitchFamily="18" charset="0"/>
                                     </a:rPr>
                                   </m:ctrlPr>
@@ -24544,7 +24175,7 @@
                       <m:accPr>
                         <m:chr m:val="̂"/>
                         <m:ctrlPr>
-                          <a:rPr i="1">
+                          <a:rPr>
                             <a:latin typeface="Cambria Math" panose="02040503050406030204" pitchFamily="18" charset="0"/>
                           </a:rPr>
                         </m:ctrlPr>
@@ -24753,14 +24384,11 @@
                 </a:pPr>
                 <a14:m>
                   <m:oMathPara xmlns:m="http://schemas.openxmlformats.org/officeDocument/2006/math">
-                    <m:oMathParaPr>
-                      <m:jc m:val="centerGroup"/>
-                    </m:oMathParaPr>
-                    <m:oMath xmlns:m="http://schemas.openxmlformats.org/officeDocument/2006/math">
+                    <m:oMath>
                       <m:f>
                         <m:fPr>
                           <m:ctrlPr>
-                            <a:rPr lang="ar-AE" i="1" smtClean="0">
+                            <a:rPr lang="ar-AE" i="1">
                               <a:latin typeface="Cambria Math" panose="02040503050406030204" pitchFamily="18" charset="0"/>
                             </a:rPr>
                           </m:ctrlPr>
@@ -24769,7 +24397,7 @@
                           <m:sSup>
                             <m:sSupPr>
                               <m:ctrlPr>
-                                <a:rPr lang="ar-AE" i="1">
+                                <a:rPr lang="ar-AE">
                                   <a:latin typeface="Cambria Math" panose="02040503050406030204" pitchFamily="18" charset="0"/>
                                 </a:rPr>
                               </m:ctrlPr>
@@ -24806,7 +24434,7 @@
                           <m:d>
                             <m:dPr>
                               <m:ctrlPr>
-                                <a:rPr lang="ar-AE" i="1">
+                                <a:rPr lang="ar-AE">
                                   <a:latin typeface="Cambria Math" panose="02040503050406030204" pitchFamily="18" charset="0"/>
                                 </a:rPr>
                               </m:ctrlPr>
@@ -24843,7 +24471,7 @@
                           <m:sSup>
                             <m:sSupPr>
                               <m:ctrlPr>
-                                <a:rPr lang="ar-AE" i="1">
+                                <a:rPr lang="ar-AE">
                                   <a:latin typeface="Cambria Math" panose="02040503050406030204" pitchFamily="18" charset="0"/>
                                 </a:rPr>
                               </m:ctrlPr>
@@ -24871,13 +24499,7 @@
                         <a:rPr lang="en-US" b="0" i="0" smtClean="0">
                           <a:latin typeface="Cambria Math" panose="02040503050406030204" pitchFamily="18" charset="0"/>
                         </a:rPr>
-                        <m:t>=</m:t>
-                      </m:r>
-                      <m:r>
-                        <a:rPr lang="en-US" b="0" i="0" smtClean="0">
-                          <a:latin typeface="Cambria Math" panose="02040503050406030204" pitchFamily="18" charset="0"/>
-                        </a:rPr>
-                        <m:t>0</m:t>
+                        <m:t>=0</m:t>
                       </m:r>
                     </m:oMath>
                   </m:oMathPara>
@@ -24892,14 +24514,11 @@
                 </a:pPr>
                 <a14:m>
                   <m:oMathPara xmlns:m="http://schemas.openxmlformats.org/officeDocument/2006/math">
-                    <m:oMathParaPr>
-                      <m:jc m:val="centerGroup"/>
-                    </m:oMathParaPr>
-                    <m:oMath xmlns:m="http://schemas.openxmlformats.org/officeDocument/2006/math">
+                    <m:oMath>
                       <m:f>
                         <m:fPr>
                           <m:ctrlPr>
-                            <a:rPr lang="ar-AE" i="1" smtClean="0">
+                            <a:rPr lang="ar-AE" i="1">
                               <a:latin typeface="Cambria Math" panose="02040503050406030204" pitchFamily="18" charset="0"/>
                             </a:rPr>
                           </m:ctrlPr>
@@ -24908,7 +24527,7 @@
                           <m:sSup>
                             <m:sSupPr>
                               <m:ctrlPr>
-                                <a:rPr lang="ar-AE" i="1">
+                                <a:rPr lang="ar-AE">
                                   <a:latin typeface="Cambria Math" panose="02040503050406030204" pitchFamily="18" charset="0"/>
                                 </a:rPr>
                               </m:ctrlPr>
@@ -24945,7 +24564,7 @@
                           <m:d>
                             <m:dPr>
                               <m:ctrlPr>
-                                <a:rPr lang="ar-AE" i="1">
+                                <a:rPr lang="ar-AE">
                                   <a:latin typeface="Cambria Math" panose="02040503050406030204" pitchFamily="18" charset="0"/>
                                 </a:rPr>
                               </m:ctrlPr>
@@ -24982,7 +24601,7 @@
                           <m:sSup>
                             <m:sSupPr>
                               <m:ctrlPr>
-                                <a:rPr lang="ar-AE" i="1">
+                                <a:rPr lang="ar-AE">
                                   <a:latin typeface="Cambria Math" panose="02040503050406030204" pitchFamily="18" charset="0"/>
                                 </a:rPr>
                               </m:ctrlPr>
@@ -25010,13 +24629,7 @@
                         <a:rPr lang="en-US" b="0" i="0" smtClean="0">
                           <a:latin typeface="Cambria Math" panose="02040503050406030204" pitchFamily="18" charset="0"/>
                         </a:rPr>
-                        <m:t>&lt;</m:t>
-                      </m:r>
-                      <m:r>
-                        <a:rPr lang="en-US" b="0" i="0" smtClean="0">
-                          <a:latin typeface="Cambria Math" panose="02040503050406030204" pitchFamily="18" charset="0"/>
-                        </a:rPr>
-                        <m:t>0</m:t>
+                        <m:t>&lt;0</m:t>
                       </m:r>
                     </m:oMath>
                   </m:oMathPara>
@@ -25047,7 +24660,7 @@
                     <m:oMathParaPr>
                       <m:jc m:val="center"/>
                     </m:oMathParaPr>
-                    <m:oMath xmlns:m="http://schemas.openxmlformats.org/officeDocument/2006/math">
+                    <m:oMath>
                       <m:r>
                         <a:rPr lang="en-US">
                           <a:latin typeface="Cambria Math" panose="02040503050406030204" pitchFamily="18" charset="0"/>
@@ -25057,7 +24670,7 @@
                       <m:d>
                         <m:dPr>
                           <m:ctrlPr>
-                            <a:rPr lang="ar-AE" i="1">
+                            <a:rPr lang="ar-AE">
                               <a:latin typeface="Cambria Math" panose="02040503050406030204" pitchFamily="18" charset="0"/>
                             </a:rPr>
                           </m:ctrlPr>
@@ -25082,7 +24695,7 @@
                                 <m:accPr>
                                   <m:chr m:val="⃗"/>
                                   <m:ctrlPr>
-                                    <a:rPr lang="ar-AE" i="1">
+                                    <a:rPr lang="ar-AE">
                                       <a:latin typeface="Cambria Math" panose="02040503050406030204" pitchFamily="18" charset="0"/>
                                     </a:rPr>
                                   </m:ctrlPr>
@@ -25109,7 +24722,7 @@
                       <m:sSub>
                         <m:sSubPr>
                           <m:ctrlPr>
-                            <a:rPr lang="ar-AE" i="1">
+                            <a:rPr lang="ar-AE">
                               <a:latin typeface="Cambria Math" panose="02040503050406030204" pitchFamily="18" charset="0"/>
                             </a:rPr>
                           </m:ctrlPr>
@@ -25159,7 +24772,7 @@
                             <m:accPr>
                               <m:chr m:val="⃗"/>
                               <m:ctrlPr>
-                                <a:rPr lang="ar-AE" i="1">
+                                <a:rPr lang="ar-AE">
                                   <a:latin typeface="Cambria Math" panose="02040503050406030204" pitchFamily="18" charset="0"/>
                                 </a:rPr>
                               </m:ctrlPr>
@@ -25211,7 +24824,7 @@
                                 <m:f>
                                   <m:fPr>
                                     <m:ctrlPr>
-                                      <a:rPr lang="ar-AE" i="1">
+                                      <a:rPr lang="ar-AE">
                                         <a:latin typeface="Cambria Math" panose="02040503050406030204" pitchFamily="18" charset="0"/>
                                       </a:rPr>
                                     </m:ctrlPr>
@@ -25232,7 +24845,7 @@
                                     <m:d>
                                       <m:dPr>
                                         <m:ctrlPr>
-                                          <a:rPr lang="ar-AE" i="1">
+                                          <a:rPr lang="ar-AE">
                                             <a:latin typeface="Cambria Math" panose="02040503050406030204" pitchFamily="18" charset="0"/>
                                           </a:rPr>
                                         </m:ctrlPr>
@@ -25269,7 +24882,7 @@
                                     <m:sSub>
                                       <m:sSubPr>
                                         <m:ctrlPr>
-                                          <a:rPr lang="ar-AE" i="1">
+                                          <a:rPr lang="ar-AE">
                                             <a:latin typeface="Cambria Math" panose="02040503050406030204" pitchFamily="18" charset="0"/>
                                           </a:rPr>
                                         </m:ctrlPr>
@@ -25300,7 +24913,7 @@
                                 <m:f>
                                   <m:fPr>
                                     <m:ctrlPr>
-                                      <a:rPr lang="ar-AE" i="1">
+                                      <a:rPr lang="ar-AE">
                                         <a:latin typeface="Cambria Math" panose="02040503050406030204" pitchFamily="18" charset="0"/>
                                       </a:rPr>
                                     </m:ctrlPr>
@@ -25321,7 +24934,7 @@
                                     <m:d>
                                       <m:dPr>
                                         <m:ctrlPr>
-                                          <a:rPr lang="ar-AE" i="1">
+                                          <a:rPr lang="ar-AE">
                                             <a:latin typeface="Cambria Math" panose="02040503050406030204" pitchFamily="18" charset="0"/>
                                           </a:rPr>
                                         </m:ctrlPr>
@@ -25358,7 +24971,7 @@
                                     <m:sSub>
                                       <m:sSubPr>
                                         <m:ctrlPr>
-                                          <a:rPr lang="ar-AE" i="1">
+                                          <a:rPr lang="ar-AE">
                                             <a:latin typeface="Cambria Math" panose="02040503050406030204" pitchFamily="18" charset="0"/>
                                           </a:rPr>
                                         </m:ctrlPr>
@@ -25399,7 +25012,7 @@
                                 <m:f>
                                   <m:fPr>
                                     <m:ctrlPr>
-                                      <a:rPr lang="ar-AE" i="1">
+                                      <a:rPr lang="ar-AE">
                                         <a:latin typeface="Cambria Math" panose="02040503050406030204" pitchFamily="18" charset="0"/>
                                       </a:rPr>
                                     </m:ctrlPr>
@@ -25420,7 +25033,7 @@
                                     <m:d>
                                       <m:dPr>
                                         <m:ctrlPr>
-                                          <a:rPr lang="ar-AE" i="1">
+                                          <a:rPr lang="ar-AE">
                                             <a:latin typeface="Cambria Math" panose="02040503050406030204" pitchFamily="18" charset="0"/>
                                           </a:rPr>
                                         </m:ctrlPr>
@@ -25457,7 +25070,7 @@
                                     <m:sSub>
                                       <m:sSubPr>
                                         <m:ctrlPr>
-                                          <a:rPr lang="ar-AE" i="1">
+                                          <a:rPr lang="ar-AE">
                                             <a:latin typeface="Cambria Math" panose="02040503050406030204" pitchFamily="18" charset="0"/>
                                           </a:rPr>
                                         </m:ctrlPr>
@@ -25644,7 +25257,7 @@
                           <m:accPr>
                             <m:chr m:val="̂"/>
                             <m:ctrlPr>
-                              <a:rPr i="1">
+                              <a:rPr>
                                 <a:latin typeface="Cambria Math" panose="02040503050406030204" pitchFamily="18" charset="0"/>
                               </a:rPr>
                             </m:ctrlPr>
@@ -25689,7 +25302,7 @@
                           <m:accPr>
                             <m:chr m:val="̂"/>
                             <m:ctrlPr>
-                              <a:rPr i="1">
+                              <a:rPr>
                                 <a:latin typeface="Cambria Math" panose="02040503050406030204" pitchFamily="18" charset="0"/>
                               </a:rPr>
                             </m:ctrlPr>
@@ -25715,13 +25328,7 @@
                           <a:rPr>
                             <a:latin typeface="Cambria Math" panose="02040503050406030204" pitchFamily="18" charset="0"/>
                           </a:rPr>
-                          <m:t>+</m:t>
-                        </m:r>
-                        <m:r>
-                          <a:rPr>
-                            <a:latin typeface="Cambria Math" panose="02040503050406030204" pitchFamily="18" charset="0"/>
-                          </a:rPr>
-                          <m:t>1</m:t>
+                          <m:t>+1</m:t>
                         </m:r>
                       </m:sub>
                     </m:sSub>
@@ -25741,7 +25348,7 @@
                     <m:oMathParaPr>
                       <m:jc m:val="center"/>
                     </m:oMathParaPr>
-                    <m:oMath xmlns:m="http://schemas.openxmlformats.org/officeDocument/2006/math">
+                    <m:oMath>
                       <m:sSub>
                         <m:sSubPr>
                           <m:ctrlPr>
@@ -25755,7 +25362,7 @@
                             <m:accPr>
                               <m:chr m:val="̂"/>
                               <m:ctrlPr>
-                                <a:rPr i="1">
+                                <a:rPr>
                                   <a:latin typeface="Cambria Math" panose="02040503050406030204" pitchFamily="18" charset="0"/>
                                 </a:rPr>
                               </m:ctrlPr>
@@ -25781,13 +25388,7 @@
                             <a:rPr>
                               <a:latin typeface="Cambria Math" panose="02040503050406030204" pitchFamily="18" charset="0"/>
                             </a:rPr>
-                            <m:t>+</m:t>
-                          </m:r>
-                          <m:r>
-                            <a:rPr>
-                              <a:latin typeface="Cambria Math" panose="02040503050406030204" pitchFamily="18" charset="0"/>
-                            </a:rPr>
-                            <m:t>1</m:t>
+                            <m:t>+1</m:t>
                           </m:r>
                         </m:sub>
                       </m:sSub>
@@ -25810,7 +25411,7 @@
                             <m:accPr>
                               <m:chr m:val="̂"/>
                               <m:ctrlPr>
-                                <a:rPr i="1">
+                                <a:rPr>
                                   <a:latin typeface="Cambria Math" panose="02040503050406030204" pitchFamily="18" charset="0"/>
                                 </a:rPr>
                               </m:ctrlPr>
@@ -25855,7 +25456,7 @@
                       <m:sSub>
                         <m:sSubPr>
                           <m:ctrlPr>
-                            <a:rPr i="1">
+                            <a:rPr>
                               <a:latin typeface="Cambria Math" panose="02040503050406030204" pitchFamily="18" charset="0"/>
                             </a:rPr>
                           </m:ctrlPr>
@@ -25905,7 +25506,7 @@
                             <m:accPr>
                               <m:chr m:val="̂"/>
                               <m:ctrlPr>
-                                <a:rPr i="1">
+                                <a:rPr>
                                   <a:latin typeface="Cambria Math" panose="02040503050406030204" pitchFamily="18" charset="0"/>
                                 </a:rPr>
                               </m:ctrlPr>
@@ -25983,11 +25584,11 @@
                     <m:oMathParaPr>
                       <m:jc m:val="center"/>
                     </m:oMathParaPr>
-                    <m:oMath xmlns:m="http://schemas.openxmlformats.org/officeDocument/2006/math">
+                    <m:oMath>
                       <m:sSub>
                         <m:sSubPr>
                           <m:ctrlPr>
-                            <a:rPr i="1">
+                            <a:rPr>
                               <a:latin typeface="Cambria Math" panose="02040503050406030204" pitchFamily="18" charset="0"/>
                             </a:rPr>
                           </m:ctrlPr>
@@ -26011,13 +25612,7 @@
                             <a:rPr>
                               <a:latin typeface="Cambria Math" panose="02040503050406030204" pitchFamily="18" charset="0"/>
                             </a:rPr>
-                            <m:t>+</m:t>
-                          </m:r>
-                          <m:r>
-                            <a:rPr>
-                              <a:latin typeface="Cambria Math" panose="02040503050406030204" pitchFamily="18" charset="0"/>
-                            </a:rPr>
-                            <m:t>1</m:t>
+                            <m:t>+1</m:t>
                           </m:r>
                         </m:sub>
                       </m:sSub>
@@ -26030,7 +25625,7 @@
                       <m:sSub>
                         <m:sSubPr>
                           <m:ctrlPr>
-                            <a:rPr i="1">
+                            <a:rPr>
                               <a:latin typeface="Cambria Math" panose="02040503050406030204" pitchFamily="18" charset="0"/>
                             </a:rPr>
                           </m:ctrlPr>
@@ -26073,7 +25668,7 @@
                       <m:sSub>
                         <m:sSubPr>
                           <m:ctrlPr>
-                            <a:rPr i="1">
+                            <a:rPr>
                               <a:latin typeface="Cambria Math" panose="02040503050406030204" pitchFamily="18" charset="0"/>
                             </a:rPr>
                           </m:ctrlPr>
@@ -26091,7 +25686,7 @@
                             <m:accPr>
                               <m:chr m:val="̂"/>
                               <m:ctrlPr>
-                                <a:rPr i="1">
+                                <a:rPr>
                                   <a:latin typeface="Cambria Math" panose="02040503050406030204" pitchFamily="18" charset="0"/>
                                 </a:rPr>
                               </m:ctrlPr>
@@ -26127,7 +25722,7 @@
                           <m:sSub>
                             <m:sSubPr>
                               <m:ctrlPr>
-                                <a:rPr i="1">
+                                <a:rPr>
                                   <a:latin typeface="Cambria Math" panose="02040503050406030204" pitchFamily="18" charset="0"/>
                                 </a:rPr>
                               </m:ctrlPr>
@@ -26170,7 +25765,7 @@
                               <m:sSub>
                                 <m:sSubPr>
                                   <m:ctrlPr>
-                                    <a:rPr i="1">
+                                    <a:rPr>
                                       <a:latin typeface="Cambria Math" panose="02040503050406030204" pitchFamily="18" charset="0"/>
                                     </a:rPr>
                                   </m:ctrlPr>
@@ -26212,7 +25807,7 @@
                     <m:sSub>
                       <m:sSubPr>
                         <m:ctrlPr>
-                          <a:rPr i="1">
+                          <a:rPr>
                             <a:latin typeface="Cambria Math" panose="02040503050406030204" pitchFamily="18" charset="0"/>
                           </a:rPr>
                         </m:ctrlPr>
@@ -26230,7 +25825,7 @@
                           <m:accPr>
                             <m:chr m:val="̂"/>
                             <m:ctrlPr>
-                              <a:rPr i="1">
+                              <a:rPr>
                                 <a:latin typeface="Cambria Math" panose="02040503050406030204" pitchFamily="18" charset="0"/>
                               </a:rPr>
                             </m:ctrlPr>
@@ -26276,7 +25871,7 @@
                       <m:accPr>
                         <m:chr m:val="̂"/>
                         <m:ctrlPr>
-                          <a:rPr i="1">
+                          <a:rPr>
                             <a:latin typeface="Cambria Math" panose="02040503050406030204" pitchFamily="18" charset="0"/>
                           </a:rPr>
                         </m:ctrlPr>
@@ -26483,11 +26078,11 @@
                     <m:oMathParaPr>
                       <m:jc m:val="center"/>
                     </m:oMathParaPr>
-                    <m:oMath xmlns:m="http://schemas.openxmlformats.org/officeDocument/2006/math">
+                    <m:oMath>
                       <m:sSub>
                         <m:sSubPr>
                           <m:ctrlPr>
-                            <a:rPr i="1">
+                            <a:rPr>
                               <a:latin typeface="Cambria Math" panose="02040503050406030204" pitchFamily="18" charset="0"/>
                             </a:rPr>
                           </m:ctrlPr>
@@ -26511,13 +26106,7 @@
                             <a:rPr>
                               <a:latin typeface="Cambria Math" panose="02040503050406030204" pitchFamily="18" charset="0"/>
                             </a:rPr>
-                            <m:t>+</m:t>
-                          </m:r>
-                          <m:r>
-                            <a:rPr>
-                              <a:latin typeface="Cambria Math" panose="02040503050406030204" pitchFamily="18" charset="0"/>
-                            </a:rPr>
-                            <m:t>1</m:t>
+                            <m:t>+1</m:t>
                           </m:r>
                         </m:sub>
                       </m:sSub>
@@ -26530,7 +26119,7 @@
                       <m:sSub>
                         <m:sSubPr>
                           <m:ctrlPr>
-                            <a:rPr i="1">
+                            <a:rPr>
                               <a:latin typeface="Cambria Math" panose="02040503050406030204" pitchFamily="18" charset="0"/>
                             </a:rPr>
                           </m:ctrlPr>
@@ -26587,7 +26176,7 @@
                               <m:sSubSup>
                                 <m:sSubSupPr>
                                   <m:ctrlPr>
-                                    <a:rPr i="1">
+                                    <a:rPr>
                                       <a:latin typeface="Cambria Math" panose="02040503050406030204" pitchFamily="18" charset="0"/>
                                     </a:rPr>
                                   </m:ctrlPr>
@@ -26639,7 +26228,7 @@
                                     <m:accPr>
                                       <m:chr m:val="⃗"/>
                                       <m:ctrlPr>
-                                        <a:rPr i="1">
+                                        <a:rPr>
                                           <a:latin typeface="Cambria Math" panose="02040503050406030204" pitchFamily="18" charset="0"/>
                                         </a:rPr>
                                       </m:ctrlPr>
@@ -26663,20 +26252,14 @@
                             <a:rPr>
                               <a:latin typeface="Cambria Math" panose="02040503050406030204" pitchFamily="18" charset="0"/>
                             </a:rPr>
-                            <m:t>−</m:t>
-                          </m:r>
-                          <m:r>
-                            <a:rPr>
-                              <a:latin typeface="Cambria Math" panose="02040503050406030204" pitchFamily="18" charset="0"/>
-                            </a:rPr>
-                            <m:t>1</m:t>
+                            <m:t>−1</m:t>
                           </m:r>
                         </m:sup>
                       </m:sSup>
                       <m:sSub>
                         <m:sSubPr>
                           <m:ctrlPr>
-                            <a:rPr i="1">
+                            <a:rPr>
                               <a:latin typeface="Cambria Math" panose="02040503050406030204" pitchFamily="18" charset="0"/>
                             </a:rPr>
                           </m:ctrlPr>
@@ -26720,7 +26303,7 @@
                             <m:accPr>
                               <m:chr m:val="⃗"/>
                               <m:ctrlPr>
-                                <a:rPr i="1">
+                                <a:rPr>
                                   <a:latin typeface="Cambria Math" panose="02040503050406030204" pitchFamily="18" charset="0"/>
                                 </a:rPr>
                               </m:ctrlPr>
@@ -27062,8 +26645,8 @@
           <a:chExt cx="0" cy="0"/>
         </a:xfrm>
       </p:grpSpPr>
-      <mc:AlternateContent xmlns:mc="http://schemas.openxmlformats.org/markup-compatibility/2006">
-        <mc:Choice xmlns:a14="http://schemas.microsoft.com/office/drawing/2010/main" Requires="a14">
+      <mc:AlternateContent xmlns:mc="http://schemas.openxmlformats.org/markup-compatibility/2006" xmlns:a14="http://schemas.microsoft.com/office/drawing/2010/main">
+        <mc:Choice Requires="a14">
           <p:sp>
             <p:nvSpPr>
               <p:cNvPr id="3" name="Content Placeholder 2"/>
@@ -27133,7 +26716,7 @@
                     <m:sSub>
                       <m:sSubPr>
                         <m:ctrlPr>
-                          <a:rPr i="1">
+                          <a:rPr>
                             <a:latin typeface="Cambria Math" panose="02040503050406030204" pitchFamily="18" charset="0"/>
                           </a:rPr>
                         </m:ctrlPr>
@@ -27164,7 +26747,7 @@
                     <m:sSub>
                       <m:sSubPr>
                         <m:ctrlPr>
-                          <a:rPr i="1">
+                          <a:rPr>
                             <a:latin typeface="Cambria Math" panose="02040503050406030204" pitchFamily="18" charset="0"/>
                           </a:rPr>
                         </m:ctrlPr>
@@ -27195,7 +26778,7 @@
                     <m:sSub>
                       <m:sSubPr>
                         <m:ctrlPr>
-                          <a:rPr i="1">
+                          <a:rPr>
                             <a:latin typeface="Cambria Math" panose="02040503050406030204" pitchFamily="18" charset="0"/>
                           </a:rPr>
                         </m:ctrlPr>
@@ -27233,7 +26816,7 @@
                     <m:oMathParaPr>
                       <m:jc m:val="center"/>
                     </m:oMathParaPr>
-                    <m:oMath xmlns:m="http://schemas.openxmlformats.org/officeDocument/2006/math">
+                    <m:oMath>
                       <m:r>
                         <a:rPr>
                           <a:latin typeface="Cambria Math" panose="02040503050406030204" pitchFamily="18" charset="0"/>
@@ -27243,7 +26826,7 @@
                       <m:d>
                         <m:dPr>
                           <m:ctrlPr>
-                            <a:rPr i="1">
+                            <a:rPr>
                               <a:latin typeface="Cambria Math" panose="02040503050406030204" pitchFamily="18" charset="0"/>
                             </a:rPr>
                           </m:ctrlPr>
@@ -27284,7 +26867,7 @@
                       <m:d>
                         <m:dPr>
                           <m:ctrlPr>
-                            <a:rPr i="1">
+                            <a:rPr>
                               <a:latin typeface="Cambria Math" panose="02040503050406030204" pitchFamily="18" charset="0"/>
                             </a:rPr>
                           </m:ctrlPr>
@@ -27299,7 +26882,7 @@
                           <m:d>
                             <m:dPr>
                               <m:ctrlPr>
-                                <a:rPr i="1">
+                                <a:rPr>
                                   <a:latin typeface="Cambria Math" panose="02040503050406030204" pitchFamily="18" charset="0"/>
                                 </a:rPr>
                               </m:ctrlPr>
@@ -27338,7 +26921,7 @@
                           <m:chr m:val="∑"/>
                           <m:limLoc m:val="undOvr"/>
                           <m:ctrlPr>
-                            <a:rPr i="1">
+                            <a:rPr>
                               <a:latin typeface="Cambria Math" panose="02040503050406030204" pitchFamily="18" charset="0"/>
                             </a:rPr>
                           </m:ctrlPr>
@@ -27354,13 +26937,7 @@
                             <a:rPr>
                               <a:latin typeface="Cambria Math" panose="02040503050406030204" pitchFamily="18" charset="0"/>
                             </a:rPr>
-                            <m:t>=</m:t>
-                          </m:r>
-                          <m:r>
-                            <a:rPr>
-                              <a:latin typeface="Cambria Math" panose="02040503050406030204" pitchFamily="18" charset="0"/>
-                            </a:rPr>
-                            <m:t>1</m:t>
+                            <m:t>=1</m:t>
                           </m:r>
                         </m:sub>
                         <m:sup>
@@ -27389,7 +26966,7 @@
                       <m:d>
                         <m:dPr>
                           <m:ctrlPr>
-                            <a:rPr i="1">
+                            <a:rPr>
                               <a:latin typeface="Cambria Math" panose="02040503050406030204" pitchFamily="18" charset="0"/>
                             </a:rPr>
                           </m:ctrlPr>
@@ -27413,7 +26990,7 @@
                               <m:sSub>
                                 <m:sSubPr>
                                   <m:ctrlPr>
-                                    <a:rPr i="1">
+                                    <a:rPr>
                                       <a:latin typeface="Cambria Math" panose="02040503050406030204" pitchFamily="18" charset="0"/>
                                     </a:rPr>
                                   </m:ctrlPr>
@@ -27480,7 +27057,7 @@
             </p:txBody>
           </p:sp>
         </mc:Choice>
-        <mc:Fallback>
+        <mc:Fallback xmlns="">
           <p:sp>
             <p:nvSpPr>
               <p:cNvPr id="3" name="Content Placeholder 2"/>
@@ -27582,8 +27159,8 @@
           <a:chExt cx="0" cy="0"/>
         </a:xfrm>
       </p:grpSpPr>
-      <mc:AlternateContent xmlns:mc="http://schemas.openxmlformats.org/markup-compatibility/2006">
-        <mc:Choice xmlns:a14="http://schemas.microsoft.com/office/drawing/2010/main" Requires="a14">
+      <mc:AlternateContent xmlns:mc="http://schemas.openxmlformats.org/markup-compatibility/2006" xmlns:a14="http://schemas.microsoft.com/office/drawing/2010/main">
+        <mc:Choice Requires="a14">
           <p:sp>
             <p:nvSpPr>
               <p:cNvPr id="3" name="Content Placeholder 2"/>
@@ -27630,7 +27207,7 @@
                     <m:d>
                       <m:dPr>
                         <m:ctrlPr>
-                          <a:rPr i="1">
+                          <a:rPr>
                             <a:latin typeface="Cambria Math" panose="02040503050406030204" pitchFamily="18" charset="0"/>
                           </a:rPr>
                         </m:ctrlPr>
@@ -27667,7 +27244,7 @@
                     <m:sSub>
                       <m:sSubPr>
                         <m:ctrlPr>
-                          <a:rPr i="1">
+                          <a:rPr>
                             <a:latin typeface="Cambria Math" panose="02040503050406030204" pitchFamily="18" charset="0"/>
                           </a:rPr>
                         </m:ctrlPr>
@@ -27705,7 +27282,7 @@
                     <m:oMathParaPr>
                       <m:jc m:val="center"/>
                     </m:oMathParaPr>
-                    <m:oMath xmlns:m="http://schemas.openxmlformats.org/officeDocument/2006/math">
+                    <m:oMath>
                       <m:r>
                         <a:rPr>
                           <a:latin typeface="Cambria Math" panose="02040503050406030204" pitchFamily="18" charset="0"/>
@@ -27724,7 +27301,7 @@
                           <m:sSub>
                             <m:sSubPr>
                               <m:ctrlPr>
-                                <a:rPr i="1">
+                                <a:rPr>
                                   <a:latin typeface="Cambria Math" panose="02040503050406030204" pitchFamily="18" charset="0"/>
                                 </a:rPr>
                               </m:ctrlPr>
@@ -27767,7 +27344,7 @@
                           <m:sSup>
                             <m:sSupPr>
                               <m:ctrlPr>
-                                <a:rPr i="1">
+                                <a:rPr>
                                   <a:latin typeface="Cambria Math" panose="02040503050406030204" pitchFamily="18" charset="0"/>
                                 </a:rPr>
                               </m:ctrlPr>
@@ -27800,7 +27377,7 @@
                       <m:f>
                         <m:fPr>
                           <m:ctrlPr>
-                            <a:rPr i="1">
+                            <a:rPr>
                               <a:latin typeface="Cambria Math" panose="02040503050406030204" pitchFamily="18" charset="0"/>
                             </a:rPr>
                           </m:ctrlPr>
@@ -27826,7 +27403,7 @@
                               <m:d>
                                 <m:dPr>
                                   <m:ctrlPr>
-                                    <a:rPr i="1">
+                                    <a:rPr>
                                       <a:latin typeface="Cambria Math" panose="02040503050406030204" pitchFamily="18" charset="0"/>
                                     </a:rPr>
                                   </m:ctrlPr>
@@ -27847,7 +27424,7 @@
                                   <m:sSup>
                                     <m:sSupPr>
                                       <m:ctrlPr>
-                                        <a:rPr i="1">
+                                        <a:rPr>
                                           <a:latin typeface="Cambria Math" panose="02040503050406030204" pitchFamily="18" charset="0"/>
                                         </a:rPr>
                                       </m:ctrlPr>
@@ -27877,19 +27454,7 @@
                                 <a:rPr>
                                   <a:latin typeface="Cambria Math" panose="02040503050406030204" pitchFamily="18" charset="0"/>
                                 </a:rPr>
-                                <m:t>1</m:t>
-                              </m:r>
-                              <m:r>
-                                <a:rPr>
-                                  <a:latin typeface="Cambria Math" panose="02040503050406030204" pitchFamily="18" charset="0"/>
-                                </a:rPr>
-                                <m:t>/</m:t>
-                              </m:r>
-                              <m:r>
-                                <a:rPr>
-                                  <a:latin typeface="Cambria Math" panose="02040503050406030204" pitchFamily="18" charset="0"/>
-                                </a:rPr>
-                                <m:t>2</m:t>
+                                <m:t>1/2</m:t>
                               </m:r>
                             </m:sup>
                           </m:sSup>
@@ -27906,7 +27471,7 @@
                           <m:begChr m:val="["/>
                           <m:endChr m:val="]"/>
                           <m:ctrlPr>
-                            <a:rPr i="1">
+                            <a:rPr>
                               <a:latin typeface="Cambria Math" panose="02040503050406030204" pitchFamily="18" charset="0"/>
                             </a:rPr>
                           </m:ctrlPr>
@@ -27921,7 +27486,7 @@
                           <m:f>
                             <m:fPr>
                               <m:ctrlPr>
-                                <a:rPr i="1">
+                                <a:rPr>
                                   <a:latin typeface="Cambria Math" panose="02040503050406030204" pitchFamily="18" charset="0"/>
                                 </a:rPr>
                               </m:ctrlPr>
@@ -27944,7 +27509,7 @@
                               <m:sSup>
                                 <m:sSupPr>
                                   <m:ctrlPr>
-                                    <a:rPr i="1">
+                                    <a:rPr>
                                       <a:latin typeface="Cambria Math" panose="02040503050406030204" pitchFamily="18" charset="0"/>
                                     </a:rPr>
                                   </m:ctrlPr>
@@ -27989,7 +27554,7 @@
                                   <m:sSub>
                                     <m:sSubPr>
                                       <m:ctrlPr>
-                                        <a:rPr i="1">
+                                        <a:rPr>
                                           <a:latin typeface="Cambria Math" panose="02040503050406030204" pitchFamily="18" charset="0"/>
                                         </a:rPr>
                                       </m:ctrlPr>
@@ -28067,7 +27632,7 @@
                     <m:sSub>
                       <m:sSubPr>
                         <m:ctrlPr>
-                          <a:rPr i="1">
+                          <a:rPr>
                             <a:latin typeface="Cambria Math" panose="02040503050406030204" pitchFamily="18" charset="0"/>
                           </a:rPr>
                         </m:ctrlPr>
@@ -28098,7 +27663,7 @@
                     <m:sSub>
                       <m:sSubPr>
                         <m:ctrlPr>
-                          <a:rPr i="1">
+                          <a:rPr>
                             <a:latin typeface="Cambria Math" panose="02040503050406030204" pitchFamily="18" charset="0"/>
                           </a:rPr>
                         </m:ctrlPr>
@@ -28129,7 +27694,7 @@
                     <m:sSub>
                       <m:sSubPr>
                         <m:ctrlPr>
-                          <a:rPr i="1">
+                          <a:rPr>
                             <a:latin typeface="Cambria Math" panose="02040503050406030204" pitchFamily="18" charset="0"/>
                           </a:rPr>
                         </m:ctrlPr>
@@ -28175,7 +27740,7 @@
                     <m:oMathParaPr>
                       <m:jc m:val="center"/>
                     </m:oMathParaPr>
-                    <m:oMath xmlns:m="http://schemas.openxmlformats.org/officeDocument/2006/math">
+                    <m:oMath>
                       <m:r>
                         <a:rPr>
                           <a:latin typeface="Cambria Math" panose="02040503050406030204" pitchFamily="18" charset="0"/>
@@ -28185,7 +27750,7 @@
                       <m:d>
                         <m:dPr>
                           <m:ctrlPr>
-                            <a:rPr i="1">
+                            <a:rPr>
                               <a:latin typeface="Cambria Math" panose="02040503050406030204" pitchFamily="18" charset="0"/>
                             </a:rPr>
                           </m:ctrlPr>
@@ -28220,7 +27785,7 @@
                       <m:f>
                         <m:fPr>
                           <m:ctrlPr>
-                            <a:rPr i="1">
+                            <a:rPr>
                               <a:latin typeface="Cambria Math" panose="02040503050406030204" pitchFamily="18" charset="0"/>
                             </a:rPr>
                           </m:ctrlPr>
@@ -28246,7 +27811,7 @@
                               <m:d>
                                 <m:dPr>
                                   <m:ctrlPr>
-                                    <a:rPr i="1">
+                                    <a:rPr>
                                       <a:latin typeface="Cambria Math" panose="02040503050406030204" pitchFamily="18" charset="0"/>
                                     </a:rPr>
                                   </m:ctrlPr>
@@ -28267,7 +27832,7 @@
                                   <m:sSup>
                                     <m:sSupPr>
                                       <m:ctrlPr>
-                                        <a:rPr i="1">
+                                        <a:rPr>
                                           <a:latin typeface="Cambria Math" panose="02040503050406030204" pitchFamily="18" charset="0"/>
                                         </a:rPr>
                                       </m:ctrlPr>
@@ -28297,19 +27862,7 @@
                                 <a:rPr>
                                   <a:latin typeface="Cambria Math" panose="02040503050406030204" pitchFamily="18" charset="0"/>
                                 </a:rPr>
-                                <m:t>1</m:t>
-                              </m:r>
-                              <m:r>
-                                <a:rPr>
-                                  <a:latin typeface="Cambria Math" panose="02040503050406030204" pitchFamily="18" charset="0"/>
-                                </a:rPr>
-                                <m:t>/</m:t>
-                              </m:r>
-                              <m:r>
-                                <a:rPr>
-                                  <a:latin typeface="Cambria Math" panose="02040503050406030204" pitchFamily="18" charset="0"/>
-                                </a:rPr>
-                                <m:t>2</m:t>
+                                <m:t>1/2</m:t>
                               </m:r>
                             </m:sup>
                           </m:sSup>
@@ -28326,7 +27879,7 @@
                           <m:begChr m:val="["/>
                           <m:endChr m:val="]"/>
                           <m:ctrlPr>
-                            <a:rPr i="1">
+                            <a:rPr>
                               <a:latin typeface="Cambria Math" panose="02040503050406030204" pitchFamily="18" charset="0"/>
                             </a:rPr>
                           </m:ctrlPr>
@@ -28341,7 +27894,7 @@
                           <m:f>
                             <m:fPr>
                               <m:ctrlPr>
-                                <a:rPr i="1">
+                                <a:rPr>
                                   <a:latin typeface="Cambria Math" panose="02040503050406030204" pitchFamily="18" charset="0"/>
                                 </a:rPr>
                               </m:ctrlPr>
@@ -28364,7 +27917,7 @@
                               <m:sSup>
                                 <m:sSupPr>
                                   <m:ctrlPr>
-                                    <a:rPr i="1">
+                                    <a:rPr>
                                       <a:latin typeface="Cambria Math" panose="02040503050406030204" pitchFamily="18" charset="0"/>
                                     </a:rPr>
                                   </m:ctrlPr>
@@ -28393,7 +27946,7 @@
                               <m:chr m:val="∏"/>
                               <m:limLoc m:val="undOvr"/>
                               <m:ctrlPr>
-                                <a:rPr i="1">
+                                <a:rPr>
                                   <a:latin typeface="Cambria Math" panose="02040503050406030204" pitchFamily="18" charset="0"/>
                                 </a:rPr>
                               </m:ctrlPr>
@@ -28409,13 +27962,7 @@
                                 <a:rPr>
                                   <a:latin typeface="Cambria Math" panose="02040503050406030204" pitchFamily="18" charset="0"/>
                                 </a:rPr>
-                                <m:t>=</m:t>
-                              </m:r>
-                              <m:r>
-                                <a:rPr>
-                                  <a:latin typeface="Cambria Math" panose="02040503050406030204" pitchFamily="18" charset="0"/>
-                                </a:rPr>
-                                <m:t>1</m:t>
+                                <m:t>=1</m:t>
                               </m:r>
                             </m:sub>
                             <m:sup>
@@ -28448,7 +27995,7 @@
                                       <m:sSub>
                                         <m:sSubPr>
                                           <m:ctrlPr>
-                                            <a:rPr i="1">
+                                            <a:rPr>
                                               <a:latin typeface="Cambria Math" panose="02040503050406030204" pitchFamily="18" charset="0"/>
                                             </a:rPr>
                                           </m:ctrlPr>
@@ -28529,7 +28076,7 @@
                     <m:oMathParaPr>
                       <m:jc m:val="center"/>
                     </m:oMathParaPr>
-                    <m:oMath xmlns:m="http://schemas.openxmlformats.org/officeDocument/2006/math">
+                    <m:oMath>
                       <m:r>
                         <a:rPr>
                           <a:latin typeface="Cambria Math" panose="02040503050406030204" pitchFamily="18" charset="0"/>
@@ -28539,7 +28086,7 @@
                       <m:d>
                         <m:dPr>
                           <m:ctrlPr>
-                            <a:rPr i="1">
+                            <a:rPr>
                               <a:latin typeface="Cambria Math" panose="02040503050406030204" pitchFamily="18" charset="0"/>
                             </a:rPr>
                           </m:ctrlPr>
@@ -28586,7 +28133,7 @@
                       <m:f>
                         <m:fPr>
                           <m:ctrlPr>
-                            <a:rPr i="1">
+                            <a:rPr>
                               <a:latin typeface="Cambria Math" panose="02040503050406030204" pitchFamily="18" charset="0"/>
                             </a:rPr>
                           </m:ctrlPr>
@@ -28617,7 +28164,7 @@
                       <m:d>
                         <m:dPr>
                           <m:ctrlPr>
-                            <a:rPr i="1">
+                            <a:rPr>
                               <a:latin typeface="Cambria Math" panose="02040503050406030204" pitchFamily="18" charset="0"/>
                             </a:rPr>
                           </m:ctrlPr>
@@ -28638,7 +28185,7 @@
                           <m:sSup>
                             <m:sSupPr>
                               <m:ctrlPr>
-                                <a:rPr i="1">
+                                <a:rPr>
                                   <a:latin typeface="Cambria Math" panose="02040503050406030204" pitchFamily="18" charset="0"/>
                                 </a:rPr>
                               </m:ctrlPr>
@@ -28671,7 +28218,7 @@
                       <m:f>
                         <m:fPr>
                           <m:ctrlPr>
-                            <a:rPr i="1">
+                            <a:rPr>
                               <a:latin typeface="Cambria Math" panose="02040503050406030204" pitchFamily="18" charset="0"/>
                             </a:rPr>
                           </m:ctrlPr>
@@ -28694,7 +28241,7 @@
                           <m:sSup>
                             <m:sSupPr>
                               <m:ctrlPr>
-                                <a:rPr i="1">
+                                <a:rPr>
                                   <a:latin typeface="Cambria Math" panose="02040503050406030204" pitchFamily="18" charset="0"/>
                                 </a:rPr>
                               </m:ctrlPr>
@@ -28723,7 +28270,7 @@
                           <m:chr m:val="∑"/>
                           <m:limLoc m:val="undOvr"/>
                           <m:ctrlPr>
-                            <a:rPr i="1">
+                            <a:rPr>
                               <a:latin typeface="Cambria Math" panose="02040503050406030204" pitchFamily="18" charset="0"/>
                             </a:rPr>
                           </m:ctrlPr>
@@ -28739,13 +28286,7 @@
                             <a:rPr>
                               <a:latin typeface="Cambria Math" panose="02040503050406030204" pitchFamily="18" charset="0"/>
                             </a:rPr>
-                            <m:t>=</m:t>
-                          </m:r>
-                          <m:r>
-                            <a:rPr>
-                              <a:latin typeface="Cambria Math" panose="02040503050406030204" pitchFamily="18" charset="0"/>
-                            </a:rPr>
-                            <m:t>1</m:t>
+                            <m:t>=1</m:t>
                           </m:r>
                         </m:sub>
                         <m:sup>
@@ -28778,7 +28319,7 @@
                                   <m:sSub>
                                     <m:sSubPr>
                                       <m:ctrlPr>
-                                        <a:rPr i="1">
+                                        <a:rPr>
                                           <a:latin typeface="Cambria Math" panose="02040503050406030204" pitchFamily="18" charset="0"/>
                                         </a:rPr>
                                       </m:ctrlPr>
@@ -28844,7 +28385,7 @@
                     <m:d>
                       <m:dPr>
                         <m:ctrlPr>
-                          <a:rPr i="1">
+                          <a:rPr>
                             <a:latin typeface="Cambria Math" panose="02040503050406030204" pitchFamily="18" charset="0"/>
                           </a:rPr>
                         </m:ctrlPr>
@@ -28877,7 +28418,7 @@
             </p:txBody>
           </p:sp>
         </mc:Choice>
-        <mc:Fallback>
+        <mc:Fallback xmlns="">
           <p:sp>
             <p:nvSpPr>
               <p:cNvPr id="3" name="Content Placeholder 2"/>
@@ -28946,7 +28487,7 @@
             </a:pPr>
             <a:r>
               <a:rPr lang="en-US" b="1" dirty="0"/>
-              <a:t>Normal Likelihood</a:t>
+              <a:t>Example: Normal Likelihood</a:t>
             </a:r>
             <a:endParaRPr dirty="0"/>
           </a:p>
@@ -28977,8 +28518,8 @@
           <a:chExt cx="0" cy="0"/>
         </a:xfrm>
       </p:grpSpPr>
-      <mc:AlternateContent xmlns:mc="http://schemas.openxmlformats.org/markup-compatibility/2006">
-        <mc:Choice xmlns:a14="http://schemas.microsoft.com/office/drawing/2010/main" Requires="a14">
+      <mc:AlternateContent xmlns:mc="http://schemas.openxmlformats.org/markup-compatibility/2006" xmlns:a14="http://schemas.microsoft.com/office/drawing/2010/main">
+        <mc:Choice Requires="a14">
           <p:sp>
             <p:nvSpPr>
               <p:cNvPr id="3" name="Content Placeholder 2"/>
@@ -29091,7 +28632,7 @@
             </p:txBody>
           </p:sp>
         </mc:Choice>
-        <mc:Fallback>
+        <mc:Fallback xmlns="">
           <p:sp>
             <p:nvSpPr>
               <p:cNvPr id="3" name="Content Placeholder 2"/>
@@ -29220,7 +28761,7 @@
             </a:pPr>
             <a:r>
               <a:rPr lang="en-US" b="1" dirty="0"/>
-              <a:t>Normal Likelihood</a:t>
+              <a:t>Example: Normal Likelihood</a:t>
             </a:r>
             <a:endParaRPr dirty="0"/>
           </a:p>
@@ -29435,7 +28976,7 @@
             </a:pPr>
             <a:r>
               <a:rPr lang="en-US" b="1" dirty="0"/>
-              <a:t>Normal Likelihood</a:t>
+              <a:t>Example: Normal Likelihood</a:t>
             </a:r>
             <a:endParaRPr dirty="0"/>
           </a:p>
@@ -29471,8 +29012,8 @@
           <a:chExt cx="0" cy="0"/>
         </a:xfrm>
       </p:grpSpPr>
-      <mc:AlternateContent xmlns:mc="http://schemas.openxmlformats.org/markup-compatibility/2006">
-        <mc:Choice xmlns:a14="http://schemas.microsoft.com/office/drawing/2010/main" Requires="a14">
+      <mc:AlternateContent xmlns:mc="http://schemas.openxmlformats.org/markup-compatibility/2006" xmlns:a14="http://schemas.microsoft.com/office/drawing/2010/main">
+        <mc:Choice Requires="a14">
           <p:sp>
             <p:nvSpPr>
               <p:cNvPr id="3" name="Content Placeholder 2"/>
@@ -29540,13 +29081,7 @@
                       <a:rPr>
                         <a:latin typeface="Cambria Math" panose="02040503050406030204" pitchFamily="18" charset="0"/>
                       </a:rPr>
-                      <m:t>0</m:t>
-                    </m:r>
-                    <m:r>
-                      <a:rPr>
-                        <a:latin typeface="Cambria Math" panose="02040503050406030204" pitchFamily="18" charset="0"/>
-                      </a:rPr>
-                      <m:t>≤</m:t>
+                      <m:t>0≤</m:t>
                     </m:r>
                     <m:r>
                       <a:rPr>
@@ -29558,13 +29093,7 @@
                       <a:rPr>
                         <a:latin typeface="Cambria Math" panose="02040503050406030204" pitchFamily="18" charset="0"/>
                       </a:rPr>
-                      <m:t>≤</m:t>
-                    </m:r>
-                    <m:r>
-                      <a:rPr>
-                        <a:latin typeface="Cambria Math" panose="02040503050406030204" pitchFamily="18" charset="0"/>
-                      </a:rPr>
-                      <m:t>1</m:t>
+                      <m:t>≤1</m:t>
                     </m:r>
                   </m:oMath>
                 </a14:m>
@@ -29614,7 +29143,7 @@
                     <m:oMathParaPr>
                       <m:jc m:val="center"/>
                     </m:oMathParaPr>
-                    <m:oMath xmlns:m="http://schemas.openxmlformats.org/officeDocument/2006/math">
+                    <m:oMath>
                       <m:r>
                         <a:rPr>
                           <a:latin typeface="Cambria Math" panose="02040503050406030204" pitchFamily="18" charset="0"/>
@@ -29624,7 +29153,7 @@
                       <m:d>
                         <m:dPr>
                           <m:ctrlPr>
-                            <a:rPr i="1">
+                            <a:rPr>
                               <a:latin typeface="Cambria Math" panose="02040503050406030204" pitchFamily="18" charset="0"/>
                             </a:rPr>
                           </m:ctrlPr>
@@ -29681,7 +29210,7 @@
                             <m:fPr>
                               <m:type m:val="noBar"/>
                               <m:ctrlPr>
-                                <a:rPr i="1">
+                                <a:rPr>
                                   <a:latin typeface="Cambria Math" panose="02040503050406030204" pitchFamily="18" charset="0"/>
                                 </a:rPr>
                               </m:ctrlPr>
@@ -29708,7 +29237,7 @@
                       <m:sSup>
                         <m:sSupPr>
                           <m:ctrlPr>
-                            <a:rPr i="1">
+                            <a:rPr>
                               <a:latin typeface="Cambria Math" panose="02040503050406030204" pitchFamily="18" charset="0"/>
                             </a:rPr>
                           </m:ctrlPr>
@@ -29742,7 +29271,7 @@
                           <m:d>
                             <m:dPr>
                               <m:ctrlPr>
-                                <a:rPr i="1">
+                                <a:rPr>
                                   <a:latin typeface="Cambria Math" panose="02040503050406030204" pitchFamily="18" charset="0"/>
                                 </a:rPr>
                               </m:ctrlPr>
@@ -29752,13 +29281,7 @@
                                 <a:rPr>
                                   <a:latin typeface="Cambria Math" panose="02040503050406030204" pitchFamily="18" charset="0"/>
                                 </a:rPr>
-                                <m:t>1</m:t>
-                              </m:r>
-                              <m:r>
-                                <a:rPr>
-                                  <a:latin typeface="Cambria Math" panose="02040503050406030204" pitchFamily="18" charset="0"/>
-                                </a:rPr>
-                                <m:t>−</m:t>
+                                <m:t>1−</m:t>
                               </m:r>
                               <m:r>
                                 <a:rPr>
@@ -29811,7 +29334,7 @@
                     <m:oMathParaPr>
                       <m:jc m:val="center"/>
                     </m:oMathParaPr>
-                    <m:oMath xmlns:m="http://schemas.openxmlformats.org/officeDocument/2006/math">
+                    <m:oMath>
                       <m:r>
                         <a:rPr>
                           <a:latin typeface="Cambria Math" panose="02040503050406030204" pitchFamily="18" charset="0"/>
@@ -29821,7 +29344,7 @@
                       <m:d>
                         <m:dPr>
                           <m:ctrlPr>
-                            <a:rPr i="1">
+                            <a:rPr>
                               <a:latin typeface="Cambria Math" panose="02040503050406030204" pitchFamily="18" charset="0"/>
                             </a:rPr>
                           </m:ctrlPr>
@@ -29884,7 +29407,7 @@
                             <m:fPr>
                               <m:type m:val="noBar"/>
                               <m:ctrlPr>
-                                <a:rPr i="1">
+                                <a:rPr>
                                   <a:latin typeface="Cambria Math" panose="02040503050406030204" pitchFamily="18" charset="0"/>
                                 </a:rPr>
                               </m:ctrlPr>
@@ -29935,7 +29458,7 @@
                       <m:d>
                         <m:dPr>
                           <m:ctrlPr>
-                            <a:rPr i="1">
+                            <a:rPr>
                               <a:latin typeface="Cambria Math" panose="02040503050406030204" pitchFamily="18" charset="0"/>
                             </a:rPr>
                           </m:ctrlPr>
@@ -29958,7 +29481,7 @@
                       <m:d>
                         <m:dPr>
                           <m:ctrlPr>
-                            <a:rPr i="1">
+                            <a:rPr>
                               <a:latin typeface="Cambria Math" panose="02040503050406030204" pitchFamily="18" charset="0"/>
                             </a:rPr>
                           </m:ctrlPr>
@@ -29999,7 +29522,7 @@
                       <m:d>
                         <m:dPr>
                           <m:ctrlPr>
-                            <a:rPr i="1">
+                            <a:rPr>
                               <a:latin typeface="Cambria Math" panose="02040503050406030204" pitchFamily="18" charset="0"/>
                             </a:rPr>
                           </m:ctrlPr>
@@ -30009,13 +29532,7 @@
                             <a:rPr>
                               <a:latin typeface="Cambria Math" panose="02040503050406030204" pitchFamily="18" charset="0"/>
                             </a:rPr>
-                            <m:t>1</m:t>
-                          </m:r>
-                          <m:r>
-                            <a:rPr>
-                              <a:latin typeface="Cambria Math" panose="02040503050406030204" pitchFamily="18" charset="0"/>
-                            </a:rPr>
-                            <m:t>−</m:t>
+                            <m:t>1−</m:t>
                           </m:r>
                           <m:r>
                             <a:rPr>
@@ -30065,7 +29582,7 @@
             </p:txBody>
           </p:sp>
         </mc:Choice>
-        <mc:Fallback>
+        <mc:Fallback xmlns="">
           <p:sp>
             <p:nvSpPr>
               <p:cNvPr id="3" name="Content Placeholder 2"/>
@@ -30134,7 +29651,7 @@
             </a:pPr>
             <a:r>
               <a:rPr lang="en-US" b="1" dirty="0"/>
-              <a:t>Binomial Likelihood</a:t>
+              <a:t>Example: Binomial Likelihood</a:t>
             </a:r>
             <a:endParaRPr dirty="0"/>
           </a:p>

--- a/LectureSlides/05_ParameterEstimationAndLikelihood.pptx
+++ b/LectureSlides/05_ParameterEstimationAndLikelihood.pptx
@@ -29012,8 +29012,8 @@
           <a:chExt cx="0" cy="0"/>
         </a:xfrm>
       </p:grpSpPr>
-      <mc:AlternateContent xmlns:mc="http://schemas.openxmlformats.org/markup-compatibility/2006" xmlns:a14="http://schemas.microsoft.com/office/drawing/2010/main">
-        <mc:Choice Requires="a14">
+      <mc:AlternateContent xmlns:mc="http://schemas.openxmlformats.org/markup-compatibility/2006">
+        <mc:Choice xmlns:a14="http://schemas.microsoft.com/office/drawing/2010/main" Requires="a14">
           <p:sp>
             <p:nvSpPr>
               <p:cNvPr id="3" name="Content Placeholder 2"/>
@@ -29032,7 +29032,7 @@
             </p:spPr>
             <p:txBody>
               <a:bodyPr>
-                <a:normAutofit fontScale="85000" lnSpcReduction="20000"/>
+                <a:normAutofit fontScale="85000" lnSpcReduction="10000"/>
               </a:bodyPr>
               <a:lstStyle/>
               <a:p>
@@ -29040,25 +29040,25 @@
                   <a:buNone/>
                 </a:pPr>
                 <a:r>
-                  <a:rPr dirty="0"/>
+                  <a:rPr lang="en-US" dirty="0"/>
                   <a:t>Example of log-likelihood for the Binomial distribution</a:t>
                 </a:r>
               </a:p>
               <a:p>
                 <a:pPr lvl="0"/>
                 <a:r>
-                  <a:rPr dirty="0"/>
+                  <a:rPr lang="en-US" dirty="0"/>
                   <a:t>Binomial distribution models </a:t>
                 </a:r>
                 <a:r>
-                  <a:rPr b="1" dirty="0"/>
+                  <a:rPr lang="en-US" b="1" dirty="0"/>
                   <a:t>discrete events</a:t>
                 </a:r>
               </a:p>
               <a:p>
                 <a:pPr lvl="0"/>
                 <a:r>
-                  <a:rPr dirty="0"/>
+                  <a:rPr lang="en-US" dirty="0"/>
                   <a:t>Range of the single parameter, </a:t>
                 </a:r>
                 <a14:m>
@@ -29072,7 +29072,7 @@
                   </m:oMath>
                 </a14:m>
                 <a:r>
-                  <a:rPr dirty="0"/>
+                  <a:rPr lang="en-US" dirty="0"/>
                   <a:t>, restricted to </a:t>
                 </a:r>
                 <a14:m>
@@ -29097,12 +29097,12 @@
                     </m:r>
                   </m:oMath>
                 </a14:m>
-                <a:endParaRPr dirty="0"/>
+                <a:endParaRPr lang="en-US" dirty="0"/>
               </a:p>
               <a:p>
                 <a:pPr lvl="0"/>
                 <a:r>
-                  <a:rPr dirty="0"/>
+                  <a:rPr lang="en-US" dirty="0"/>
                   <a:t>Binomial distribution has the following probability mass function (PMF) for </a:t>
                 </a:r>
                 <a14:m>
@@ -29116,7 +29116,7 @@
                   </m:oMath>
                 </a14:m>
                 <a:r>
-                  <a:rPr dirty="0"/>
+                  <a:rPr lang="en-US" dirty="0"/>
                   <a:t> successes in </a:t>
                 </a:r>
                 <a14:m>
@@ -29130,7 +29130,7 @@
                   </m:oMath>
                 </a14:m>
                 <a:r>
-                  <a:rPr dirty="0"/>
+                  <a:rPr lang="en-US" dirty="0"/>
                   <a:t> trials:</a:t>
                 </a:r>
               </a:p>
@@ -29225,10 +29225,10 @@
                             </m:num>
                             <m:den>
                               <m:r>
-                                <a:rPr>
+                                <a:rPr b="0" i="1" smtClean="0">
                                   <a:latin typeface="Cambria Math" panose="02040503050406030204" pitchFamily="18" charset="0"/>
                                 </a:rPr>
-                                <m:t>𝑦</m:t>
+                                <m:t>𝑘</m:t>
                               </m:r>
                             </m:den>
                           </m:f>
@@ -29316,12 +29316,12 @@
                     </m:oMath>
                   </m:oMathPara>
                 </a14:m>
-                <a:endParaRPr dirty="0"/>
+                <a:endParaRPr lang="en-US" dirty="0"/>
               </a:p>
               <a:p>
                 <a:pPr lvl="0"/>
                 <a:r>
-                  <a:rPr dirty="0"/>
+                  <a:rPr lang="en-US" dirty="0"/>
                   <a:t>Log-likelihood is easily found:</a:t>
                 </a:r>
               </a:p>
@@ -29545,12 +29545,12 @@
                     </m:oMath>
                   </m:oMathPara>
                 </a14:m>
-                <a:endParaRPr dirty="0"/>
+                <a:endParaRPr lang="en-US" dirty="0"/>
               </a:p>
               <a:p>
                 <a:pPr lvl="0"/>
                 <a:r>
-                  <a:rPr dirty="0"/>
+                  <a:rPr lang="en-US" dirty="0"/>
                   <a:t>Binomial log-likelihood has a strong dependence on both the sample size, </a:t>
                 </a:r>
                 <a14:m>
@@ -29564,7 +29564,7 @@
                   </m:oMath>
                 </a14:m>
                 <a:r>
-                  <a:rPr dirty="0"/>
+                  <a:rPr lang="en-US" dirty="0"/>
                   <a:t> and the number of successes, </a:t>
                 </a:r>
                 <a14:m>
@@ -29582,7 +29582,7 @@
             </p:txBody>
           </p:sp>
         </mc:Choice>
-        <mc:Fallback xmlns="">
+        <mc:Fallback>
           <p:sp>
             <p:nvSpPr>
               <p:cNvPr id="3" name="Content Placeholder 2"/>
@@ -29601,7 +29601,7 @@
               <a:blipFill>
                 <a:blip r:embed="rId2"/>
                 <a:stretch>
-                  <a:fillRect l="-741" t="-2447" r="-1259"/>
+                  <a:fillRect l="-741" t="-1794" r="-1259" b="-1142"/>
                 </a:stretch>
               </a:blipFill>
             </p:spPr>
